--- a/doc/Automated-End-to-End-Testing-of-GOGcom.pptx
+++ b/doc/Automated-End-to-End-Testing-of-GOGcom.pptx
@@ -4,6 +4,9 @@
   <p:sldMasterIdLst>
     <p:sldMasterId id="2147483648" r:id="rId1"/>
   </p:sldMasterIdLst>
+  <p:notesMasterIdLst>
+    <p:notesMasterId r:id="rId13"/>
+  </p:notesMasterIdLst>
   <p:sldIdLst>
     <p:sldId id="256" r:id="rId2"/>
     <p:sldId id="257" r:id="rId3"/>
@@ -15,46 +18,116 @@
     <p:sldId id="263" r:id="rId9"/>
     <p:sldId id="264" r:id="rId10"/>
     <p:sldId id="265" r:id="rId11"/>
+    <p:sldId id="266" r:id="rId12"/>
   </p:sldIdLst>
-  <p:notesMasterIdLst>
-    <p:notesMasterId r:id="rId12"/>
-  </p:notesMasterIdLst>
   <p:sldSz cx="14630400" cy="8229600"/>
   <p:notesSz cx="8229600" cy="14630400"/>
   <p:embeddedFontLst>
     <p:embeddedFont>
-      <p:font typeface="Inter"/>
-      <p:regular r:id="rId17"/>
-    </p:embeddedFont>
-    <p:embeddedFont>
-      <p:font typeface="Inter"/>
-      <p:regular r:id="rId18"/>
-    </p:embeddedFont>
-    <p:embeddedFont>
-      <p:font typeface="Inter"/>
-      <p:regular r:id="rId19"/>
-    </p:embeddedFont>
-    <p:embeddedFont>
-      <p:font typeface="Inter"/>
-      <p:regular r:id="rId20"/>
-    </p:embeddedFont>
-    <p:embeddedFont>
-      <p:font typeface="Inter"/>
-      <p:regular r:id="rId21"/>
-    </p:embeddedFont>
-    <p:embeddedFont>
-      <p:font typeface="Inter"/>
-      <p:regular r:id="rId22"/>
-    </p:embeddedFont>
-    <p:embeddedFont>
-      <p:font typeface="Inter"/>
-      <p:regular r:id="rId23"/>
-    </p:embeddedFont>
-    <p:embeddedFont>
-      <p:font typeface="Inter"/>
-      <p:regular r:id="rId24"/>
+      <p:font typeface="Inter" panose="020B0604020202020204" charset="0"/>
+      <p:regular r:id="rId14"/>
     </p:embeddedFont>
   </p:embeddedFontLst>
+  <p:defaultTextStyle>
+    <a:defPPr>
+      <a:defRPr lang="en-US"/>
+    </a:defPPr>
+    <a:lvl1pPr marL="0" algn="l" defTabSz="914400" rtl="0" eaLnBrk="1" latinLnBrk="0" hangingPunct="1">
+      <a:defRPr sz="1800" kern="1200">
+        <a:solidFill>
+          <a:schemeClr val="tx1"/>
+        </a:solidFill>
+        <a:latin typeface="+mn-lt"/>
+        <a:ea typeface="+mn-ea"/>
+        <a:cs typeface="+mn-cs"/>
+      </a:defRPr>
+    </a:lvl1pPr>
+    <a:lvl2pPr marL="457200" algn="l" defTabSz="914400" rtl="0" eaLnBrk="1" latinLnBrk="0" hangingPunct="1">
+      <a:defRPr sz="1800" kern="1200">
+        <a:solidFill>
+          <a:schemeClr val="tx1"/>
+        </a:solidFill>
+        <a:latin typeface="+mn-lt"/>
+        <a:ea typeface="+mn-ea"/>
+        <a:cs typeface="+mn-cs"/>
+      </a:defRPr>
+    </a:lvl2pPr>
+    <a:lvl3pPr marL="914400" algn="l" defTabSz="914400" rtl="0" eaLnBrk="1" latinLnBrk="0" hangingPunct="1">
+      <a:defRPr sz="1800" kern="1200">
+        <a:solidFill>
+          <a:schemeClr val="tx1"/>
+        </a:solidFill>
+        <a:latin typeface="+mn-lt"/>
+        <a:ea typeface="+mn-ea"/>
+        <a:cs typeface="+mn-cs"/>
+      </a:defRPr>
+    </a:lvl3pPr>
+    <a:lvl4pPr marL="1371600" algn="l" defTabSz="914400" rtl="0" eaLnBrk="1" latinLnBrk="0" hangingPunct="1">
+      <a:defRPr sz="1800" kern="1200">
+        <a:solidFill>
+          <a:schemeClr val="tx1"/>
+        </a:solidFill>
+        <a:latin typeface="+mn-lt"/>
+        <a:ea typeface="+mn-ea"/>
+        <a:cs typeface="+mn-cs"/>
+      </a:defRPr>
+    </a:lvl4pPr>
+    <a:lvl5pPr marL="1828800" algn="l" defTabSz="914400" rtl="0" eaLnBrk="1" latinLnBrk="0" hangingPunct="1">
+      <a:defRPr sz="1800" kern="1200">
+        <a:solidFill>
+          <a:schemeClr val="tx1"/>
+        </a:solidFill>
+        <a:latin typeface="+mn-lt"/>
+        <a:ea typeface="+mn-ea"/>
+        <a:cs typeface="+mn-cs"/>
+      </a:defRPr>
+    </a:lvl5pPr>
+    <a:lvl6pPr marL="2286000" algn="l" defTabSz="914400" rtl="0" eaLnBrk="1" latinLnBrk="0" hangingPunct="1">
+      <a:defRPr sz="1800" kern="1200">
+        <a:solidFill>
+          <a:schemeClr val="tx1"/>
+        </a:solidFill>
+        <a:latin typeface="+mn-lt"/>
+        <a:ea typeface="+mn-ea"/>
+        <a:cs typeface="+mn-cs"/>
+      </a:defRPr>
+    </a:lvl6pPr>
+    <a:lvl7pPr marL="2743200" algn="l" defTabSz="914400" rtl="0" eaLnBrk="1" latinLnBrk="0" hangingPunct="1">
+      <a:defRPr sz="1800" kern="1200">
+        <a:solidFill>
+          <a:schemeClr val="tx1"/>
+        </a:solidFill>
+        <a:latin typeface="+mn-lt"/>
+        <a:ea typeface="+mn-ea"/>
+        <a:cs typeface="+mn-cs"/>
+      </a:defRPr>
+    </a:lvl7pPr>
+    <a:lvl8pPr marL="3200400" algn="l" defTabSz="914400" rtl="0" eaLnBrk="1" latinLnBrk="0" hangingPunct="1">
+      <a:defRPr sz="1800" kern="1200">
+        <a:solidFill>
+          <a:schemeClr val="tx1"/>
+        </a:solidFill>
+        <a:latin typeface="+mn-lt"/>
+        <a:ea typeface="+mn-ea"/>
+        <a:cs typeface="+mn-cs"/>
+      </a:defRPr>
+    </a:lvl8pPr>
+    <a:lvl9pPr marL="3657600" algn="l" defTabSz="914400" rtl="0" eaLnBrk="1" latinLnBrk="0" hangingPunct="1">
+      <a:defRPr sz="1800" kern="1200">
+        <a:solidFill>
+          <a:schemeClr val="tx1"/>
+        </a:solidFill>
+        <a:latin typeface="+mn-lt"/>
+        <a:ea typeface="+mn-ea"/>
+        <a:cs typeface="+mn-cs"/>
+      </a:defRPr>
+    </a:lvl9pPr>
+  </p:defaultTextStyle>
+  <p:extLst>
+    <p:ext uri="{EFAFB233-063F-42B5-8137-9DF3F51BA10A}">
+      <p15:sldGuideLst xmlns:p15="http://schemas.microsoft.com/office/powerpoint/2012/main"/>
+    </p:ext>
+  </p:extLst>
 </p:presentation>
 </file>
 
@@ -80,234 +153,10 @@
           <a:chExt cx="0" cy="0"/>
         </a:xfrm>
       </p:grpSpPr>
-      <p:sp>
-        <p:nvSpPr>
-          <p:cNvPr id="2" name="Header Placeholder 1"/>
-          <p:cNvSpPr>
-            <a:spLocks noGrp="1"/>
-          </p:cNvSpPr>
-          <p:nvPr>
-            <p:ph type="hdr" sz="quarter"/>
-          </p:nvPr>
-        </p:nvSpPr>
-        <p:spPr>
-          <a:xfrm>
-            <a:off x="0" y="0"/>
-            <a:ext cx="2971800" cy="458788"/>
-          </a:xfrm>
-          <a:prstGeom prst="rect">
-            <a:avLst/>
-          </a:prstGeom>
-        </p:spPr>
-        <p:txBody>
-          <a:bodyPr vert="horz" lIns="91440" tIns="45720" rIns="91440" bIns="45720" rtlCol="0"/>
-          <a:lstStyle>
-            <a:lvl1pPr algn="l">
-              <a:defRPr sz="1200"/>
-            </a:lvl1pPr>
-          </a:lstStyle>
-          <a:p>
-            <a:endParaRPr lang="en-US"/>
-          </a:p>
-        </p:txBody>
-      </p:sp>
-      <p:sp>
-        <p:nvSpPr>
-          <p:cNvPr id="3" name="Date Placeholder 2"/>
-          <p:cNvSpPr>
-            <a:spLocks noGrp="1"/>
-          </p:cNvSpPr>
-          <p:nvPr>
-            <p:ph type="dt" idx="1"/>
-          </p:nvPr>
-        </p:nvSpPr>
-        <p:spPr>
-          <a:xfrm>
-            <a:off x="3884613" y="0"/>
-            <a:ext cx="2971800" cy="458788"/>
-          </a:xfrm>
-          <a:prstGeom prst="rect">
-            <a:avLst/>
-          </a:prstGeom>
-        </p:spPr>
-        <p:txBody>
-          <a:bodyPr vert="horz" lIns="91440" tIns="45720" rIns="91440" bIns="45720" rtlCol="0"/>
-          <a:lstStyle>
-            <a:lvl1pPr algn="r">
-              <a:defRPr sz="1200"/>
-            </a:lvl1pPr>
-          </a:lstStyle>
-          <a:p>
-            <a:fld id="{5282F153-3F37-0F45-9E97-73ACFA13230C}" type="datetimeFigureOut">
-              <a:rPr lang="en-US"/>
-              <a:t>7/23/19</a:t>
-            </a:fld>
-            <a:endParaRPr lang="en-US"/>
-          </a:p>
-        </p:txBody>
-      </p:sp>
-      <p:sp>
-        <p:nvSpPr>
-          <p:cNvPr id="4" name="Slide Image Placeholder 3"/>
-          <p:cNvSpPr>
-            <a:spLocks noGrp="1" noRot="1" noChangeAspect="1"/>
-          </p:cNvSpPr>
-          <p:nvPr>
-            <p:ph type="sldImg" idx="2"/>
-          </p:nvPr>
-        </p:nvSpPr>
-        <p:spPr>
-          <a:xfrm>
-            <a:off x="685800" y="1143000"/>
-            <a:ext cx="5486400" cy="3086100"/>
-          </a:xfrm>
-          <a:prstGeom prst="rect">
-            <a:avLst/>
-          </a:prstGeom>
-          <a:noFill/>
-          <a:ln w="12700">
-            <a:solidFill>
-              <a:prstClr val="black"/>
-            </a:solidFill>
-          </a:ln>
-        </p:spPr>
-        <p:txBody>
-          <a:bodyPr vert="horz" lIns="91440" tIns="45720" rIns="91440" bIns="45720" rtlCol="0" anchor="ctr"/>
-          <a:lstStyle/>
-          <a:p>
-            <a:endParaRPr lang="en-US"/>
-          </a:p>
-        </p:txBody>
-      </p:sp>
-      <p:sp>
-        <p:nvSpPr>
-          <p:cNvPr id="5" name="Notes Placeholder 4"/>
-          <p:cNvSpPr>
-            <a:spLocks noGrp="1"/>
-          </p:cNvSpPr>
-          <p:nvPr>
-            <p:ph type="body" sz="quarter" idx="3"/>
-          </p:nvPr>
-        </p:nvSpPr>
-        <p:spPr>
-          <a:xfrm>
-            <a:off x="685800" y="4400550"/>
-            <a:ext cx="5486400" cy="3600450"/>
-          </a:xfrm>
-          <a:prstGeom prst="rect">
-            <a:avLst/>
-          </a:prstGeom>
-        </p:spPr>
-        <p:txBody>
-          <a:bodyPr vert="horz" lIns="91440" tIns="45720" rIns="91440" bIns="45720" rtlCol="0"/>
-          <a:lstStyle/>
-          <a:p>
-            <a:pPr lvl="0"/>
-            <a:r>
-              <a:rPr lang="en-US"/>
-              <a:t>Click to edit Master text styles</a:t>
-            </a:r>
-          </a:p>
-          <a:p>
-            <a:pPr lvl="1"/>
-            <a:r>
-              <a:rPr lang="en-US"/>
-              <a:t>Second level</a:t>
-            </a:r>
-          </a:p>
-          <a:p>
-            <a:pPr lvl="2"/>
-            <a:r>
-              <a:rPr lang="en-US"/>
-              <a:t>Third level</a:t>
-            </a:r>
-          </a:p>
-          <a:p>
-            <a:pPr lvl="3"/>
-            <a:r>
-              <a:rPr lang="en-US"/>
-              <a:t>Fourth level</a:t>
-            </a:r>
-          </a:p>
-          <a:p>
-            <a:pPr lvl="4"/>
-            <a:r>
-              <a:rPr lang="en-US"/>
-              <a:t>Fifth level</a:t>
-            </a:r>
-          </a:p>
-        </p:txBody>
-      </p:sp>
-      <p:sp>
-        <p:nvSpPr>
-          <p:cNvPr id="6" name="Footer Placeholder 5"/>
-          <p:cNvSpPr>
-            <a:spLocks noGrp="1"/>
-          </p:cNvSpPr>
-          <p:nvPr>
-            <p:ph type="ftr" sz="quarter" idx="4"/>
-          </p:nvPr>
-        </p:nvSpPr>
-        <p:spPr>
-          <a:xfrm>
-            <a:off x="0" y="8685213"/>
-            <a:ext cx="2971800" cy="458787"/>
-          </a:xfrm>
-          <a:prstGeom prst="rect">
-            <a:avLst/>
-          </a:prstGeom>
-        </p:spPr>
-        <p:txBody>
-          <a:bodyPr vert="horz" lIns="91440" tIns="45720" rIns="91440" bIns="45720" rtlCol="0" anchor="b"/>
-          <a:lstStyle>
-            <a:lvl1pPr algn="l">
-              <a:defRPr sz="1200"/>
-            </a:lvl1pPr>
-          </a:lstStyle>
-          <a:p>
-            <a:endParaRPr lang="en-US"/>
-          </a:p>
-        </p:txBody>
-      </p:sp>
-      <p:sp>
-        <p:nvSpPr>
-          <p:cNvPr id="7" name="Slide Number Placeholder 6"/>
-          <p:cNvSpPr>
-            <a:spLocks noGrp="1"/>
-          </p:cNvSpPr>
-          <p:nvPr>
-            <p:ph type="sldNum" sz="quarter" idx="5"/>
-          </p:nvPr>
-        </p:nvSpPr>
-        <p:spPr>
-          <a:xfrm>
-            <a:off x="3884613" y="8685213"/>
-            <a:ext cx="2971800" cy="458787"/>
-          </a:xfrm>
-          <a:prstGeom prst="rect">
-            <a:avLst/>
-          </a:prstGeom>
-        </p:spPr>
-        <p:txBody>
-          <a:bodyPr vert="horz" lIns="91440" tIns="45720" rIns="91440" bIns="45720" rtlCol="0" anchor="b"/>
-          <a:lstStyle>
-            <a:lvl1pPr algn="r">
-              <a:defRPr sz="1200"/>
-            </a:lvl1pPr>
-          </a:lstStyle>
-          <a:p>
-            <a:fld id="{CE5E9CC1-C706-0F49-92D6-E571CC5EEA8F}" type="slidenum">
-              <a:rPr lang="en-US"/>
-              <a:t>‹#›</a:t>
-            </a:fld>
-            <a:endParaRPr lang="en-US"/>
-          </a:p>
-        </p:txBody>
-      </p:sp>
     </p:spTree>
     <p:extLst>
       <p:ext uri="{BB962C8B-B14F-4D97-AF65-F5344CB8AC3E}">
-        <p14:creationId xmlns:p14="http://schemas.microsoft.com/office/powerpoint/2010/main" val="1024086991"/>
+        <p14:creationId xmlns:p14="http://schemas.microsoft.com/office/powerpoint/2010/main" val="1349708150"/>
       </p:ext>
     </p:extLst>
   </p:cSld>
@@ -451,10 +300,6 @@
           <a:bodyPr/>
           <a:lstStyle/>
           <a:p>
-            <a:r>
-              <a:rPr lang="en-US" dirty="0"/>
-              <a:t/>
-            </a:r>
             <a:endParaRPr lang="en-US" dirty="0"/>
           </a:p>
         </p:txBody>
@@ -539,10 +384,6 @@
           <a:bodyPr/>
           <a:lstStyle/>
           <a:p>
-            <a:r>
-              <a:rPr lang="en-US" dirty="0"/>
-              <a:t/>
-            </a:r>
             <a:endParaRPr lang="en-US" dirty="0"/>
           </a:p>
         </p:txBody>
@@ -627,10 +468,6 @@
           <a:bodyPr/>
           <a:lstStyle/>
           <a:p>
-            <a:r>
-              <a:rPr lang="en-US" dirty="0"/>
-              <a:t/>
-            </a:r>
             <a:endParaRPr lang="en-US" dirty="0"/>
           </a:p>
         </p:txBody>
@@ -715,10 +552,6 @@
           <a:bodyPr/>
           <a:lstStyle/>
           <a:p>
-            <a:r>
-              <a:rPr lang="en-US" dirty="0"/>
-              <a:t/>
-            </a:r>
             <a:endParaRPr lang="en-US" dirty="0"/>
           </a:p>
         </p:txBody>
@@ -803,10 +636,6 @@
           <a:bodyPr/>
           <a:lstStyle/>
           <a:p>
-            <a:r>
-              <a:rPr lang="en-US" dirty="0"/>
-              <a:t/>
-            </a:r>
             <a:endParaRPr lang="en-US" dirty="0"/>
           </a:p>
         </p:txBody>
@@ -891,10 +720,6 @@
           <a:bodyPr/>
           <a:lstStyle/>
           <a:p>
-            <a:r>
-              <a:rPr lang="en-US" dirty="0"/>
-              <a:t/>
-            </a:r>
             <a:endParaRPr lang="en-US" dirty="0"/>
           </a:p>
         </p:txBody>
@@ -979,10 +804,6 @@
           <a:bodyPr/>
           <a:lstStyle/>
           <a:p>
-            <a:r>
-              <a:rPr lang="en-US" dirty="0"/>
-              <a:t/>
-            </a:r>
             <a:endParaRPr lang="en-US" dirty="0"/>
           </a:p>
         </p:txBody>
@@ -1067,10 +888,6 @@
           <a:bodyPr/>
           <a:lstStyle/>
           <a:p>
-            <a:r>
-              <a:rPr lang="en-US" dirty="0"/>
-              <a:t/>
-            </a:r>
             <a:endParaRPr lang="en-US" dirty="0"/>
           </a:p>
         </p:txBody>
@@ -1155,10 +972,6 @@
           <a:bodyPr/>
           <a:lstStyle/>
           <a:p>
-            <a:r>
-              <a:rPr lang="en-US" dirty="0"/>
-              <a:t/>
-            </a:r>
             <a:endParaRPr lang="en-US" dirty="0"/>
           </a:p>
         </p:txBody>
@@ -1243,10 +1056,6 @@
           <a:bodyPr/>
           <a:lstStyle/>
           <a:p>
-            <a:r>
-              <a:rPr lang="en-US" dirty="0"/>
-              <a:t/>
-            </a:r>
             <a:endParaRPr lang="en-US" dirty="0"/>
           </a:p>
         </p:txBody>
@@ -1377,7 +1186,7 @@
       <p:pic>
         <p:nvPicPr>
           <p:cNvPr id="4" name="Image 0" descr="preencoded.png">
-            <a:hlinkClick r:id="rId2" tooltip=""/>
+            <a:hlinkClick r:id="rId2"/>
           </p:cNvPr>
           <p:cNvPicPr>
             <a:picLocks noChangeAspect="1"/>
@@ -1385,7 +1194,7 @@
           <p:nvPr/>
         </p:nvPicPr>
         <p:blipFill>
-          <a:blip r:embed="rId1"/>
+          <a:blip r:embed="rId3"/>
           <a:stretch>
             <a:fillRect/>
           </a:stretch>
@@ -1468,7 +1277,7 @@
       <p:pic>
         <p:nvPicPr>
           <p:cNvPr id="4" name="Image 0" descr="preencoded.png">
-            <a:hlinkClick r:id="rId2" tooltip=""/>
+            <a:hlinkClick r:id="rId2"/>
           </p:cNvPr>
           <p:cNvPicPr>
             <a:picLocks noChangeAspect="1"/>
@@ -1476,7 +1285,7 @@
           <p:nvPr/>
         </p:nvPicPr>
         <p:blipFill>
-          <a:blip r:embed="rId1"/>
+          <a:blip r:embed="rId3"/>
           <a:stretch>
             <a:fillRect/>
           </a:stretch>
@@ -1535,6 +1344,13 @@
           </a:solidFill>
           <a:ln/>
         </p:spPr>
+        <p:txBody>
+          <a:bodyPr/>
+          <a:lstStyle/>
+          <a:p>
+            <a:endParaRPr lang="en-US"/>
+          </a:p>
+        </p:txBody>
       </p:sp>
       <p:sp>
         <p:nvSpPr>
@@ -1555,11 +1371,18 @@
           </a:solidFill>
           <a:ln/>
         </p:spPr>
+        <p:txBody>
+          <a:bodyPr/>
+          <a:lstStyle/>
+          <a:p>
+            <a:endParaRPr lang="en-US"/>
+          </a:p>
+        </p:txBody>
       </p:sp>
       <p:pic>
         <p:nvPicPr>
           <p:cNvPr id="4" name="Image 0" descr="preencoded.png">
-            <a:hlinkClick r:id="rId2" tooltip=""/>
+            <a:hlinkClick r:id="rId2"/>
           </p:cNvPr>
           <p:cNvPicPr>
             <a:picLocks noChangeAspect="1"/>
@@ -1567,7 +1390,7 @@
           <p:nvPr/>
         </p:nvPicPr>
         <p:blipFill>
-          <a:blip r:embed="rId1"/>
+          <a:blip r:embed="rId3"/>
           <a:stretch>
             <a:fillRect/>
           </a:stretch>
@@ -1650,7 +1473,7 @@
       <p:pic>
         <p:nvPicPr>
           <p:cNvPr id="4" name="Image 0" descr="preencoded.png">
-            <a:hlinkClick r:id="rId2" tooltip=""/>
+            <a:hlinkClick r:id="rId2"/>
           </p:cNvPr>
           <p:cNvPicPr>
             <a:picLocks noChangeAspect="1"/>
@@ -1658,7 +1481,7 @@
           <p:nvPr/>
         </p:nvPicPr>
         <p:blipFill>
-          <a:blip r:embed="rId1"/>
+          <a:blip r:embed="rId3"/>
           <a:stretch>
             <a:fillRect/>
           </a:stretch>
@@ -1741,7 +1564,7 @@
       <p:pic>
         <p:nvPicPr>
           <p:cNvPr id="4" name="Image 0" descr="preencoded.png">
-            <a:hlinkClick r:id="rId2" tooltip=""/>
+            <a:hlinkClick r:id="rId2"/>
           </p:cNvPr>
           <p:cNvPicPr>
             <a:picLocks noChangeAspect="1"/>
@@ -1749,7 +1572,7 @@
           <p:nvPr/>
         </p:nvPicPr>
         <p:blipFill>
-          <a:blip r:embed="rId1"/>
+          <a:blip r:embed="rId3"/>
           <a:stretch>
             <a:fillRect/>
           </a:stretch>
@@ -1832,7 +1655,7 @@
       <p:pic>
         <p:nvPicPr>
           <p:cNvPr id="4" name="Image 0" descr="preencoded.png">
-            <a:hlinkClick r:id="rId2" tooltip=""/>
+            <a:hlinkClick r:id="rId2"/>
           </p:cNvPr>
           <p:cNvPicPr>
             <a:picLocks noChangeAspect="1"/>
@@ -1840,7 +1663,7 @@
           <p:nvPr/>
         </p:nvPicPr>
         <p:blipFill>
-          <a:blip r:embed="rId1"/>
+          <a:blip r:embed="rId3"/>
           <a:stretch>
             <a:fillRect/>
           </a:stretch>
@@ -1923,7 +1746,7 @@
       <p:pic>
         <p:nvPicPr>
           <p:cNvPr id="4" name="Image 0" descr="preencoded.png">
-            <a:hlinkClick r:id="rId2" tooltip=""/>
+            <a:hlinkClick r:id="rId2"/>
           </p:cNvPr>
           <p:cNvPicPr>
             <a:picLocks noChangeAspect="1"/>
@@ -1931,7 +1754,7 @@
           <p:nvPr/>
         </p:nvPicPr>
         <p:blipFill>
-          <a:blip r:embed="rId1"/>
+          <a:blip r:embed="rId3"/>
           <a:stretch>
             <a:fillRect/>
           </a:stretch>
@@ -2014,7 +1837,7 @@
       <p:pic>
         <p:nvPicPr>
           <p:cNvPr id="4" name="Image 0" descr="preencoded.png">
-            <a:hlinkClick r:id="rId2" tooltip=""/>
+            <a:hlinkClick r:id="rId2"/>
           </p:cNvPr>
           <p:cNvPicPr>
             <a:picLocks noChangeAspect="1"/>
@@ -2022,7 +1845,7 @@
           <p:nvPr/>
         </p:nvPicPr>
         <p:blipFill>
-          <a:blip r:embed="rId1"/>
+          <a:blip r:embed="rId3"/>
           <a:stretch>
             <a:fillRect/>
           </a:stretch>
@@ -2105,7 +1928,7 @@
       <p:pic>
         <p:nvPicPr>
           <p:cNvPr id="4" name="Image 0" descr="preencoded.png">
-            <a:hlinkClick r:id="rId2" tooltip=""/>
+            <a:hlinkClick r:id="rId2"/>
           </p:cNvPr>
           <p:cNvPicPr>
             <a:picLocks noChangeAspect="1"/>
@@ -2113,7 +1936,7 @@
           <p:nvPr/>
         </p:nvPicPr>
         <p:blipFill>
-          <a:blip r:embed="rId1"/>
+          <a:blip r:embed="rId3"/>
           <a:stretch>
             <a:fillRect/>
           </a:stretch>
@@ -2196,7 +2019,7 @@
       <p:pic>
         <p:nvPicPr>
           <p:cNvPr id="4" name="Image 0" descr="preencoded.png">
-            <a:hlinkClick r:id="rId2" tooltip=""/>
+            <a:hlinkClick r:id="rId2"/>
           </p:cNvPr>
           <p:cNvPicPr>
             <a:picLocks noChangeAspect="1"/>
@@ -2204,7 +2027,7 @@
           <p:nvPr/>
         </p:nvPicPr>
         <p:blipFill>
-          <a:blip r:embed="rId1"/>
+          <a:blip r:embed="rId3"/>
           <a:stretch>
             <a:fillRect/>
           </a:stretch>
@@ -2230,6 +2053,11 @@
 <file path=ppt/slideMasters/slideMaster1.xml><?xml version="1.0" encoding="utf-8"?>
 <p:sldMaster xmlns:a="http://schemas.openxmlformats.org/drawingml/2006/main" xmlns:r="http://schemas.openxmlformats.org/officeDocument/2006/relationships" xmlns:p="http://schemas.openxmlformats.org/presentationml/2006/main">
   <p:cSld>
+    <p:bg>
+      <p:bgRef idx="1001">
+        <a:schemeClr val="bg1"/>
+      </p:bgRef>
+    </p:bg>
     <p:spTree>
       <p:nvGrpSpPr>
         <p:cNvPr id="1" name=""/>
@@ -2533,14 +2361,14 @@
       </p:grpSpPr>
       <p:pic>
         <p:nvPicPr>
-          <p:cNvPr id="2" name="Image 0" descr="preencoded.png">    </p:cNvPr>
+          <p:cNvPr id="2" name="Image 0" descr="preencoded.png"/>
           <p:cNvPicPr>
             <a:picLocks noChangeAspect="1"/>
           </p:cNvPicPr>
           <p:nvPr/>
         </p:nvPicPr>
         <p:blipFill>
-          <a:blip r:embed="rId1"/>
+          <a:blip r:embed="rId3"/>
           <a:stretch>
             <a:fillRect/>
           </a:stretch>
@@ -2574,17 +2402,24 @@
           </a:solidFill>
           <a:ln/>
         </p:spPr>
+        <p:txBody>
+          <a:bodyPr/>
+          <a:lstStyle/>
+          <a:p>
+            <a:endParaRPr lang="en-US"/>
+          </a:p>
+        </p:txBody>
       </p:sp>
       <p:pic>
         <p:nvPicPr>
-          <p:cNvPr id="4" name="Image 1" descr="preencoded.png">    </p:cNvPr>
+          <p:cNvPr id="4" name="Image 1" descr="preencoded.png"/>
           <p:cNvPicPr>
             <a:picLocks noChangeAspect="1"/>
           </p:cNvPicPr>
           <p:nvPr/>
         </p:nvPicPr>
         <p:blipFill>
-          <a:blip r:embed="rId2"/>
+          <a:blip r:embed="rId4"/>
           <a:stretch>
             <a:fillRect/>
           </a:stretch>
@@ -2620,7 +2455,7 @@
           <a:bodyPr wrap="square" lIns="0" tIns="0" rIns="0" bIns="0" rtlCol="0" anchor="t"/>
           <a:lstStyle/>
           <a:p>
-            <a:pPr algn="l" indent="0" marL="0">
+            <a:pPr marL="0" indent="0" algn="l">
               <a:lnSpc>
                 <a:spcPts val="4850"/>
               </a:lnSpc>
@@ -2637,12 +2472,6 @@
               </a:rPr>
               <a:t>Automated End-to-End Testing of </a:t>
             </a:r>
-            <a:pPr algn="l" indent="0" marL="0">
-              <a:lnSpc>
-                <a:spcPts val="4850"/>
-              </a:lnSpc>
-              <a:buNone/>
-            </a:pPr>
             <a:r>
               <a:rPr lang="en-US" sz="3900" b="1" u="sng" dirty="0">
                 <a:solidFill>
@@ -2651,7 +2480,7 @@
                 <a:latin typeface="Inter Bold" pitchFamily="34" charset="0"/>
                 <a:ea typeface="Inter Bold" pitchFamily="34" charset="-122"/>
                 <a:cs typeface="Inter Bold" pitchFamily="34" charset="-120"/>
-                <a:hlinkClick r:id="rId3" invalidUrl="" action="" tgtFrame="" tooltip="" history="1" highlightClick="0" endSnd="0">
+                <a:hlinkClick r:id="rId5">
                   <a:extLst>
                     <a:ext uri="{A12FA001-AC4F-418D-AE19-62706E023703}">
                       <ahyp:hlinkClr xmlns:ahyp="http://schemas.microsoft.com/office/drawing/2018/hyperlinkcolor" val="tx"/>
@@ -2686,7 +2515,7 @@
           <a:bodyPr wrap="none" lIns="0" tIns="0" rIns="0" bIns="0" rtlCol="0" anchor="t"/>
           <a:lstStyle/>
           <a:p>
-            <a:pPr algn="l" indent="0" marL="0">
+            <a:pPr marL="0" indent="0" algn="l">
               <a:lnSpc>
                 <a:spcPts val="2500"/>
               </a:lnSpc>
@@ -2728,7 +2557,7 @@
           <a:bodyPr wrap="none" lIns="0" tIns="0" rIns="0" bIns="0" rtlCol="0" anchor="t"/>
           <a:lstStyle/>
           <a:p>
-            <a:pPr algn="l" indent="0" marL="0">
+            <a:pPr marL="0" indent="0" algn="l">
               <a:lnSpc>
                 <a:spcPts val="2500"/>
               </a:lnSpc>
@@ -2744,6 +2573,24 @@
                 <a:cs typeface="Inter" pitchFamily="34" charset="-120"/>
               </a:rPr>
               <a:t>Group Number: 15</a:t>
+            </a:r>
+          </a:p>
+          <a:p>
+            <a:pPr marL="0" indent="0" algn="l">
+              <a:lnSpc>
+                <a:spcPts val="2500"/>
+              </a:lnSpc>
+              <a:buNone/>
+            </a:pPr>
+            <a:r>
+              <a:rPr lang="en-US" sz="1550" dirty="0">
+                <a:solidFill>
+                  <a:srgbClr val="E5E0DF"/>
+                </a:solidFill>
+                <a:latin typeface="Inter" pitchFamily="34" charset="0"/>
+                <a:ea typeface="Inter" pitchFamily="34" charset="-122"/>
+              </a:rPr>
+              <a:t>Dennis Kerry, Myles Vinal, Robert Benstine</a:t>
             </a:r>
             <a:endParaRPr lang="en-US" sz="1550" dirty="0"/>
           </a:p>
@@ -2776,14 +2623,14 @@
       </p:grpSpPr>
       <p:pic>
         <p:nvPicPr>
-          <p:cNvPr id="2" name="Image 0" descr="preencoded.png">    </p:cNvPr>
+          <p:cNvPr id="2" name="Image 0" descr="preencoded.png"/>
           <p:cNvPicPr>
             <a:picLocks noChangeAspect="1"/>
           </p:cNvPicPr>
           <p:nvPr/>
         </p:nvPicPr>
         <p:blipFill>
-          <a:blip r:embed="rId1"/>
+          <a:blip r:embed="rId3"/>
           <a:stretch>
             <a:fillRect/>
           </a:stretch>
@@ -2817,17 +2664,24 @@
           </a:solidFill>
           <a:ln/>
         </p:spPr>
+        <p:txBody>
+          <a:bodyPr/>
+          <a:lstStyle/>
+          <a:p>
+            <a:endParaRPr lang="en-US"/>
+          </a:p>
+        </p:txBody>
       </p:sp>
       <p:pic>
         <p:nvPicPr>
-          <p:cNvPr id="4" name="Image 1" descr="preencoded.png">    </p:cNvPr>
+          <p:cNvPr id="4" name="Image 1" descr="preencoded.png"/>
           <p:cNvPicPr>
             <a:picLocks noChangeAspect="1"/>
           </p:cNvPicPr>
           <p:nvPr/>
         </p:nvPicPr>
         <p:blipFill>
-          <a:blip r:embed="rId2"/>
+          <a:blip r:embed="rId4"/>
           <a:stretch>
             <a:fillRect/>
           </a:stretch>
@@ -2863,7 +2717,7 @@
           <a:bodyPr wrap="none" lIns="0" tIns="0" rIns="0" bIns="0" rtlCol="0" anchor="t"/>
           <a:lstStyle/>
           <a:p>
-            <a:pPr algn="l" indent="0" marL="0">
+            <a:pPr marL="0" indent="0" algn="l">
               <a:lnSpc>
                 <a:spcPts val="4850"/>
               </a:lnSpc>
@@ -2910,6 +2764,13 @@
             <a:prstDash val="solid"/>
           </a:ln>
         </p:spPr>
+        <p:txBody>
+          <a:bodyPr/>
+          <a:lstStyle/>
+          <a:p>
+            <a:endParaRPr lang="en-US"/>
+          </a:p>
+        </p:txBody>
       </p:sp>
       <p:sp>
         <p:nvSpPr>
@@ -2932,7 +2793,7 @@
           <a:bodyPr wrap="none" lIns="0" tIns="0" rIns="0" bIns="0" rtlCol="0" anchor="t"/>
           <a:lstStyle/>
           <a:p>
-            <a:pPr algn="l" indent="0" marL="0">
+            <a:pPr marL="0" indent="0" algn="l">
               <a:lnSpc>
                 <a:spcPts val="2400"/>
               </a:lnSpc>
@@ -2974,7 +2835,7 @@
           <a:bodyPr wrap="square" lIns="0" tIns="0" rIns="0" bIns="0" rtlCol="0" anchor="t"/>
           <a:lstStyle/>
           <a:p>
-            <a:pPr algn="l" indent="0" marL="0">
+            <a:pPr marL="0" indent="0" algn="l">
               <a:lnSpc>
                 <a:spcPts val="2500"/>
               </a:lnSpc>
@@ -3021,6 +2882,13 @@
             <a:prstDash val="solid"/>
           </a:ln>
         </p:spPr>
+        <p:txBody>
+          <a:bodyPr/>
+          <a:lstStyle/>
+          <a:p>
+            <a:endParaRPr lang="en-US"/>
+          </a:p>
+        </p:txBody>
       </p:sp>
       <p:sp>
         <p:nvSpPr>
@@ -3043,7 +2911,7 @@
           <a:bodyPr wrap="none" lIns="0" tIns="0" rIns="0" bIns="0" rtlCol="0" anchor="t"/>
           <a:lstStyle/>
           <a:p>
-            <a:pPr algn="l" indent="0" marL="0">
+            <a:pPr marL="0" indent="0" algn="l">
               <a:lnSpc>
                 <a:spcPts val="2400"/>
               </a:lnSpc>
@@ -3085,7 +2953,7 @@
           <a:bodyPr wrap="square" lIns="0" tIns="0" rIns="0" bIns="0" rtlCol="0" anchor="t"/>
           <a:lstStyle/>
           <a:p>
-            <a:pPr algn="l" indent="0" marL="0">
+            <a:pPr marL="0" indent="0" algn="l">
               <a:lnSpc>
                 <a:spcPts val="2500"/>
               </a:lnSpc>
@@ -3132,6 +3000,13 @@
             <a:prstDash val="solid"/>
           </a:ln>
         </p:spPr>
+        <p:txBody>
+          <a:bodyPr/>
+          <a:lstStyle/>
+          <a:p>
+            <a:endParaRPr lang="en-US"/>
+          </a:p>
+        </p:txBody>
       </p:sp>
       <p:sp>
         <p:nvSpPr>
@@ -3154,7 +3029,7 @@
           <a:bodyPr wrap="none" lIns="0" tIns="0" rIns="0" bIns="0" rtlCol="0" anchor="t"/>
           <a:lstStyle/>
           <a:p>
-            <a:pPr algn="l" indent="0" marL="0">
+            <a:pPr marL="0" indent="0" algn="l">
               <a:lnSpc>
                 <a:spcPts val="2400"/>
               </a:lnSpc>
@@ -3196,7 +3071,7 @@
           <a:bodyPr wrap="square" lIns="0" tIns="0" rIns="0" bIns="0" rtlCol="0" anchor="t"/>
           <a:lstStyle/>
           <a:p>
-            <a:pPr algn="l" indent="0" marL="0">
+            <a:pPr marL="0" indent="0" algn="l">
               <a:lnSpc>
                 <a:spcPts val="2500"/>
               </a:lnSpc>
@@ -3238,7 +3113,7 @@
           <a:bodyPr wrap="square" lIns="0" tIns="0" rIns="0" bIns="0" rtlCol="0" anchor="t"/>
           <a:lstStyle/>
           <a:p>
-            <a:pPr algn="l" indent="0" marL="0">
+            <a:pPr marL="0" indent="0" algn="l">
               <a:lnSpc>
                 <a:spcPts val="2500"/>
               </a:lnSpc>
@@ -3260,6 +3135,36 @@
         </p:txBody>
       </p:sp>
     </p:spTree>
+  </p:cSld>
+  <p:clrMapOvr>
+    <a:masterClrMapping/>
+  </p:clrMapOvr>
+</p:sld>
+</file>
+
+<file path=ppt/slides/slide11.xml><?xml version="1.0" encoding="utf-8"?>
+<p:sld xmlns:a="http://schemas.openxmlformats.org/drawingml/2006/main" xmlns:r="http://schemas.openxmlformats.org/officeDocument/2006/relationships" xmlns:p="http://schemas.openxmlformats.org/presentationml/2006/main">
+  <p:cSld>
+    <p:spTree>
+      <p:nvGrpSpPr>
+        <p:cNvPr id="1" name=""/>
+        <p:cNvGrpSpPr/>
+        <p:nvPr/>
+      </p:nvGrpSpPr>
+      <p:grpSpPr>
+        <a:xfrm>
+          <a:off x="0" y="0"/>
+          <a:ext cx="0" cy="0"/>
+          <a:chOff x="0" y="0"/>
+          <a:chExt cx="0" cy="0"/>
+        </a:xfrm>
+      </p:grpSpPr>
+    </p:spTree>
+    <p:extLst>
+      <p:ext uri="{BB962C8B-B14F-4D97-AF65-F5344CB8AC3E}">
+        <p14:creationId xmlns:p14="http://schemas.microsoft.com/office/powerpoint/2010/main" val="1212672210"/>
+      </p:ext>
+    </p:extLst>
   </p:cSld>
   <p:clrMapOvr>
     <a:masterClrMapping/>
@@ -3305,7 +3210,7 @@
           <a:bodyPr wrap="none" lIns="0" tIns="0" rIns="0" bIns="0" rtlCol="0" anchor="t"/>
           <a:lstStyle/>
           <a:p>
-            <a:pPr algn="l" indent="0" marL="0">
+            <a:pPr marL="0" indent="0" algn="l">
               <a:lnSpc>
                 <a:spcPts val="4850"/>
               </a:lnSpc>
@@ -3352,6 +3257,13 @@
             <a:prstDash val="solid"/>
           </a:ln>
         </p:spPr>
+        <p:txBody>
+          <a:bodyPr/>
+          <a:lstStyle/>
+          <a:p>
+            <a:endParaRPr lang="en-US"/>
+          </a:p>
+        </p:txBody>
       </p:sp>
       <p:sp>
         <p:nvSpPr>
@@ -3374,20 +3286,27 @@
           </a:solidFill>
           <a:ln/>
         </p:spPr>
+        <p:txBody>
+          <a:bodyPr/>
+          <a:lstStyle/>
+          <a:p>
+            <a:endParaRPr lang="en-US"/>
+          </a:p>
+        </p:txBody>
       </p:sp>
       <p:pic>
         <p:nvPicPr>
-          <p:cNvPr id="5" name="Image 0" descr="preencoded.png">    </p:cNvPr>
+          <p:cNvPr id="5" name="Image 0" descr="preencoded.png"/>
           <p:cNvPicPr>
             <a:picLocks noChangeAspect="1"/>
           </p:cNvPicPr>
           <p:nvPr/>
         </p:nvPicPr>
         <p:blipFill>
-          <a:blip r:embed="rId1">
+          <a:blip>
             <a:extLst>
               <a:ext uri="{96DAC541-7B7A-43D3-8B79-37D633B846F1}">
-                <asvg:svgBlip xmlns:asvg="http://schemas.microsoft.com/office/drawing/2016/SVG/main" r:embed="rId2"/>
+                <asvg:svgBlip xmlns:asvg="http://schemas.microsoft.com/office/drawing/2016/SVG/main" r:embed="rId3"/>
               </a:ext>
             </a:extLst>
           </a:blip>
@@ -3426,7 +3345,7 @@
           <a:bodyPr wrap="none" lIns="0" tIns="0" rIns="0" bIns="0" rtlCol="0" anchor="t"/>
           <a:lstStyle/>
           <a:p>
-            <a:pPr algn="l" indent="0" marL="0">
+            <a:pPr marL="0" indent="0" algn="l">
               <a:lnSpc>
                 <a:spcPts val="2400"/>
               </a:lnSpc>
@@ -3468,7 +3387,7 @@
           <a:bodyPr wrap="square" lIns="0" tIns="0" rIns="0" bIns="0" rtlCol="0" anchor="t"/>
           <a:lstStyle/>
           <a:p>
-            <a:pPr algn="l" indent="0" marL="0">
+            <a:pPr marL="0" indent="0" algn="l">
               <a:lnSpc>
                 <a:spcPts val="2500"/>
               </a:lnSpc>
@@ -3515,6 +3434,13 @@
             <a:prstDash val="solid"/>
           </a:ln>
         </p:spPr>
+        <p:txBody>
+          <a:bodyPr/>
+          <a:lstStyle/>
+          <a:p>
+            <a:endParaRPr lang="en-US"/>
+          </a:p>
+        </p:txBody>
       </p:sp>
       <p:sp>
         <p:nvSpPr>
@@ -3537,17 +3463,24 @@
           </a:solidFill>
           <a:ln/>
         </p:spPr>
+        <p:txBody>
+          <a:bodyPr/>
+          <a:lstStyle/>
+          <a:p>
+            <a:endParaRPr lang="en-US"/>
+          </a:p>
+        </p:txBody>
       </p:sp>
       <p:pic>
         <p:nvPicPr>
-          <p:cNvPr id="10" name="Image 1" descr="preencoded.png">    </p:cNvPr>
+          <p:cNvPr id="10" name="Image 1" descr="preencoded.png"/>
           <p:cNvPicPr>
             <a:picLocks noChangeAspect="1"/>
           </p:cNvPicPr>
           <p:nvPr/>
         </p:nvPicPr>
         <p:blipFill>
-          <a:blip r:embed="rId3">
+          <a:blip>
             <a:extLst>
               <a:ext uri="{96DAC541-7B7A-43D3-8B79-37D633B846F1}">
                 <asvg:svgBlip xmlns:asvg="http://schemas.microsoft.com/office/drawing/2016/SVG/main" r:embed="rId4"/>
@@ -3589,7 +3522,7 @@
           <a:bodyPr wrap="none" lIns="0" tIns="0" rIns="0" bIns="0" rtlCol="0" anchor="t"/>
           <a:lstStyle/>
           <a:p>
-            <a:pPr algn="l" indent="0" marL="0">
+            <a:pPr marL="0" indent="0" algn="l">
               <a:lnSpc>
                 <a:spcPts val="2400"/>
               </a:lnSpc>
@@ -3631,7 +3564,7 @@
           <a:bodyPr wrap="square" lIns="0" tIns="0" rIns="0" bIns="0" rtlCol="0" anchor="t"/>
           <a:lstStyle/>
           <a:p>
-            <a:pPr algn="l" indent="0" marL="0">
+            <a:pPr marL="0" indent="0" algn="l">
               <a:lnSpc>
                 <a:spcPts val="2500"/>
               </a:lnSpc>
@@ -3678,6 +3611,13 @@
             <a:prstDash val="solid"/>
           </a:ln>
         </p:spPr>
+        <p:txBody>
+          <a:bodyPr/>
+          <a:lstStyle/>
+          <a:p>
+            <a:endParaRPr lang="en-US"/>
+          </a:p>
+        </p:txBody>
       </p:sp>
       <p:sp>
         <p:nvSpPr>
@@ -3700,17 +3640,201 @@
           </a:solidFill>
           <a:ln/>
         </p:spPr>
+        <p:txBody>
+          <a:bodyPr/>
+          <a:lstStyle/>
+          <a:p>
+            <a:endParaRPr lang="en-US"/>
+          </a:p>
+        </p:txBody>
       </p:sp>
       <p:pic>
         <p:nvPicPr>
-          <p:cNvPr id="15" name="Image 2" descr="preencoded.png">    </p:cNvPr>
+          <p:cNvPr id="15" name="Image 2" descr="preencoded.png"/>
           <p:cNvPicPr>
             <a:picLocks noChangeAspect="1"/>
           </p:cNvPicPr>
           <p:nvPr/>
         </p:nvPicPr>
         <p:blipFill>
-          <a:blip r:embed="rId5">
+          <a:blip>
+            <a:extLst>
+              <a:ext uri="{96DAC541-7B7A-43D3-8B79-37D633B846F1}">
+                <asvg:svgBlip xmlns:asvg="http://schemas.microsoft.com/office/drawing/2016/SVG/main" r:embed="rId5"/>
+              </a:ext>
+            </a:extLst>
+          </a:blip>
+          <a:stretch>
+            <a:fillRect/>
+          </a:stretch>
+        </p:blipFill>
+        <p:spPr>
+          <a:xfrm>
+            <a:off x="1163479" y="4821555"/>
+            <a:ext cx="267891" cy="267891"/>
+          </a:xfrm>
+          <a:prstGeom prst="rect">
+            <a:avLst/>
+          </a:prstGeom>
+        </p:spPr>
+      </p:pic>
+      <p:sp>
+        <p:nvSpPr>
+          <p:cNvPr id="16" name="Text 11"/>
+          <p:cNvSpPr/>
+          <p:nvPr/>
+        </p:nvSpPr>
+        <p:spPr>
+          <a:xfrm>
+            <a:off x="999768" y="5451634"/>
+            <a:ext cx="2480905" cy="310158"/>
+          </a:xfrm>
+          <a:prstGeom prst="rect">
+            <a:avLst/>
+          </a:prstGeom>
+          <a:noFill/>
+          <a:ln/>
+        </p:spPr>
+        <p:txBody>
+          <a:bodyPr wrap="none" lIns="0" tIns="0" rIns="0" bIns="0" rtlCol="0" anchor="t"/>
+          <a:lstStyle/>
+          <a:p>
+            <a:pPr marL="0" indent="0" algn="l">
+              <a:lnSpc>
+                <a:spcPts val="2400"/>
+              </a:lnSpc>
+              <a:buNone/>
+            </a:pPr>
+            <a:r>
+              <a:rPr lang="en-US" sz="1950" b="1" dirty="0">
+                <a:solidFill>
+                  <a:srgbClr val="E5E0DF"/>
+                </a:solidFill>
+                <a:latin typeface="Inter Bold" pitchFamily="34" charset="0"/>
+                <a:ea typeface="Inter Bold" pitchFamily="34" charset="-122"/>
+                <a:cs typeface="Inter Bold" pitchFamily="34" charset="-120"/>
+              </a:rPr>
+              <a:t>Validate User Flows</a:t>
+            </a:r>
+            <a:endParaRPr lang="en-US" sz="1950" dirty="0"/>
+          </a:p>
+        </p:txBody>
+      </p:sp>
+      <p:sp>
+        <p:nvSpPr>
+          <p:cNvPr id="17" name="Text 12"/>
+          <p:cNvSpPr/>
+          <p:nvPr/>
+        </p:nvSpPr>
+        <p:spPr>
+          <a:xfrm>
+            <a:off x="999768" y="5880854"/>
+            <a:ext cx="6010275" cy="635079"/>
+          </a:xfrm>
+          <a:prstGeom prst="rect">
+            <a:avLst/>
+          </a:prstGeom>
+          <a:noFill/>
+          <a:ln/>
+        </p:spPr>
+        <p:txBody>
+          <a:bodyPr wrap="square" lIns="0" tIns="0" rIns="0" bIns="0" rtlCol="0" anchor="t"/>
+          <a:lstStyle/>
+          <a:p>
+            <a:pPr marL="0" indent="0" algn="l">
+              <a:lnSpc>
+                <a:spcPts val="2500"/>
+              </a:lnSpc>
+              <a:buNone/>
+            </a:pPr>
+            <a:r>
+              <a:rPr lang="en-US" sz="1550" dirty="0">
+                <a:solidFill>
+                  <a:srgbClr val="E5E0DF"/>
+                </a:solidFill>
+                <a:latin typeface="Inter" pitchFamily="34" charset="0"/>
+                <a:ea typeface="Inter" pitchFamily="34" charset="-122"/>
+                <a:cs typeface="Inter" pitchFamily="34" charset="-120"/>
+              </a:rPr>
+              <a:t>Test browsing, searching, login, signup, game pages, and cart/checkout without manual testing</a:t>
+            </a:r>
+            <a:endParaRPr lang="en-US" sz="1550" dirty="0"/>
+          </a:p>
+        </p:txBody>
+      </p:sp>
+      <p:sp>
+        <p:nvSpPr>
+          <p:cNvPr id="18" name="Shape 13"/>
+          <p:cNvSpPr/>
+          <p:nvPr/>
+        </p:nvSpPr>
+        <p:spPr>
+          <a:xfrm>
+            <a:off x="7414379" y="4451985"/>
+            <a:ext cx="6422231" cy="2269927"/>
+          </a:xfrm>
+          <a:prstGeom prst="roundRect">
+            <a:avLst>
+              <a:gd name="adj" fmla="val 3672"/>
+            </a:avLst>
+          </a:prstGeom>
+          <a:solidFill>
+            <a:srgbClr val="110080"/>
+          </a:solidFill>
+          <a:ln w="7620">
+            <a:solidFill>
+              <a:srgbClr val="2A1999"/>
+            </a:solidFill>
+            <a:prstDash val="solid"/>
+          </a:ln>
+        </p:spPr>
+        <p:txBody>
+          <a:bodyPr/>
+          <a:lstStyle/>
+          <a:p>
+            <a:endParaRPr lang="en-US"/>
+          </a:p>
+        </p:txBody>
+      </p:sp>
+      <p:sp>
+        <p:nvSpPr>
+          <p:cNvPr id="19" name="Shape 14"/>
+          <p:cNvSpPr/>
+          <p:nvPr/>
+        </p:nvSpPr>
+        <p:spPr>
+          <a:xfrm>
+            <a:off x="7620357" y="4657963"/>
+            <a:ext cx="595313" cy="595313"/>
+          </a:xfrm>
+          <a:prstGeom prst="roundRect">
+            <a:avLst>
+              <a:gd name="adj" fmla="val 15358451"/>
+            </a:avLst>
+          </a:prstGeom>
+          <a:solidFill>
+            <a:srgbClr val="2B0AFF"/>
+          </a:solidFill>
+          <a:ln/>
+        </p:spPr>
+        <p:txBody>
+          <a:bodyPr/>
+          <a:lstStyle/>
+          <a:p>
+            <a:endParaRPr lang="en-US"/>
+          </a:p>
+        </p:txBody>
+      </p:sp>
+      <p:pic>
+        <p:nvPicPr>
+          <p:cNvPr id="20" name="Image 3" descr="preencoded.png"/>
+          <p:cNvPicPr>
+            <a:picLocks noChangeAspect="1"/>
+          </p:cNvPicPr>
+          <p:nvPr/>
+        </p:nvPicPr>
+        <p:blipFill>
+          <a:blip>
             <a:extLst>
               <a:ext uri="{96DAC541-7B7A-43D3-8B79-37D633B846F1}">
                 <asvg:svgBlip xmlns:asvg="http://schemas.microsoft.com/office/drawing/2016/SVG/main" r:embed="rId6"/>
@@ -3723,7 +3847,7 @@
         </p:blipFill>
         <p:spPr>
           <a:xfrm>
-            <a:off x="1163479" y="4821555"/>
+            <a:off x="7784068" y="4821555"/>
             <a:ext cx="267891" cy="267891"/>
           </a:xfrm>
           <a:prstGeom prst="rect">
@@ -3733,13 +3857,13 @@
       </p:pic>
       <p:sp>
         <p:nvSpPr>
-          <p:cNvPr id="16" name="Text 11"/>
-          <p:cNvSpPr/>
-          <p:nvPr/>
-        </p:nvSpPr>
-        <p:spPr>
-          <a:xfrm>
-            <a:off x="999768" y="5451634"/>
+          <p:cNvPr id="21" name="Text 15"/>
+          <p:cNvSpPr/>
+          <p:nvPr/>
+        </p:nvSpPr>
+        <p:spPr>
+          <a:xfrm>
+            <a:off x="7620357" y="5451634"/>
             <a:ext cx="2480905" cy="310158"/>
           </a:xfrm>
           <a:prstGeom prst="rect">
@@ -3752,7 +3876,7 @@
           <a:bodyPr wrap="none" lIns="0" tIns="0" rIns="0" bIns="0" rtlCol="0" anchor="t"/>
           <a:lstStyle/>
           <a:p>
-            <a:pPr algn="l" indent="0" marL="0">
+            <a:pPr marL="0" indent="0" algn="l">
               <a:lnSpc>
                 <a:spcPts val="2400"/>
               </a:lnSpc>
@@ -3767,7 +3891,7 @@
                 <a:ea typeface="Inter Bold" pitchFamily="34" charset="-122"/>
                 <a:cs typeface="Inter Bold" pitchFamily="34" charset="-120"/>
               </a:rPr>
-              <a:t>Validate User Flows</a:t>
+              <a:t>Identify Constraints</a:t>
             </a:r>
             <a:endParaRPr lang="en-US" sz="1950" dirty="0"/>
           </a:p>
@@ -3775,13 +3899,13 @@
       </p:sp>
       <p:sp>
         <p:nvSpPr>
-          <p:cNvPr id="17" name="Text 12"/>
-          <p:cNvSpPr/>
-          <p:nvPr/>
-        </p:nvSpPr>
-        <p:spPr>
-          <a:xfrm>
-            <a:off x="999768" y="5880854"/>
+          <p:cNvPr id="22" name="Text 16"/>
+          <p:cNvSpPr/>
+          <p:nvPr/>
+        </p:nvSpPr>
+        <p:spPr>
+          <a:xfrm>
+            <a:off x="7620357" y="5880854"/>
             <a:ext cx="6010275" cy="635079"/>
           </a:xfrm>
           <a:prstGeom prst="rect">
@@ -3794,7 +3918,7 @@
           <a:bodyPr wrap="square" lIns="0" tIns="0" rIns="0" bIns="0" rtlCol="0" anchor="t"/>
           <a:lstStyle/>
           <a:p>
-            <a:pPr algn="l" indent="0" marL="0">
+            <a:pPr marL="0" indent="0" algn="l">
               <a:lnSpc>
                 <a:spcPts val="2500"/>
               </a:lnSpc>
@@ -3809,169 +3933,6 @@
                 <a:ea typeface="Inter" pitchFamily="34" charset="-122"/>
                 <a:cs typeface="Inter" pitchFamily="34" charset="-120"/>
               </a:rPr>
-              <a:t>Test browsing, searching, login, signup, game pages, and cart/checkout without manual testing</a:t>
-            </a:r>
-            <a:endParaRPr lang="en-US" sz="1550" dirty="0"/>
-          </a:p>
-        </p:txBody>
-      </p:sp>
-      <p:sp>
-        <p:nvSpPr>
-          <p:cNvPr id="18" name="Shape 13"/>
-          <p:cNvSpPr/>
-          <p:nvPr/>
-        </p:nvSpPr>
-        <p:spPr>
-          <a:xfrm>
-            <a:off x="7414379" y="4451985"/>
-            <a:ext cx="6422231" cy="2269927"/>
-          </a:xfrm>
-          <a:prstGeom prst="roundRect">
-            <a:avLst>
-              <a:gd name="adj" fmla="val 3672"/>
-            </a:avLst>
-          </a:prstGeom>
-          <a:solidFill>
-            <a:srgbClr val="110080"/>
-          </a:solidFill>
-          <a:ln w="7620">
-            <a:solidFill>
-              <a:srgbClr val="2A1999"/>
-            </a:solidFill>
-            <a:prstDash val="solid"/>
-          </a:ln>
-        </p:spPr>
-      </p:sp>
-      <p:sp>
-        <p:nvSpPr>
-          <p:cNvPr id="19" name="Shape 14"/>
-          <p:cNvSpPr/>
-          <p:nvPr/>
-        </p:nvSpPr>
-        <p:spPr>
-          <a:xfrm>
-            <a:off x="7620357" y="4657963"/>
-            <a:ext cx="595313" cy="595313"/>
-          </a:xfrm>
-          <a:prstGeom prst="roundRect">
-            <a:avLst>
-              <a:gd name="adj" fmla="val 15358451"/>
-            </a:avLst>
-          </a:prstGeom>
-          <a:solidFill>
-            <a:srgbClr val="2B0AFF"/>
-          </a:solidFill>
-          <a:ln/>
-        </p:spPr>
-      </p:sp>
-      <p:pic>
-        <p:nvPicPr>
-          <p:cNvPr id="20" name="Image 3" descr="preencoded.png">    </p:cNvPr>
-          <p:cNvPicPr>
-            <a:picLocks noChangeAspect="1"/>
-          </p:cNvPicPr>
-          <p:nvPr/>
-        </p:nvPicPr>
-        <p:blipFill>
-          <a:blip r:embed="rId7">
-            <a:extLst>
-              <a:ext uri="{96DAC541-7B7A-43D3-8B79-37D633B846F1}">
-                <asvg:svgBlip xmlns:asvg="http://schemas.microsoft.com/office/drawing/2016/SVG/main" r:embed="rId8"/>
-              </a:ext>
-            </a:extLst>
-          </a:blip>
-          <a:stretch>
-            <a:fillRect/>
-          </a:stretch>
-        </p:blipFill>
-        <p:spPr>
-          <a:xfrm>
-            <a:off x="7784068" y="4821555"/>
-            <a:ext cx="267891" cy="267891"/>
-          </a:xfrm>
-          <a:prstGeom prst="rect">
-            <a:avLst/>
-          </a:prstGeom>
-        </p:spPr>
-      </p:pic>
-      <p:sp>
-        <p:nvSpPr>
-          <p:cNvPr id="21" name="Text 15"/>
-          <p:cNvSpPr/>
-          <p:nvPr/>
-        </p:nvSpPr>
-        <p:spPr>
-          <a:xfrm>
-            <a:off x="7620357" y="5451634"/>
-            <a:ext cx="2480905" cy="310158"/>
-          </a:xfrm>
-          <a:prstGeom prst="rect">
-            <a:avLst/>
-          </a:prstGeom>
-          <a:noFill/>
-          <a:ln/>
-        </p:spPr>
-        <p:txBody>
-          <a:bodyPr wrap="none" lIns="0" tIns="0" rIns="0" bIns="0" rtlCol="0" anchor="t"/>
-          <a:lstStyle/>
-          <a:p>
-            <a:pPr algn="l" indent="0" marL="0">
-              <a:lnSpc>
-                <a:spcPts val="2400"/>
-              </a:lnSpc>
-              <a:buNone/>
-            </a:pPr>
-            <a:r>
-              <a:rPr lang="en-US" sz="1950" b="1" dirty="0">
-                <a:solidFill>
-                  <a:srgbClr val="E5E0DF"/>
-                </a:solidFill>
-                <a:latin typeface="Inter Bold" pitchFamily="34" charset="0"/>
-                <a:ea typeface="Inter Bold" pitchFamily="34" charset="-122"/>
-                <a:cs typeface="Inter Bold" pitchFamily="34" charset="-120"/>
-              </a:rPr>
-              <a:t>Identify Constraints</a:t>
-            </a:r>
-            <a:endParaRPr lang="en-US" sz="1950" dirty="0"/>
-          </a:p>
-        </p:txBody>
-      </p:sp>
-      <p:sp>
-        <p:nvSpPr>
-          <p:cNvPr id="22" name="Text 16"/>
-          <p:cNvSpPr/>
-          <p:nvPr/>
-        </p:nvSpPr>
-        <p:spPr>
-          <a:xfrm>
-            <a:off x="7620357" y="5880854"/>
-            <a:ext cx="6010275" cy="635079"/>
-          </a:xfrm>
-          <a:prstGeom prst="rect">
-            <a:avLst/>
-          </a:prstGeom>
-          <a:noFill/>
-          <a:ln/>
-        </p:spPr>
-        <p:txBody>
-          <a:bodyPr wrap="square" lIns="0" tIns="0" rIns="0" bIns="0" rtlCol="0" anchor="t"/>
-          <a:lstStyle/>
-          <a:p>
-            <a:pPr algn="l" indent="0" marL="0">
-              <a:lnSpc>
-                <a:spcPts val="2500"/>
-              </a:lnSpc>
-              <a:buNone/>
-            </a:pPr>
-            <a:r>
-              <a:rPr lang="en-US" sz="1550" dirty="0">
-                <a:solidFill>
-                  <a:srgbClr val="E5E0DF"/>
-                </a:solidFill>
-                <a:latin typeface="Inter" pitchFamily="34" charset="0"/>
-                <a:ea typeface="Inter" pitchFamily="34" charset="-122"/>
-                <a:cs typeface="Inter" pitchFamily="34" charset="-120"/>
-              </a:rPr>
               <a:t>Address CAPTCHA, GDPR banners, age-gate overlays, lazy-loaded content, and dynamic XHR tiles</a:t>
             </a:r>
             <a:endParaRPr lang="en-US" sz="1550" dirty="0"/>
@@ -3999,7 +3960,7 @@
           <a:bodyPr wrap="none" lIns="0" tIns="0" rIns="0" bIns="0" rtlCol="0" anchor="t"/>
           <a:lstStyle/>
           <a:p>
-            <a:pPr algn="l" indent="0" marL="0">
+            <a:pPr marL="0" indent="0" algn="l">
               <a:lnSpc>
                 <a:spcPts val="2500"/>
               </a:lnSpc>
@@ -4066,7 +4027,7 @@
           <a:bodyPr wrap="none" lIns="0" tIns="0" rIns="0" bIns="0" rtlCol="0" anchor="t"/>
           <a:lstStyle/>
           <a:p>
-            <a:pPr algn="l" indent="0" marL="0">
+            <a:pPr marL="0" indent="0" algn="l">
               <a:lnSpc>
                 <a:spcPts val="3200"/>
               </a:lnSpc>
@@ -4089,223 +4050,7 @@
       </p:sp>
       <p:pic>
         <p:nvPicPr>
-          <p:cNvPr id="3" name="Image 0" descr="preencoded.png">    </p:cNvPr>
-          <p:cNvPicPr>
-            <a:picLocks noChangeAspect="1"/>
-          </p:cNvPicPr>
-          <p:nvPr/>
-        </p:nvPicPr>
-        <p:blipFill>
-          <a:blip r:embed="rId1"/>
-          <a:stretch>
-            <a:fillRect/>
-          </a:stretch>
-        </p:blipFill>
-        <p:spPr>
-          <a:xfrm>
-            <a:off x="2179677" y="979289"/>
-            <a:ext cx="390644" cy="1143000"/>
-          </a:xfrm>
-          <a:prstGeom prst="rect">
-            <a:avLst/>
-          </a:prstGeom>
-        </p:spPr>
-      </p:pic>
-      <p:sp>
-        <p:nvSpPr>
-          <p:cNvPr id="4" name="Text 1"/>
-          <p:cNvSpPr/>
-          <p:nvPr/>
-        </p:nvSpPr>
-        <p:spPr>
-          <a:xfrm>
-            <a:off x="2655689" y="1109424"/>
-            <a:ext cx="1628061" cy="203359"/>
-          </a:xfrm>
-          <a:prstGeom prst="rect">
-            <a:avLst/>
-          </a:prstGeom>
-          <a:noFill/>
-          <a:ln/>
-        </p:spPr>
-        <p:txBody>
-          <a:bodyPr wrap="none" lIns="0" tIns="0" rIns="0" bIns="0" rtlCol="0" anchor="t"/>
-          <a:lstStyle/>
-          <a:p>
-            <a:pPr algn="l" indent="0" marL="0">
-              <a:lnSpc>
-                <a:spcPts val="1600"/>
-              </a:lnSpc>
-              <a:buNone/>
-            </a:pPr>
-            <a:r>
-              <a:rPr lang="en-US" sz="1250" b="1" dirty="0">
-                <a:solidFill>
-                  <a:srgbClr val="E5E0DF"/>
-                </a:solidFill>
-                <a:latin typeface="Inter Bold" pitchFamily="34" charset="0"/>
-                <a:ea typeface="Inter Bold" pitchFamily="34" charset="-122"/>
-                <a:cs typeface="Inter Bold" pitchFamily="34" charset="-120"/>
-              </a:rPr>
-              <a:t>Load Config</a:t>
-            </a:r>
-            <a:endParaRPr lang="en-US" sz="1250" dirty="0"/>
-          </a:p>
-        </p:txBody>
-      </p:sp>
-      <p:sp>
-        <p:nvSpPr>
-          <p:cNvPr id="5" name="Text 2"/>
-          <p:cNvSpPr/>
-          <p:nvPr/>
-        </p:nvSpPr>
-        <p:spPr>
-          <a:xfrm>
-            <a:off x="2655689" y="1363980"/>
-            <a:ext cx="9795034" cy="172522"/>
-          </a:xfrm>
-          <a:prstGeom prst="rect">
-            <a:avLst/>
-          </a:prstGeom>
-          <a:noFill/>
-          <a:ln/>
-        </p:spPr>
-        <p:txBody>
-          <a:bodyPr wrap="none" lIns="0" tIns="0" rIns="0" bIns="0" rtlCol="0" anchor="t"/>
-          <a:lstStyle/>
-          <a:p>
-            <a:pPr algn="l" indent="0" marL="0">
-              <a:lnSpc>
-                <a:spcPts val="1350"/>
-              </a:lnSpc>
-              <a:buNone/>
-            </a:pPr>
-            <a:r>
-              <a:rPr lang="en-US" sz="1000" dirty="0">
-                <a:solidFill>
-                  <a:srgbClr val="E5E0DF"/>
-                </a:solidFill>
-                <a:latin typeface="Inter" pitchFamily="34" charset="0"/>
-                <a:ea typeface="Inter" pitchFamily="34" charset="-122"/>
-                <a:cs typeface="Inter" pitchFamily="34" charset="-120"/>
-              </a:rPr>
-              <a:t>Read config.properties for credentials and game URLs</a:t>
-            </a:r>
-            <a:endParaRPr lang="en-US" sz="1000" dirty="0"/>
-          </a:p>
-        </p:txBody>
-      </p:sp>
-      <p:pic>
-        <p:nvPicPr>
-          <p:cNvPr id="6" name="Image 1" descr="preencoded.png">    </p:cNvPr>
-          <p:cNvPicPr>
-            <a:picLocks noChangeAspect="1"/>
-          </p:cNvPicPr>
-          <p:nvPr/>
-        </p:nvPicPr>
-        <p:blipFill>
-          <a:blip r:embed="rId2"/>
-          <a:stretch>
-            <a:fillRect/>
-          </a:stretch>
-        </p:blipFill>
-        <p:spPr>
-          <a:xfrm>
-            <a:off x="2374940" y="1846064"/>
-            <a:ext cx="390644" cy="1143000"/>
-          </a:xfrm>
-          <a:prstGeom prst="rect">
-            <a:avLst/>
-          </a:prstGeom>
-        </p:spPr>
-      </p:pic>
-      <p:sp>
-        <p:nvSpPr>
-          <p:cNvPr id="7" name="Text 3"/>
-          <p:cNvSpPr/>
-          <p:nvPr/>
-        </p:nvSpPr>
-        <p:spPr>
-          <a:xfrm>
-            <a:off x="2850952" y="1976199"/>
-            <a:ext cx="1628061" cy="203359"/>
-          </a:xfrm>
-          <a:prstGeom prst="rect">
-            <a:avLst/>
-          </a:prstGeom>
-          <a:noFill/>
-          <a:ln/>
-        </p:spPr>
-        <p:txBody>
-          <a:bodyPr wrap="none" lIns="0" tIns="0" rIns="0" bIns="0" rtlCol="0" anchor="t"/>
-          <a:lstStyle/>
-          <a:p>
-            <a:pPr algn="l" indent="0" marL="0">
-              <a:lnSpc>
-                <a:spcPts val="1600"/>
-              </a:lnSpc>
-              <a:buNone/>
-            </a:pPr>
-            <a:r>
-              <a:rPr lang="en-US" sz="1250" b="1" dirty="0">
-                <a:solidFill>
-                  <a:srgbClr val="E5E0DF"/>
-                </a:solidFill>
-                <a:latin typeface="Inter Bold" pitchFamily="34" charset="0"/>
-                <a:ea typeface="Inter Bold" pitchFamily="34" charset="-122"/>
-                <a:cs typeface="Inter Bold" pitchFamily="34" charset="-120"/>
-              </a:rPr>
-              <a:t>BaseTest Setup</a:t>
-            </a:r>
-            <a:endParaRPr lang="en-US" sz="1250" dirty="0"/>
-          </a:p>
-        </p:txBody>
-      </p:sp>
-      <p:sp>
-        <p:nvSpPr>
-          <p:cNvPr id="8" name="Text 4"/>
-          <p:cNvSpPr/>
-          <p:nvPr/>
-        </p:nvSpPr>
-        <p:spPr>
-          <a:xfrm>
-            <a:off x="2850952" y="2230755"/>
-            <a:ext cx="9599771" cy="172522"/>
-          </a:xfrm>
-          <a:prstGeom prst="rect">
-            <a:avLst/>
-          </a:prstGeom>
-          <a:noFill/>
-          <a:ln/>
-        </p:spPr>
-        <p:txBody>
-          <a:bodyPr wrap="none" lIns="0" tIns="0" rIns="0" bIns="0" rtlCol="0" anchor="t"/>
-          <a:lstStyle/>
-          <a:p>
-            <a:pPr algn="l" indent="0" marL="0">
-              <a:lnSpc>
-                <a:spcPts val="1350"/>
-              </a:lnSpc>
-              <a:buNone/>
-            </a:pPr>
-            <a:r>
-              <a:rPr lang="en-US" sz="1000" dirty="0">
-                <a:solidFill>
-                  <a:srgbClr val="E5E0DF"/>
-                </a:solidFill>
-                <a:latin typeface="Inter" pitchFamily="34" charset="0"/>
-                <a:ea typeface="Inter" pitchFamily="34" charset="-122"/>
-                <a:cs typeface="Inter" pitchFamily="34" charset="-120"/>
-              </a:rPr>
-              <a:t>@BeforeClass launches ChromeDriver with anti-automation flags</a:t>
-            </a:r>
-            <a:endParaRPr lang="en-US" sz="1000" dirty="0"/>
-          </a:p>
-        </p:txBody>
-      </p:sp>
-      <p:pic>
-        <p:nvPicPr>
-          <p:cNvPr id="9" name="Image 2" descr="preencoded.png">    </p:cNvPr>
+          <p:cNvPr id="3" name="Image 0" descr="preencoded.png"/>
           <p:cNvPicPr>
             <a:picLocks noChangeAspect="1"/>
           </p:cNvPicPr>
@@ -4319,7 +4064,7 @@
         </p:blipFill>
         <p:spPr>
           <a:xfrm>
-            <a:off x="2570321" y="2712839"/>
+            <a:off x="2179677" y="979289"/>
             <a:ext cx="390644" cy="1143000"/>
           </a:xfrm>
           <a:prstGeom prst="rect">
@@ -4329,13 +4074,13 @@
       </p:pic>
       <p:sp>
         <p:nvSpPr>
-          <p:cNvPr id="10" name="Text 5"/>
-          <p:cNvSpPr/>
-          <p:nvPr/>
-        </p:nvSpPr>
-        <p:spPr>
-          <a:xfrm>
-            <a:off x="3046333" y="2842974"/>
+          <p:cNvPr id="4" name="Text 1"/>
+          <p:cNvSpPr/>
+          <p:nvPr/>
+        </p:nvSpPr>
+        <p:spPr>
+          <a:xfrm>
+            <a:off x="2655689" y="1109424"/>
             <a:ext cx="1628061" cy="203359"/>
           </a:xfrm>
           <a:prstGeom prst="rect">
@@ -4348,7 +4093,7 @@
           <a:bodyPr wrap="none" lIns="0" tIns="0" rIns="0" bIns="0" rtlCol="0" anchor="t"/>
           <a:lstStyle/>
           <a:p>
-            <a:pPr algn="l" indent="0" marL="0">
+            <a:pPr marL="0" indent="0" algn="l">
               <a:lnSpc>
                 <a:spcPts val="1600"/>
               </a:lnSpc>
@@ -4363,7 +4108,7 @@
                 <a:ea typeface="Inter Bold" pitchFamily="34" charset="-122"/>
                 <a:cs typeface="Inter Bold" pitchFamily="34" charset="-120"/>
               </a:rPr>
-              <a:t>TestUtils Actions</a:t>
+              <a:t>Load Config</a:t>
             </a:r>
             <a:endParaRPr lang="en-US" sz="1250" dirty="0"/>
           </a:p>
@@ -4371,14 +4116,14 @@
       </p:sp>
       <p:sp>
         <p:nvSpPr>
-          <p:cNvPr id="11" name="Text 6"/>
-          <p:cNvSpPr/>
-          <p:nvPr/>
-        </p:nvSpPr>
-        <p:spPr>
-          <a:xfrm>
-            <a:off x="3046333" y="3097530"/>
-            <a:ext cx="9404390" cy="172522"/>
+          <p:cNvPr id="5" name="Text 2"/>
+          <p:cNvSpPr/>
+          <p:nvPr/>
+        </p:nvSpPr>
+        <p:spPr>
+          <a:xfrm>
+            <a:off x="2655689" y="1363980"/>
+            <a:ext cx="9795034" cy="172522"/>
           </a:xfrm>
           <a:prstGeom prst="rect">
             <a:avLst/>
@@ -4390,7 +4135,7 @@
           <a:bodyPr wrap="none" lIns="0" tIns="0" rIns="0" bIns="0" rtlCol="0" anchor="t"/>
           <a:lstStyle/>
           <a:p>
-            <a:pPr algn="l" indent="0" marL="0">
+            <a:pPr marL="0" indent="0" algn="l">
               <a:lnSpc>
                 <a:spcPts val="1350"/>
               </a:lnSpc>
@@ -4405,7 +4150,7 @@
                 <a:ea typeface="Inter" pitchFamily="34" charset="-122"/>
                 <a:cs typeface="Inter" pitchFamily="34" charset="-120"/>
               </a:rPr>
-              <a:t>Dismiss cookie consent, perform login, wait for page load</a:t>
+              <a:t>Read config.properties for credentials and game URLs</a:t>
             </a:r>
             <a:endParaRPr lang="en-US" sz="1000" dirty="0"/>
           </a:p>
@@ -4413,21 +4158,21 @@
       </p:sp>
       <p:pic>
         <p:nvPicPr>
-          <p:cNvPr id="12" name="Image 3" descr="preencoded.png">    </p:cNvPr>
+          <p:cNvPr id="6" name="Image 1" descr="preencoded.png"/>
           <p:cNvPicPr>
             <a:picLocks noChangeAspect="1"/>
           </p:cNvPicPr>
           <p:nvPr/>
         </p:nvPicPr>
         <p:blipFill>
-          <a:blip r:embed="rId4"/>
+          <a:blip r:embed="rId3"/>
           <a:stretch>
             <a:fillRect/>
           </a:stretch>
         </p:blipFill>
         <p:spPr>
           <a:xfrm>
-            <a:off x="2765703" y="3579614"/>
+            <a:off x="2374940" y="1846064"/>
             <a:ext cx="390644" cy="1143000"/>
           </a:xfrm>
           <a:prstGeom prst="rect">
@@ -4437,13 +4182,13 @@
       </p:pic>
       <p:sp>
         <p:nvSpPr>
-          <p:cNvPr id="13" name="Text 7"/>
-          <p:cNvSpPr/>
-          <p:nvPr/>
-        </p:nvSpPr>
-        <p:spPr>
-          <a:xfrm>
-            <a:off x="3241715" y="3709749"/>
+          <p:cNvPr id="7" name="Text 3"/>
+          <p:cNvSpPr/>
+          <p:nvPr/>
+        </p:nvSpPr>
+        <p:spPr>
+          <a:xfrm>
+            <a:off x="2850952" y="1976199"/>
             <a:ext cx="1628061" cy="203359"/>
           </a:xfrm>
           <a:prstGeom prst="rect">
@@ -4456,7 +4201,7 @@
           <a:bodyPr wrap="none" lIns="0" tIns="0" rIns="0" bIns="0" rtlCol="0" anchor="t"/>
           <a:lstStyle/>
           <a:p>
-            <a:pPr algn="l" indent="0" marL="0">
+            <a:pPr marL="0" indent="0" algn="l">
               <a:lnSpc>
                 <a:spcPts val="1600"/>
               </a:lnSpc>
@@ -4471,7 +4216,7 @@
                 <a:ea typeface="Inter Bold" pitchFamily="34" charset="-122"/>
                 <a:cs typeface="Inter Bold" pitchFamily="34" charset="-120"/>
               </a:rPr>
-              <a:t>Execute Tests</a:t>
+              <a:t>BaseTest Setup</a:t>
             </a:r>
             <a:endParaRPr lang="en-US" sz="1250" dirty="0"/>
           </a:p>
@@ -4479,14 +4224,14 @@
       </p:sp>
       <p:sp>
         <p:nvSpPr>
-          <p:cNvPr id="14" name="Text 8"/>
-          <p:cNvSpPr/>
-          <p:nvPr/>
-        </p:nvSpPr>
-        <p:spPr>
-          <a:xfrm>
-            <a:off x="3241715" y="3964305"/>
-            <a:ext cx="9209008" cy="172522"/>
+          <p:cNvPr id="8" name="Text 4"/>
+          <p:cNvSpPr/>
+          <p:nvPr/>
+        </p:nvSpPr>
+        <p:spPr>
+          <a:xfrm>
+            <a:off x="2850952" y="2230755"/>
+            <a:ext cx="9599771" cy="172522"/>
           </a:xfrm>
           <a:prstGeom prst="rect">
             <a:avLst/>
@@ -4498,7 +4243,7 @@
           <a:bodyPr wrap="none" lIns="0" tIns="0" rIns="0" bIns="0" rtlCol="0" anchor="t"/>
           <a:lstStyle/>
           <a:p>
-            <a:pPr algn="l" indent="0" marL="0">
+            <a:pPr marL="0" indent="0" algn="l">
               <a:lnSpc>
                 <a:spcPts val="1350"/>
               </a:lnSpc>
@@ -4513,7 +4258,7 @@
                 <a:ea typeface="Inter" pitchFamily="34" charset="-122"/>
                 <a:cs typeface="Inter" pitchFamily="34" charset="-120"/>
               </a:rPr>
-              <a:t>Run 7–8 @Test methods per class</a:t>
+              <a:t>@BeforeClass launches ChromeDriver with anti-automation flags</a:t>
             </a:r>
             <a:endParaRPr lang="en-US" sz="1000" dirty="0"/>
           </a:p>
@@ -4521,21 +4266,21 @@
       </p:sp>
       <p:pic>
         <p:nvPicPr>
-          <p:cNvPr id="15" name="Image 4" descr="preencoded.png">    </p:cNvPr>
+          <p:cNvPr id="9" name="Image 2" descr="preencoded.png"/>
           <p:cNvPicPr>
             <a:picLocks noChangeAspect="1"/>
           </p:cNvPicPr>
           <p:nvPr/>
         </p:nvPicPr>
         <p:blipFill>
-          <a:blip r:embed="rId5"/>
+          <a:blip r:embed="rId3"/>
           <a:stretch>
             <a:fillRect/>
           </a:stretch>
         </p:blipFill>
         <p:spPr>
           <a:xfrm>
-            <a:off x="2570321" y="4446389"/>
+            <a:off x="2570321" y="2712839"/>
             <a:ext cx="390644" cy="1143000"/>
           </a:xfrm>
           <a:prstGeom prst="rect">
@@ -4545,13 +4290,13 @@
       </p:pic>
       <p:sp>
         <p:nvSpPr>
-          <p:cNvPr id="16" name="Text 9"/>
-          <p:cNvSpPr/>
-          <p:nvPr/>
-        </p:nvSpPr>
-        <p:spPr>
-          <a:xfrm>
-            <a:off x="3046333" y="4576524"/>
+          <p:cNvPr id="10" name="Text 5"/>
+          <p:cNvSpPr/>
+          <p:nvPr/>
+        </p:nvSpPr>
+        <p:spPr>
+          <a:xfrm>
+            <a:off x="3046333" y="2842974"/>
             <a:ext cx="1628061" cy="203359"/>
           </a:xfrm>
           <a:prstGeom prst="rect">
@@ -4564,7 +4309,7 @@
           <a:bodyPr wrap="none" lIns="0" tIns="0" rIns="0" bIns="0" rtlCol="0" anchor="t"/>
           <a:lstStyle/>
           <a:p>
-            <a:pPr algn="l" indent="0" marL="0">
+            <a:pPr marL="0" indent="0" algn="l">
               <a:lnSpc>
                 <a:spcPts val="1600"/>
               </a:lnSpc>
@@ -4579,7 +4324,7 @@
                 <a:ea typeface="Inter Bold" pitchFamily="34" charset="-122"/>
                 <a:cs typeface="Inter Bold" pitchFamily="34" charset="-120"/>
               </a:rPr>
-              <a:t>TestNG Assertions</a:t>
+              <a:t>TestUtils Actions</a:t>
             </a:r>
             <a:endParaRPr lang="en-US" sz="1250" dirty="0"/>
           </a:p>
@@ -4587,13 +4332,13 @@
       </p:sp>
       <p:sp>
         <p:nvSpPr>
-          <p:cNvPr id="17" name="Text 10"/>
-          <p:cNvSpPr/>
-          <p:nvPr/>
-        </p:nvSpPr>
-        <p:spPr>
-          <a:xfrm>
-            <a:off x="3046333" y="4831080"/>
+          <p:cNvPr id="11" name="Text 6"/>
+          <p:cNvSpPr/>
+          <p:nvPr/>
+        </p:nvSpPr>
+        <p:spPr>
+          <a:xfrm>
+            <a:off x="3046333" y="3097530"/>
             <a:ext cx="9404390" cy="172522"/>
           </a:xfrm>
           <a:prstGeom prst="rect">
@@ -4606,7 +4351,7 @@
           <a:bodyPr wrap="none" lIns="0" tIns="0" rIns="0" bIns="0" rtlCol="0" anchor="t"/>
           <a:lstStyle/>
           <a:p>
-            <a:pPr algn="l" indent="0" marL="0">
+            <a:pPr marL="0" indent="0" algn="l">
               <a:lnSpc>
                 <a:spcPts val="1350"/>
               </a:lnSpc>
@@ -4621,7 +4366,7 @@
                 <a:ea typeface="Inter" pitchFamily="34" charset="-122"/>
                 <a:cs typeface="Inter" pitchFamily="34" charset="-120"/>
               </a:rPr>
-              <a:t>Validate pass/fail conditions</a:t>
+              <a:t>Dismiss cookie consent, perform login, wait for page load</a:t>
             </a:r>
             <a:endParaRPr lang="en-US" sz="1000" dirty="0"/>
           </a:p>
@@ -4629,21 +4374,21 @@
       </p:sp>
       <p:pic>
         <p:nvPicPr>
-          <p:cNvPr id="18" name="Image 5" descr="preencoded.png">    </p:cNvPr>
+          <p:cNvPr id="12" name="Image 3" descr="preencoded.png"/>
           <p:cNvPicPr>
             <a:picLocks noChangeAspect="1"/>
           </p:cNvPicPr>
           <p:nvPr/>
         </p:nvPicPr>
         <p:blipFill>
-          <a:blip r:embed="rId6"/>
+          <a:blip r:embed="rId3"/>
           <a:stretch>
             <a:fillRect/>
           </a:stretch>
         </p:blipFill>
         <p:spPr>
           <a:xfrm>
-            <a:off x="2374940" y="5313164"/>
+            <a:off x="2765703" y="3579614"/>
             <a:ext cx="390644" cy="1143000"/>
           </a:xfrm>
           <a:prstGeom prst="rect">
@@ -4653,13 +4398,13 @@
       </p:pic>
       <p:sp>
         <p:nvSpPr>
-          <p:cNvPr id="19" name="Text 11"/>
-          <p:cNvSpPr/>
-          <p:nvPr/>
-        </p:nvSpPr>
-        <p:spPr>
-          <a:xfrm>
-            <a:off x="2850952" y="5443299"/>
+          <p:cNvPr id="13" name="Text 7"/>
+          <p:cNvSpPr/>
+          <p:nvPr/>
+        </p:nvSpPr>
+        <p:spPr>
+          <a:xfrm>
+            <a:off x="3241715" y="3709749"/>
             <a:ext cx="1628061" cy="203359"/>
           </a:xfrm>
           <a:prstGeom prst="rect">
@@ -4672,7 +4417,7 @@
           <a:bodyPr wrap="none" lIns="0" tIns="0" rIns="0" bIns="0" rtlCol="0" anchor="t"/>
           <a:lstStyle/>
           <a:p>
-            <a:pPr algn="l" indent="0" marL="0">
+            <a:pPr marL="0" indent="0" algn="l">
               <a:lnSpc>
                 <a:spcPts val="1600"/>
               </a:lnSpc>
@@ -4687,7 +4432,7 @@
                 <a:ea typeface="Inter Bold" pitchFamily="34" charset="-122"/>
                 <a:cs typeface="Inter Bold" pitchFamily="34" charset="-120"/>
               </a:rPr>
-              <a:t>Teardown</a:t>
+              <a:t>Execute Tests</a:t>
             </a:r>
             <a:endParaRPr lang="en-US" sz="1250" dirty="0"/>
           </a:p>
@@ -4695,14 +4440,14 @@
       </p:sp>
       <p:sp>
         <p:nvSpPr>
-          <p:cNvPr id="20" name="Text 12"/>
-          <p:cNvSpPr/>
-          <p:nvPr/>
-        </p:nvSpPr>
-        <p:spPr>
-          <a:xfrm>
-            <a:off x="2850952" y="5697855"/>
-            <a:ext cx="9599771" cy="172522"/>
+          <p:cNvPr id="14" name="Text 8"/>
+          <p:cNvSpPr/>
+          <p:nvPr/>
+        </p:nvSpPr>
+        <p:spPr>
+          <a:xfrm>
+            <a:off x="3241715" y="3964305"/>
+            <a:ext cx="9209008" cy="172522"/>
           </a:xfrm>
           <a:prstGeom prst="rect">
             <a:avLst/>
@@ -4714,7 +4459,7 @@
           <a:bodyPr wrap="none" lIns="0" tIns="0" rIns="0" bIns="0" rtlCol="0" anchor="t"/>
           <a:lstStyle/>
           <a:p>
-            <a:pPr algn="l" indent="0" marL="0">
+            <a:pPr marL="0" indent="0" algn="l">
               <a:lnSpc>
                 <a:spcPts val="1350"/>
               </a:lnSpc>
@@ -4729,7 +4474,7 @@
                 <a:ea typeface="Inter" pitchFamily="34" charset="-122"/>
                 <a:cs typeface="Inter" pitchFamily="34" charset="-120"/>
               </a:rPr>
-              <a:t>@AfterClass quits driver</a:t>
+              <a:t>Run 7–8 @Test methods per class</a:t>
             </a:r>
             <a:endParaRPr lang="en-US" sz="1000" dirty="0"/>
           </a:p>
@@ -4737,21 +4482,21 @@
       </p:sp>
       <p:pic>
         <p:nvPicPr>
-          <p:cNvPr id="21" name="Image 6" descr="preencoded.png">    </p:cNvPr>
+          <p:cNvPr id="15" name="Image 4" descr="preencoded.png"/>
           <p:cNvPicPr>
             <a:picLocks noChangeAspect="1"/>
           </p:cNvPicPr>
           <p:nvPr/>
         </p:nvPicPr>
         <p:blipFill>
-          <a:blip r:embed="rId7"/>
+          <a:blip r:embed="rId3"/>
           <a:stretch>
             <a:fillRect/>
           </a:stretch>
         </p:blipFill>
         <p:spPr>
           <a:xfrm>
-            <a:off x="2179677" y="6179939"/>
+            <a:off x="2570321" y="4446389"/>
             <a:ext cx="390644" cy="1143000"/>
           </a:xfrm>
           <a:prstGeom prst="rect">
@@ -4761,13 +4506,13 @@
       </p:pic>
       <p:sp>
         <p:nvSpPr>
-          <p:cNvPr id="22" name="Text 13"/>
-          <p:cNvSpPr/>
-          <p:nvPr/>
-        </p:nvSpPr>
-        <p:spPr>
-          <a:xfrm>
-            <a:off x="2655689" y="6310074"/>
+          <p:cNvPr id="16" name="Text 9"/>
+          <p:cNvSpPr/>
+          <p:nvPr/>
+        </p:nvSpPr>
+        <p:spPr>
+          <a:xfrm>
+            <a:off x="3046333" y="4576524"/>
             <a:ext cx="1628061" cy="203359"/>
           </a:xfrm>
           <a:prstGeom prst="rect">
@@ -4780,7 +4525,7 @@
           <a:bodyPr wrap="none" lIns="0" tIns="0" rIns="0" bIns="0" rtlCol="0" anchor="t"/>
           <a:lstStyle/>
           <a:p>
-            <a:pPr algn="l" indent="0" marL="0">
+            <a:pPr marL="0" indent="0" algn="l">
               <a:lnSpc>
                 <a:spcPts val="1600"/>
               </a:lnSpc>
@@ -4795,7 +4540,7 @@
                 <a:ea typeface="Inter Bold" pitchFamily="34" charset="-122"/>
                 <a:cs typeface="Inter Bold" pitchFamily="34" charset="-120"/>
               </a:rPr>
-              <a:t>Maven Execution</a:t>
+              <a:t>TestNG Assertions</a:t>
             </a:r>
             <a:endParaRPr lang="en-US" sz="1250" dirty="0"/>
           </a:p>
@@ -4803,14 +4548,14 @@
       </p:sp>
       <p:sp>
         <p:nvSpPr>
-          <p:cNvPr id="23" name="Text 14"/>
-          <p:cNvSpPr/>
-          <p:nvPr/>
-        </p:nvSpPr>
-        <p:spPr>
-          <a:xfrm>
-            <a:off x="2655689" y="6564630"/>
-            <a:ext cx="9795034" cy="172522"/>
+          <p:cNvPr id="17" name="Text 10"/>
+          <p:cNvSpPr/>
+          <p:nvPr/>
+        </p:nvSpPr>
+        <p:spPr>
+          <a:xfrm>
+            <a:off x="3046333" y="4831080"/>
+            <a:ext cx="9404390" cy="172522"/>
           </a:xfrm>
           <a:prstGeom prst="rect">
             <a:avLst/>
@@ -4822,7 +4567,7 @@
           <a:bodyPr wrap="none" lIns="0" tIns="0" rIns="0" bIns="0" rtlCol="0" anchor="t"/>
           <a:lstStyle/>
           <a:p>
-            <a:pPr algn="l" indent="0" marL="0">
+            <a:pPr marL="0" indent="0" algn="l">
               <a:lnSpc>
                 <a:spcPts val="1350"/>
               </a:lnSpc>
@@ -4837,7 +4582,7 @@
                 <a:ea typeface="Inter" pitchFamily="34" charset="-122"/>
                 <a:cs typeface="Inter" pitchFamily="34" charset="-120"/>
               </a:rPr>
-              <a:t>Surefire runs 8 test classes via testng.xml</a:t>
+              <a:t>Validate pass/fail conditions</a:t>
             </a:r>
             <a:endParaRPr lang="en-US" sz="1000" dirty="0"/>
           </a:p>
@@ -4845,21 +4590,21 @@
       </p:sp>
       <p:pic>
         <p:nvPicPr>
-          <p:cNvPr id="24" name="Image 7" descr="preencoded.png">    </p:cNvPr>
+          <p:cNvPr id="18" name="Image 5" descr="preencoded.png"/>
           <p:cNvPicPr>
             <a:picLocks noChangeAspect="1"/>
           </p:cNvPicPr>
           <p:nvPr/>
         </p:nvPicPr>
         <p:blipFill>
-          <a:blip r:embed="rId8"/>
+          <a:blip r:embed="rId3"/>
           <a:stretch>
             <a:fillRect/>
           </a:stretch>
         </p:blipFill>
         <p:spPr>
           <a:xfrm>
-            <a:off x="2374940" y="7046714"/>
+            <a:off x="2374940" y="5313164"/>
             <a:ext cx="390644" cy="1143000"/>
           </a:xfrm>
           <a:prstGeom prst="rect">
@@ -4869,13 +4614,13 @@
       </p:pic>
       <p:sp>
         <p:nvSpPr>
-          <p:cNvPr id="25" name="Text 15"/>
-          <p:cNvSpPr/>
-          <p:nvPr/>
-        </p:nvSpPr>
-        <p:spPr>
-          <a:xfrm>
-            <a:off x="2850952" y="7176849"/>
+          <p:cNvPr id="19" name="Text 11"/>
+          <p:cNvSpPr/>
+          <p:nvPr/>
+        </p:nvSpPr>
+        <p:spPr>
+          <a:xfrm>
+            <a:off x="2850952" y="5443299"/>
             <a:ext cx="1628061" cy="203359"/>
           </a:xfrm>
           <a:prstGeom prst="rect">
@@ -4888,7 +4633,7 @@
           <a:bodyPr wrap="none" lIns="0" tIns="0" rIns="0" bIns="0" rtlCol="0" anchor="t"/>
           <a:lstStyle/>
           <a:p>
-            <a:pPr algn="l" indent="0" marL="0">
+            <a:pPr marL="0" indent="0" algn="l">
               <a:lnSpc>
                 <a:spcPts val="1600"/>
               </a:lnSpc>
@@ -4903,6 +4648,222 @@
                 <a:ea typeface="Inter Bold" pitchFamily="34" charset="-122"/>
                 <a:cs typeface="Inter Bold" pitchFamily="34" charset="-120"/>
               </a:rPr>
+              <a:t>Teardown</a:t>
+            </a:r>
+            <a:endParaRPr lang="en-US" sz="1250" dirty="0"/>
+          </a:p>
+        </p:txBody>
+      </p:sp>
+      <p:sp>
+        <p:nvSpPr>
+          <p:cNvPr id="20" name="Text 12"/>
+          <p:cNvSpPr/>
+          <p:nvPr/>
+        </p:nvSpPr>
+        <p:spPr>
+          <a:xfrm>
+            <a:off x="2850952" y="5697855"/>
+            <a:ext cx="9599771" cy="172522"/>
+          </a:xfrm>
+          <a:prstGeom prst="rect">
+            <a:avLst/>
+          </a:prstGeom>
+          <a:noFill/>
+          <a:ln/>
+        </p:spPr>
+        <p:txBody>
+          <a:bodyPr wrap="none" lIns="0" tIns="0" rIns="0" bIns="0" rtlCol="0" anchor="t"/>
+          <a:lstStyle/>
+          <a:p>
+            <a:pPr marL="0" indent="0" algn="l">
+              <a:lnSpc>
+                <a:spcPts val="1350"/>
+              </a:lnSpc>
+              <a:buNone/>
+            </a:pPr>
+            <a:r>
+              <a:rPr lang="en-US" sz="1000" dirty="0">
+                <a:solidFill>
+                  <a:srgbClr val="E5E0DF"/>
+                </a:solidFill>
+                <a:latin typeface="Inter" pitchFamily="34" charset="0"/>
+                <a:ea typeface="Inter" pitchFamily="34" charset="-122"/>
+                <a:cs typeface="Inter" pitchFamily="34" charset="-120"/>
+              </a:rPr>
+              <a:t>@AfterClass quits driver</a:t>
+            </a:r>
+            <a:endParaRPr lang="en-US" sz="1000" dirty="0"/>
+          </a:p>
+        </p:txBody>
+      </p:sp>
+      <p:pic>
+        <p:nvPicPr>
+          <p:cNvPr id="21" name="Image 6" descr="preencoded.png"/>
+          <p:cNvPicPr>
+            <a:picLocks noChangeAspect="1"/>
+          </p:cNvPicPr>
+          <p:nvPr/>
+        </p:nvPicPr>
+        <p:blipFill>
+          <a:blip r:embed="rId3"/>
+          <a:stretch>
+            <a:fillRect/>
+          </a:stretch>
+        </p:blipFill>
+        <p:spPr>
+          <a:xfrm>
+            <a:off x="2179677" y="6179939"/>
+            <a:ext cx="390644" cy="1143000"/>
+          </a:xfrm>
+          <a:prstGeom prst="rect">
+            <a:avLst/>
+          </a:prstGeom>
+        </p:spPr>
+      </p:pic>
+      <p:sp>
+        <p:nvSpPr>
+          <p:cNvPr id="22" name="Text 13"/>
+          <p:cNvSpPr/>
+          <p:nvPr/>
+        </p:nvSpPr>
+        <p:spPr>
+          <a:xfrm>
+            <a:off x="2655689" y="6310074"/>
+            <a:ext cx="1628061" cy="203359"/>
+          </a:xfrm>
+          <a:prstGeom prst="rect">
+            <a:avLst/>
+          </a:prstGeom>
+          <a:noFill/>
+          <a:ln/>
+        </p:spPr>
+        <p:txBody>
+          <a:bodyPr wrap="none" lIns="0" tIns="0" rIns="0" bIns="0" rtlCol="0" anchor="t"/>
+          <a:lstStyle/>
+          <a:p>
+            <a:pPr marL="0" indent="0" algn="l">
+              <a:lnSpc>
+                <a:spcPts val="1600"/>
+              </a:lnSpc>
+              <a:buNone/>
+            </a:pPr>
+            <a:r>
+              <a:rPr lang="en-US" sz="1250" b="1" dirty="0">
+                <a:solidFill>
+                  <a:srgbClr val="E5E0DF"/>
+                </a:solidFill>
+                <a:latin typeface="Inter Bold" pitchFamily="34" charset="0"/>
+                <a:ea typeface="Inter Bold" pitchFamily="34" charset="-122"/>
+                <a:cs typeface="Inter Bold" pitchFamily="34" charset="-120"/>
+              </a:rPr>
+              <a:t>Maven Execution</a:t>
+            </a:r>
+            <a:endParaRPr lang="en-US" sz="1250" dirty="0"/>
+          </a:p>
+        </p:txBody>
+      </p:sp>
+      <p:sp>
+        <p:nvSpPr>
+          <p:cNvPr id="23" name="Text 14"/>
+          <p:cNvSpPr/>
+          <p:nvPr/>
+        </p:nvSpPr>
+        <p:spPr>
+          <a:xfrm>
+            <a:off x="2655689" y="6564630"/>
+            <a:ext cx="9795034" cy="172522"/>
+          </a:xfrm>
+          <a:prstGeom prst="rect">
+            <a:avLst/>
+          </a:prstGeom>
+          <a:noFill/>
+          <a:ln/>
+        </p:spPr>
+        <p:txBody>
+          <a:bodyPr wrap="none" lIns="0" tIns="0" rIns="0" bIns="0" rtlCol="0" anchor="t"/>
+          <a:lstStyle/>
+          <a:p>
+            <a:pPr marL="0" indent="0" algn="l">
+              <a:lnSpc>
+                <a:spcPts val="1350"/>
+              </a:lnSpc>
+              <a:buNone/>
+            </a:pPr>
+            <a:r>
+              <a:rPr lang="en-US" sz="1000" dirty="0">
+                <a:solidFill>
+                  <a:srgbClr val="E5E0DF"/>
+                </a:solidFill>
+                <a:latin typeface="Inter" pitchFamily="34" charset="0"/>
+                <a:ea typeface="Inter" pitchFamily="34" charset="-122"/>
+                <a:cs typeface="Inter" pitchFamily="34" charset="-120"/>
+              </a:rPr>
+              <a:t>Surefire runs 8 test classes via testng.xml</a:t>
+            </a:r>
+            <a:endParaRPr lang="en-US" sz="1000" dirty="0"/>
+          </a:p>
+        </p:txBody>
+      </p:sp>
+      <p:pic>
+        <p:nvPicPr>
+          <p:cNvPr id="24" name="Image 7" descr="preencoded.png"/>
+          <p:cNvPicPr>
+            <a:picLocks noChangeAspect="1"/>
+          </p:cNvPicPr>
+          <p:nvPr/>
+        </p:nvPicPr>
+        <p:blipFill>
+          <a:blip r:embed="rId3"/>
+          <a:stretch>
+            <a:fillRect/>
+          </a:stretch>
+        </p:blipFill>
+        <p:spPr>
+          <a:xfrm>
+            <a:off x="2374940" y="7046714"/>
+            <a:ext cx="390644" cy="1143000"/>
+          </a:xfrm>
+          <a:prstGeom prst="rect">
+            <a:avLst/>
+          </a:prstGeom>
+        </p:spPr>
+      </p:pic>
+      <p:sp>
+        <p:nvSpPr>
+          <p:cNvPr id="25" name="Text 15"/>
+          <p:cNvSpPr/>
+          <p:nvPr/>
+        </p:nvSpPr>
+        <p:spPr>
+          <a:xfrm>
+            <a:off x="2850952" y="7176849"/>
+            <a:ext cx="1628061" cy="203359"/>
+          </a:xfrm>
+          <a:prstGeom prst="rect">
+            <a:avLst/>
+          </a:prstGeom>
+          <a:noFill/>
+          <a:ln/>
+        </p:spPr>
+        <p:txBody>
+          <a:bodyPr wrap="none" lIns="0" tIns="0" rIns="0" bIns="0" rtlCol="0" anchor="t"/>
+          <a:lstStyle/>
+          <a:p>
+            <a:pPr marL="0" indent="0" algn="l">
+              <a:lnSpc>
+                <a:spcPts val="1600"/>
+              </a:lnSpc>
+              <a:buNone/>
+            </a:pPr>
+            <a:r>
+              <a:rPr lang="en-US" sz="1250" b="1" dirty="0">
+                <a:solidFill>
+                  <a:srgbClr val="E5E0DF"/>
+                </a:solidFill>
+                <a:latin typeface="Inter Bold" pitchFamily="34" charset="0"/>
+                <a:ea typeface="Inter Bold" pitchFamily="34" charset="-122"/>
+                <a:cs typeface="Inter Bold" pitchFamily="34" charset="-120"/>
+              </a:rPr>
               <a:t>Report Generation</a:t>
             </a:r>
             <a:endParaRPr lang="en-US" sz="1250" dirty="0"/>
@@ -4930,7 +4891,7 @@
           <a:bodyPr wrap="none" lIns="0" tIns="0" rIns="0" bIns="0" rtlCol="0" anchor="t"/>
           <a:lstStyle/>
           <a:p>
-            <a:pPr algn="l" indent="0" marL="0">
+            <a:pPr marL="0" indent="0" algn="l">
               <a:lnSpc>
                 <a:spcPts val="1350"/>
               </a:lnSpc>
@@ -4997,7 +4958,7 @@
           <a:bodyPr wrap="none" lIns="0" tIns="0" rIns="0" bIns="0" rtlCol="0" anchor="t"/>
           <a:lstStyle/>
           <a:p>
-            <a:pPr algn="l" indent="0" marL="0">
+            <a:pPr marL="0" indent="0" algn="l">
               <a:lnSpc>
                 <a:spcPts val="4850"/>
               </a:lnSpc>
@@ -5039,7 +5000,7 @@
           <a:bodyPr wrap="none" lIns="0" tIns="0" rIns="0" bIns="0" rtlCol="0" anchor="t"/>
           <a:lstStyle/>
           <a:p>
-            <a:pPr algn="l" indent="0" marL="0">
+            <a:pPr marL="0" indent="0" algn="l">
               <a:lnSpc>
                 <a:spcPts val="2400"/>
               </a:lnSpc>
@@ -5081,7 +5042,7 @@
           <a:bodyPr wrap="square" lIns="0" tIns="0" rIns="0" bIns="0" rtlCol="0" anchor="t"/>
           <a:lstStyle/>
           <a:p>
-            <a:pPr algn="l" marL="342900" indent="-342900">
+            <a:pPr marL="342900" indent="-342900" algn="l">
               <a:lnSpc>
                 <a:spcPts val="2500"/>
               </a:lnSpc>
@@ -5102,7 +5063,7 @@
             <a:endParaRPr lang="en-US" sz="1550" dirty="0"/>
           </a:p>
           <a:p>
-            <a:pPr algn="l" marL="342900" indent="-342900">
+            <a:pPr marL="342900" indent="-342900" algn="l">
               <a:lnSpc>
                 <a:spcPts val="2500"/>
               </a:lnSpc>
@@ -5123,7 +5084,7 @@
             <a:endParaRPr lang="en-US" sz="1550" dirty="0"/>
           </a:p>
           <a:p>
-            <a:pPr algn="l" marL="342900" indent="-342900">
+            <a:pPr marL="342900" indent="-342900" algn="l">
               <a:lnSpc>
                 <a:spcPts val="2500"/>
               </a:lnSpc>
@@ -5166,7 +5127,7 @@
           <a:bodyPr wrap="none" lIns="0" tIns="0" rIns="0" bIns="0" rtlCol="0" anchor="t"/>
           <a:lstStyle/>
           <a:p>
-            <a:pPr algn="l" indent="0" marL="0">
+            <a:pPr marL="0" indent="0" algn="l">
               <a:lnSpc>
                 <a:spcPts val="2400"/>
               </a:lnSpc>
@@ -5208,7 +5169,7 @@
           <a:bodyPr wrap="square" lIns="0" tIns="0" rIns="0" bIns="0" rtlCol="0" anchor="t"/>
           <a:lstStyle/>
           <a:p>
-            <a:pPr algn="l" marL="342900" indent="-342900">
+            <a:pPr marL="342900" indent="-342900" algn="l">
               <a:lnSpc>
                 <a:spcPts val="2500"/>
               </a:lnSpc>
@@ -5229,7 +5190,7 @@
             <a:endParaRPr lang="en-US" sz="1550" dirty="0"/>
           </a:p>
           <a:p>
-            <a:pPr algn="l" marL="342900" indent="-342900">
+            <a:pPr marL="342900" indent="-342900" algn="l">
               <a:lnSpc>
                 <a:spcPts val="2500"/>
               </a:lnSpc>
@@ -5250,7 +5211,7 @@
             <a:endParaRPr lang="en-US" sz="1550" dirty="0"/>
           </a:p>
           <a:p>
-            <a:pPr algn="l" marL="342900" indent="-342900">
+            <a:pPr marL="342900" indent="-342900" algn="l">
               <a:lnSpc>
                 <a:spcPts val="2500"/>
               </a:lnSpc>
@@ -5293,7 +5254,7 @@
           <a:bodyPr wrap="none" lIns="0" tIns="0" rIns="0" bIns="0" rtlCol="0" anchor="t"/>
           <a:lstStyle/>
           <a:p>
-            <a:pPr algn="l" indent="0" marL="0">
+            <a:pPr marL="0" indent="0" algn="l">
               <a:lnSpc>
                 <a:spcPts val="2400"/>
               </a:lnSpc>
@@ -5335,7 +5296,7 @@
           <a:bodyPr wrap="square" lIns="0" tIns="0" rIns="0" bIns="0" rtlCol="0" anchor="t"/>
           <a:lstStyle/>
           <a:p>
-            <a:pPr algn="l" marL="342900" indent="-342900">
+            <a:pPr marL="342900" indent="-342900" algn="l">
               <a:lnSpc>
                 <a:spcPts val="2500"/>
               </a:lnSpc>
@@ -5356,7 +5317,7 @@
             <a:endParaRPr lang="en-US" sz="1550" dirty="0"/>
           </a:p>
           <a:p>
-            <a:pPr algn="l" marL="342900" indent="-342900">
+            <a:pPr marL="342900" indent="-342900" algn="l">
               <a:lnSpc>
                 <a:spcPts val="2500"/>
               </a:lnSpc>
@@ -5377,7 +5338,7 @@
             <a:endParaRPr lang="en-US" sz="1550" dirty="0"/>
           </a:p>
           <a:p>
-            <a:pPr algn="l" marL="342900" indent="-342900">
+            <a:pPr marL="342900" indent="-342900" algn="l">
               <a:lnSpc>
                 <a:spcPts val="2500"/>
               </a:lnSpc>
@@ -5398,7 +5359,7 @@
             <a:endParaRPr lang="en-US" sz="1550" dirty="0"/>
           </a:p>
           <a:p>
-            <a:pPr algn="l" marL="342900" indent="-342900">
+            <a:pPr marL="342900" indent="-342900" algn="l">
               <a:lnSpc>
                 <a:spcPts val="2500"/>
               </a:lnSpc>
@@ -5466,7 +5427,7 @@
           <a:bodyPr wrap="none" lIns="0" tIns="0" rIns="0" bIns="0" rtlCol="0" anchor="t"/>
           <a:lstStyle/>
           <a:p>
-            <a:pPr algn="l" indent="0" marL="0">
+            <a:pPr marL="0" indent="0" algn="l">
               <a:lnSpc>
                 <a:spcPts val="4850"/>
               </a:lnSpc>
@@ -5489,17 +5450,17 @@
       </p:sp>
       <p:pic>
         <p:nvPicPr>
-          <p:cNvPr id="3" name="Image 0" descr="preencoded.png">    </p:cNvPr>
+          <p:cNvPr id="3" name="Image 0" descr="preencoded.png"/>
           <p:cNvPicPr>
             <a:picLocks noChangeAspect="1"/>
           </p:cNvPicPr>
           <p:nvPr/>
         </p:nvPicPr>
         <p:blipFill>
-          <a:blip r:embed="rId1">
+          <a:blip>
             <a:extLst>
               <a:ext uri="{96DAC541-7B7A-43D3-8B79-37D633B846F1}">
-                <asvg:svgBlip xmlns:asvg="http://schemas.microsoft.com/office/drawing/2016/SVG/main" r:embed="rId2"/>
+                <asvg:svgBlip xmlns:asvg="http://schemas.microsoft.com/office/drawing/2016/SVG/main" r:embed="rId3"/>
               </a:ext>
             </a:extLst>
           </a:blip>
@@ -5538,7 +5499,7 @@
           <a:bodyPr wrap="none" lIns="0" tIns="0" rIns="0" bIns="0" rtlCol="0" anchor="t"/>
           <a:lstStyle/>
           <a:p>
-            <a:pPr algn="l" indent="0" marL="0">
+            <a:pPr marL="0" indent="0" algn="l">
               <a:lnSpc>
                 <a:spcPts val="2400"/>
               </a:lnSpc>
@@ -5580,7 +5541,7 @@
           <a:bodyPr wrap="none" lIns="0" tIns="0" rIns="0" bIns="0" rtlCol="0" anchor="t"/>
           <a:lstStyle/>
           <a:p>
-            <a:pPr algn="l" indent="0" marL="0">
+            <a:pPr marL="0" indent="0" algn="l">
               <a:lnSpc>
                 <a:spcPts val="2500"/>
               </a:lnSpc>
@@ -5603,14 +5564,14 @@
       </p:sp>
       <p:pic>
         <p:nvPicPr>
-          <p:cNvPr id="6" name="Image 1" descr="preencoded.png">    </p:cNvPr>
+          <p:cNvPr id="6" name="Image 1" descr="preencoded.png"/>
           <p:cNvPicPr>
             <a:picLocks noChangeAspect="1"/>
           </p:cNvPicPr>
           <p:nvPr/>
         </p:nvPicPr>
         <p:blipFill>
-          <a:blip r:embed="rId3">
+          <a:blip>
             <a:extLst>
               <a:ext uri="{96DAC541-7B7A-43D3-8B79-37D633B846F1}">
                 <asvg:svgBlip xmlns:asvg="http://schemas.microsoft.com/office/drawing/2016/SVG/main" r:embed="rId4"/>
@@ -5652,7 +5613,7 @@
           <a:bodyPr wrap="none" lIns="0" tIns="0" rIns="0" bIns="0" rtlCol="0" anchor="t"/>
           <a:lstStyle/>
           <a:p>
-            <a:pPr algn="l" indent="0" marL="0">
+            <a:pPr marL="0" indent="0" algn="l">
               <a:lnSpc>
                 <a:spcPts val="2400"/>
               </a:lnSpc>
@@ -5694,7 +5655,7 @@
           <a:bodyPr wrap="none" lIns="0" tIns="0" rIns="0" bIns="0" rtlCol="0" anchor="t"/>
           <a:lstStyle/>
           <a:p>
-            <a:pPr algn="l" indent="0" marL="0">
+            <a:pPr marL="0" indent="0" algn="l">
               <a:lnSpc>
                 <a:spcPts val="2500"/>
               </a:lnSpc>
@@ -5717,14 +5678,128 @@
       </p:sp>
       <p:pic>
         <p:nvPicPr>
-          <p:cNvPr id="9" name="Image 2" descr="preencoded.png">    </p:cNvPr>
+          <p:cNvPr id="9" name="Image 2" descr="preencoded.png"/>
           <p:cNvPicPr>
             <a:picLocks noChangeAspect="1"/>
           </p:cNvPicPr>
           <p:nvPr/>
         </p:nvPicPr>
         <p:blipFill>
-          <a:blip r:embed="rId5">
+          <a:blip>
+            <a:extLst>
+              <a:ext uri="{96DAC541-7B7A-43D3-8B79-37D633B846F1}">
+                <asvg:svgBlip xmlns:asvg="http://schemas.microsoft.com/office/drawing/2016/SVG/main" r:embed="rId5"/>
+              </a:ext>
+            </a:extLst>
+          </a:blip>
+          <a:stretch>
+            <a:fillRect/>
+          </a:stretch>
+        </p:blipFill>
+        <p:spPr>
+          <a:xfrm>
+            <a:off x="9654302" y="1821418"/>
+            <a:ext cx="396835" cy="396835"/>
+          </a:xfrm>
+          <a:prstGeom prst="rect">
+            <a:avLst/>
+          </a:prstGeom>
+        </p:spPr>
+      </p:pic>
+      <p:sp>
+        <p:nvSpPr>
+          <p:cNvPr id="10" name="Text 5"/>
+          <p:cNvSpPr/>
+          <p:nvPr/>
+        </p:nvSpPr>
+        <p:spPr>
+          <a:xfrm>
+            <a:off x="9654302" y="2466261"/>
+            <a:ext cx="2480905" cy="310158"/>
+          </a:xfrm>
+          <a:prstGeom prst="rect">
+            <a:avLst/>
+          </a:prstGeom>
+          <a:noFill/>
+          <a:ln/>
+        </p:spPr>
+        <p:txBody>
+          <a:bodyPr wrap="none" lIns="0" tIns="0" rIns="0" bIns="0" rtlCol="0" anchor="t"/>
+          <a:lstStyle/>
+          <a:p>
+            <a:pPr marL="0" indent="0" algn="l">
+              <a:lnSpc>
+                <a:spcPts val="2400"/>
+              </a:lnSpc>
+              <a:buNone/>
+            </a:pPr>
+            <a:r>
+              <a:rPr lang="en-US" sz="1950" b="1" dirty="0">
+                <a:solidFill>
+                  <a:srgbClr val="E5E0DF"/>
+                </a:solidFill>
+                <a:latin typeface="Inter Bold" pitchFamily="34" charset="0"/>
+                <a:ea typeface="Inter Bold" pitchFamily="34" charset="-122"/>
+                <a:cs typeface="Inter Bold" pitchFamily="34" charset="-120"/>
+              </a:rPr>
+              <a:t>TestNG 7.9.0</a:t>
+            </a:r>
+            <a:endParaRPr lang="en-US" sz="1950" dirty="0"/>
+          </a:p>
+        </p:txBody>
+      </p:sp>
+      <p:sp>
+        <p:nvSpPr>
+          <p:cNvPr id="11" name="Text 6"/>
+          <p:cNvSpPr/>
+          <p:nvPr/>
+        </p:nvSpPr>
+        <p:spPr>
+          <a:xfrm>
+            <a:off x="9654302" y="2895481"/>
+            <a:ext cx="4182308" cy="317540"/>
+          </a:xfrm>
+          <a:prstGeom prst="rect">
+            <a:avLst/>
+          </a:prstGeom>
+          <a:noFill/>
+          <a:ln/>
+        </p:spPr>
+        <p:txBody>
+          <a:bodyPr wrap="none" lIns="0" tIns="0" rIns="0" bIns="0" rtlCol="0" anchor="t"/>
+          <a:lstStyle/>
+          <a:p>
+            <a:pPr marL="0" indent="0" algn="l">
+              <a:lnSpc>
+                <a:spcPts val="2500"/>
+              </a:lnSpc>
+              <a:buNone/>
+            </a:pPr>
+            <a:r>
+              <a:rPr lang="en-US" sz="1550" dirty="0">
+                <a:solidFill>
+                  <a:srgbClr val="E5E0DF"/>
+                </a:solidFill>
+                <a:latin typeface="Inter" pitchFamily="34" charset="0"/>
+                <a:ea typeface="Inter" pitchFamily="34" charset="-122"/>
+                <a:cs typeface="Inter" pitchFamily="34" charset="-120"/>
+              </a:rPr>
+              <a:t>Test framework, assertions, HTML reporting</a:t>
+            </a:r>
+            <a:endParaRPr lang="en-US" sz="1550" dirty="0"/>
+          </a:p>
+        </p:txBody>
+      </p:sp>
+      <p:pic>
+        <p:nvPicPr>
+          <p:cNvPr id="12" name="Image 3" descr="preencoded.png"/>
+          <p:cNvPicPr>
+            <a:picLocks noChangeAspect="1"/>
+          </p:cNvPicPr>
+          <p:nvPr/>
+        </p:nvPicPr>
+        <p:blipFill>
+          <a:blip>
             <a:extLst>
               <a:ext uri="{96DAC541-7B7A-43D3-8B79-37D633B846F1}">
                 <asvg:svgBlip xmlns:asvg="http://schemas.microsoft.com/office/drawing/2016/SVG/main" r:embed="rId6"/>
@@ -5737,7 +5812,7 @@
         </p:blipFill>
         <p:spPr>
           <a:xfrm>
-            <a:off x="9654302" y="1821418"/>
+            <a:off x="793790" y="3609856"/>
             <a:ext cx="396835" cy="396835"/>
           </a:xfrm>
           <a:prstGeom prst="rect">
@@ -5747,14 +5822,14 @@
       </p:pic>
       <p:sp>
         <p:nvSpPr>
-          <p:cNvPr id="10" name="Text 5"/>
-          <p:cNvSpPr/>
-          <p:nvPr/>
-        </p:nvSpPr>
-        <p:spPr>
-          <a:xfrm>
-            <a:off x="9654302" y="2466261"/>
-            <a:ext cx="2480905" cy="310158"/>
+          <p:cNvPr id="13" name="Text 7"/>
+          <p:cNvSpPr/>
+          <p:nvPr/>
+        </p:nvSpPr>
+        <p:spPr>
+          <a:xfrm>
+            <a:off x="793790" y="4254698"/>
+            <a:ext cx="3013115" cy="310158"/>
           </a:xfrm>
           <a:prstGeom prst="rect">
             <a:avLst/>
@@ -5766,7 +5841,7 @@
           <a:bodyPr wrap="none" lIns="0" tIns="0" rIns="0" bIns="0" rtlCol="0" anchor="t"/>
           <a:lstStyle/>
           <a:p>
-            <a:pPr algn="l" indent="0" marL="0">
+            <a:pPr marL="0" indent="0" algn="l">
               <a:lnSpc>
                 <a:spcPts val="2400"/>
               </a:lnSpc>
@@ -5781,7 +5856,7 @@
                 <a:ea typeface="Inter Bold" pitchFamily="34" charset="-122"/>
                 <a:cs typeface="Inter Bold" pitchFamily="34" charset="-120"/>
               </a:rPr>
-              <a:t>TestNG 7.9.0</a:t>
+              <a:t>WebDriverManager 5.7.0</a:t>
             </a:r>
             <a:endParaRPr lang="en-US" sz="1950" dirty="0"/>
           </a:p>
@@ -5789,14 +5864,14 @@
       </p:sp>
       <p:sp>
         <p:nvSpPr>
-          <p:cNvPr id="11" name="Text 6"/>
-          <p:cNvSpPr/>
-          <p:nvPr/>
-        </p:nvSpPr>
-        <p:spPr>
-          <a:xfrm>
-            <a:off x="9654302" y="2895481"/>
-            <a:ext cx="4182308" cy="317540"/>
+          <p:cNvPr id="14" name="Text 8"/>
+          <p:cNvSpPr/>
+          <p:nvPr/>
+        </p:nvSpPr>
+        <p:spPr>
+          <a:xfrm>
+            <a:off x="793790" y="4683919"/>
+            <a:ext cx="4182189" cy="635079"/>
           </a:xfrm>
           <a:prstGeom prst="rect">
             <a:avLst/>
@@ -5805,10 +5880,10 @@
           <a:ln/>
         </p:spPr>
         <p:txBody>
-          <a:bodyPr wrap="none" lIns="0" tIns="0" rIns="0" bIns="0" rtlCol="0" anchor="t"/>
-          <a:lstStyle/>
-          <a:p>
-            <a:pPr algn="l" indent="0" marL="0">
+          <a:bodyPr wrap="square" lIns="0" tIns="0" rIns="0" bIns="0" rtlCol="0" anchor="t"/>
+          <a:lstStyle/>
+          <a:p>
+            <a:pPr marL="0" indent="0" algn="l">
               <a:lnSpc>
                 <a:spcPts val="2500"/>
               </a:lnSpc>
@@ -5823,7 +5898,7 @@
                 <a:ea typeface="Inter" pitchFamily="34" charset="-122"/>
                 <a:cs typeface="Inter" pitchFamily="34" charset="-120"/>
               </a:rPr>
-              <a:t>Test framework, assertions, HTML reporting</a:t>
+              <a:t>Automatic ChromeDriver binary management</a:t>
             </a:r>
             <a:endParaRPr lang="en-US" sz="1550" dirty="0"/>
           </a:p>
@@ -5831,14 +5906,128 @@
       </p:sp>
       <p:pic>
         <p:nvPicPr>
-          <p:cNvPr id="12" name="Image 3" descr="preencoded.png">    </p:cNvPr>
+          <p:cNvPr id="15" name="Image 4" descr="preencoded.png"/>
           <p:cNvPicPr>
             <a:picLocks noChangeAspect="1"/>
           </p:cNvPicPr>
           <p:nvPr/>
         </p:nvPicPr>
         <p:blipFill>
-          <a:blip r:embed="rId7">
+          <a:blip>
+            <a:extLst>
+              <a:ext uri="{96DAC541-7B7A-43D3-8B79-37D633B846F1}">
+                <asvg:svgBlip xmlns:asvg="http://schemas.microsoft.com/office/drawing/2016/SVG/main" r:embed="rId7"/>
+              </a:ext>
+            </a:extLst>
+          </a:blip>
+          <a:stretch>
+            <a:fillRect/>
+          </a:stretch>
+        </p:blipFill>
+        <p:spPr>
+          <a:xfrm>
+            <a:off x="5223986" y="3609856"/>
+            <a:ext cx="396835" cy="396835"/>
+          </a:xfrm>
+          <a:prstGeom prst="rect">
+            <a:avLst/>
+          </a:prstGeom>
+        </p:spPr>
+      </p:pic>
+      <p:sp>
+        <p:nvSpPr>
+          <p:cNvPr id="16" name="Text 9"/>
+          <p:cNvSpPr/>
+          <p:nvPr/>
+        </p:nvSpPr>
+        <p:spPr>
+          <a:xfrm>
+            <a:off x="5223986" y="4254698"/>
+            <a:ext cx="2980134" cy="310158"/>
+          </a:xfrm>
+          <a:prstGeom prst="rect">
+            <a:avLst/>
+          </a:prstGeom>
+          <a:noFill/>
+          <a:ln/>
+        </p:spPr>
+        <p:txBody>
+          <a:bodyPr wrap="none" lIns="0" tIns="0" rIns="0" bIns="0" rtlCol="0" anchor="t"/>
+          <a:lstStyle/>
+          <a:p>
+            <a:pPr marL="0" indent="0" algn="l">
+              <a:lnSpc>
+                <a:spcPts val="2400"/>
+              </a:lnSpc>
+              <a:buNone/>
+            </a:pPr>
+            <a:r>
+              <a:rPr lang="en-US" sz="1950" b="1" dirty="0">
+                <a:solidFill>
+                  <a:srgbClr val="E5E0DF"/>
+                </a:solidFill>
+                <a:latin typeface="Inter Bold" pitchFamily="34" charset="0"/>
+                <a:ea typeface="Inter Bold" pitchFamily="34" charset="-122"/>
+                <a:cs typeface="Inter Bold" pitchFamily="34" charset="-120"/>
+              </a:rPr>
+              <a:t>Maven 3 + Surefire 3.2.5</a:t>
+            </a:r>
+            <a:endParaRPr lang="en-US" sz="1950" dirty="0"/>
+          </a:p>
+        </p:txBody>
+      </p:sp>
+      <p:sp>
+        <p:nvSpPr>
+          <p:cNvPr id="17" name="Text 10"/>
+          <p:cNvSpPr/>
+          <p:nvPr/>
+        </p:nvSpPr>
+        <p:spPr>
+          <a:xfrm>
+            <a:off x="5223986" y="4683919"/>
+            <a:ext cx="4182308" cy="635079"/>
+          </a:xfrm>
+          <a:prstGeom prst="rect">
+            <a:avLst/>
+          </a:prstGeom>
+          <a:noFill/>
+          <a:ln/>
+        </p:spPr>
+        <p:txBody>
+          <a:bodyPr wrap="square" lIns="0" tIns="0" rIns="0" bIns="0" rtlCol="0" anchor="t"/>
+          <a:lstStyle/>
+          <a:p>
+            <a:pPr marL="0" indent="0" algn="l">
+              <a:lnSpc>
+                <a:spcPts val="2500"/>
+              </a:lnSpc>
+              <a:buNone/>
+            </a:pPr>
+            <a:r>
+              <a:rPr lang="en-US" sz="1550" dirty="0">
+                <a:solidFill>
+                  <a:srgbClr val="E5E0DF"/>
+                </a:solidFill>
+                <a:latin typeface="Inter" pitchFamily="34" charset="0"/>
+                <a:ea typeface="Inter" pitchFamily="34" charset="-122"/>
+                <a:cs typeface="Inter" pitchFamily="34" charset="-120"/>
+              </a:rPr>
+              <a:t>Build, dependency management, test execution</a:t>
+            </a:r>
+            <a:endParaRPr lang="en-US" sz="1550" dirty="0"/>
+          </a:p>
+        </p:txBody>
+      </p:sp>
+      <p:pic>
+        <p:nvPicPr>
+          <p:cNvPr id="18" name="Image 5" descr="preencoded.png"/>
+          <p:cNvPicPr>
+            <a:picLocks noChangeAspect="1"/>
+          </p:cNvPicPr>
+          <p:nvPr/>
+        </p:nvPicPr>
+        <p:blipFill>
+          <a:blip>
             <a:extLst>
               <a:ext uri="{96DAC541-7B7A-43D3-8B79-37D633B846F1}">
                 <asvg:svgBlip xmlns:asvg="http://schemas.microsoft.com/office/drawing/2016/SVG/main" r:embed="rId8"/>
@@ -5851,7 +6040,7 @@
         </p:blipFill>
         <p:spPr>
           <a:xfrm>
-            <a:off x="793790" y="3609856"/>
+            <a:off x="9654302" y="3609856"/>
             <a:ext cx="396835" cy="396835"/>
           </a:xfrm>
           <a:prstGeom prst="rect">
@@ -5861,14 +6050,14 @@
       </p:pic>
       <p:sp>
         <p:nvSpPr>
-          <p:cNvPr id="13" name="Text 7"/>
-          <p:cNvSpPr/>
-          <p:nvPr/>
-        </p:nvSpPr>
-        <p:spPr>
-          <a:xfrm>
-            <a:off x="793790" y="4254698"/>
-            <a:ext cx="3013115" cy="310158"/>
+          <p:cNvPr id="19" name="Text 11"/>
+          <p:cNvSpPr/>
+          <p:nvPr/>
+        </p:nvSpPr>
+        <p:spPr>
+          <a:xfrm>
+            <a:off x="9654302" y="4254698"/>
+            <a:ext cx="2480905" cy="310158"/>
           </a:xfrm>
           <a:prstGeom prst="rect">
             <a:avLst/>
@@ -5880,7 +6069,7 @@
           <a:bodyPr wrap="none" lIns="0" tIns="0" rIns="0" bIns="0" rtlCol="0" anchor="t"/>
           <a:lstStyle/>
           <a:p>
-            <a:pPr algn="l" indent="0" marL="0">
+            <a:pPr marL="0" indent="0" algn="l">
               <a:lnSpc>
                 <a:spcPts val="2400"/>
               </a:lnSpc>
@@ -5895,7 +6084,7 @@
                 <a:ea typeface="Inter Bold" pitchFamily="34" charset="-122"/>
                 <a:cs typeface="Inter Bold" pitchFamily="34" charset="-120"/>
               </a:rPr>
-              <a:t>WebDriverManager 5.7.0</a:t>
+              <a:t>Google Chrome</a:t>
             </a:r>
             <a:endParaRPr lang="en-US" sz="1950" dirty="0"/>
           </a:p>
@@ -5903,14 +6092,14 @@
       </p:sp>
       <p:sp>
         <p:nvSpPr>
-          <p:cNvPr id="14" name="Text 8"/>
-          <p:cNvSpPr/>
-          <p:nvPr/>
-        </p:nvSpPr>
-        <p:spPr>
-          <a:xfrm>
-            <a:off x="793790" y="4683919"/>
-            <a:ext cx="4182189" cy="635079"/>
+          <p:cNvPr id="20" name="Text 12"/>
+          <p:cNvSpPr/>
+          <p:nvPr/>
+        </p:nvSpPr>
+        <p:spPr>
+          <a:xfrm>
+            <a:off x="9654302" y="4683919"/>
+            <a:ext cx="4182308" cy="317540"/>
           </a:xfrm>
           <a:prstGeom prst="rect">
             <a:avLst/>
@@ -5919,10 +6108,10 @@
           <a:ln/>
         </p:spPr>
         <p:txBody>
-          <a:bodyPr wrap="square" lIns="0" tIns="0" rIns="0" bIns="0" rtlCol="0" anchor="t"/>
-          <a:lstStyle/>
-          <a:p>
-            <a:pPr algn="l" indent="0" marL="0">
+          <a:bodyPr wrap="none" lIns="0" tIns="0" rIns="0" bIns="0" rtlCol="0" anchor="t"/>
+          <a:lstStyle/>
+          <a:p>
+            <a:pPr marL="0" indent="0" algn="l">
               <a:lnSpc>
                 <a:spcPts val="2500"/>
               </a:lnSpc>
@@ -5937,7 +6126,7 @@
                 <a:ea typeface="Inter" pitchFamily="34" charset="-122"/>
                 <a:cs typeface="Inter" pitchFamily="34" charset="-120"/>
               </a:rPr>
-              <a:t>Automatic ChromeDriver binary management</a:t>
+              <a:t>Browser under test</a:t>
             </a:r>
             <a:endParaRPr lang="en-US" sz="1550" dirty="0"/>
           </a:p>
@@ -5945,14 +6134,128 @@
       </p:sp>
       <p:pic>
         <p:nvPicPr>
-          <p:cNvPr id="15" name="Image 4" descr="preencoded.png">    </p:cNvPr>
+          <p:cNvPr id="21" name="Image 6" descr="preencoded.png"/>
           <p:cNvPicPr>
             <a:picLocks noChangeAspect="1"/>
           </p:cNvPicPr>
           <p:nvPr/>
         </p:nvPicPr>
         <p:blipFill>
-          <a:blip r:embed="rId9">
+          <a:blip>
+            <a:extLst>
+              <a:ext uri="{96DAC541-7B7A-43D3-8B79-37D633B846F1}">
+                <asvg:svgBlip xmlns:asvg="http://schemas.microsoft.com/office/drawing/2016/SVG/main" r:embed="rId9"/>
+              </a:ext>
+            </a:extLst>
+          </a:blip>
+          <a:stretch>
+            <a:fillRect/>
+          </a:stretch>
+        </p:blipFill>
+        <p:spPr>
+          <a:xfrm>
+            <a:off x="793790" y="5715833"/>
+            <a:ext cx="396835" cy="396835"/>
+          </a:xfrm>
+          <a:prstGeom prst="rect">
+            <a:avLst/>
+          </a:prstGeom>
+        </p:spPr>
+      </p:pic>
+      <p:sp>
+        <p:nvSpPr>
+          <p:cNvPr id="22" name="Text 13"/>
+          <p:cNvSpPr/>
+          <p:nvPr/>
+        </p:nvSpPr>
+        <p:spPr>
+          <a:xfrm>
+            <a:off x="793790" y="6360676"/>
+            <a:ext cx="2480905" cy="310158"/>
+          </a:xfrm>
+          <a:prstGeom prst="rect">
+            <a:avLst/>
+          </a:prstGeom>
+          <a:noFill/>
+          <a:ln/>
+        </p:spPr>
+        <p:txBody>
+          <a:bodyPr wrap="none" lIns="0" tIns="0" rIns="0" bIns="0" rtlCol="0" anchor="t"/>
+          <a:lstStyle/>
+          <a:p>
+            <a:pPr marL="0" indent="0" algn="l">
+              <a:lnSpc>
+                <a:spcPts val="2400"/>
+              </a:lnSpc>
+              <a:buNone/>
+            </a:pPr>
+            <a:r>
+              <a:rPr lang="en-US" sz="1950" b="1" dirty="0">
+                <a:solidFill>
+                  <a:srgbClr val="E5E0DF"/>
+                </a:solidFill>
+                <a:latin typeface="Inter Bold" pitchFamily="34" charset="0"/>
+                <a:ea typeface="Inter Bold" pitchFamily="34" charset="-122"/>
+                <a:cs typeface="Inter Bold" pitchFamily="34" charset="-120"/>
+              </a:rPr>
+              <a:t>Windows 10/11</a:t>
+            </a:r>
+            <a:endParaRPr lang="en-US" sz="1950" dirty="0"/>
+          </a:p>
+        </p:txBody>
+      </p:sp>
+      <p:sp>
+        <p:nvSpPr>
+          <p:cNvPr id="23" name="Text 14"/>
+          <p:cNvSpPr/>
+          <p:nvPr/>
+        </p:nvSpPr>
+        <p:spPr>
+          <a:xfrm>
+            <a:off x="793790" y="6789896"/>
+            <a:ext cx="4182189" cy="317540"/>
+          </a:xfrm>
+          <a:prstGeom prst="rect">
+            <a:avLst/>
+          </a:prstGeom>
+          <a:noFill/>
+          <a:ln/>
+        </p:spPr>
+        <p:txBody>
+          <a:bodyPr wrap="none" lIns="0" tIns="0" rIns="0" bIns="0" rtlCol="0" anchor="t"/>
+          <a:lstStyle/>
+          <a:p>
+            <a:pPr marL="0" indent="0" algn="l">
+              <a:lnSpc>
+                <a:spcPts val="2500"/>
+              </a:lnSpc>
+              <a:buNone/>
+            </a:pPr>
+            <a:r>
+              <a:rPr lang="en-US" sz="1550" dirty="0">
+                <a:solidFill>
+                  <a:srgbClr val="E5E0DF"/>
+                </a:solidFill>
+                <a:latin typeface="Inter" pitchFamily="34" charset="0"/>
+                <a:ea typeface="Inter" pitchFamily="34" charset="-122"/>
+                <a:cs typeface="Inter" pitchFamily="34" charset="-120"/>
+              </a:rPr>
+              <a:t>Operating system</a:t>
+            </a:r>
+            <a:endParaRPr lang="en-US" sz="1550" dirty="0"/>
+          </a:p>
+        </p:txBody>
+      </p:sp>
+      <p:pic>
+        <p:nvPicPr>
+          <p:cNvPr id="24" name="Image 7" descr="preencoded.png"/>
+          <p:cNvPicPr>
+            <a:picLocks noChangeAspect="1"/>
+          </p:cNvPicPr>
+          <p:nvPr/>
+        </p:nvPicPr>
+        <p:blipFill>
+          <a:blip>
             <a:extLst>
               <a:ext uri="{96DAC541-7B7A-43D3-8B79-37D633B846F1}">
                 <asvg:svgBlip xmlns:asvg="http://schemas.microsoft.com/office/drawing/2016/SVG/main" r:embed="rId10"/>
@@ -5965,7 +6268,7 @@
         </p:blipFill>
         <p:spPr>
           <a:xfrm>
-            <a:off x="5223986" y="3609856"/>
+            <a:off x="5223986" y="5715833"/>
             <a:ext cx="396835" cy="396835"/>
           </a:xfrm>
           <a:prstGeom prst="rect">
@@ -5975,14 +6278,14 @@
       </p:pic>
       <p:sp>
         <p:nvSpPr>
-          <p:cNvPr id="16" name="Text 9"/>
-          <p:cNvSpPr/>
-          <p:nvPr/>
-        </p:nvSpPr>
-        <p:spPr>
-          <a:xfrm>
-            <a:off x="5223986" y="4254698"/>
-            <a:ext cx="2980134" cy="310158"/>
+          <p:cNvPr id="25" name="Text 15"/>
+          <p:cNvSpPr/>
+          <p:nvPr/>
+        </p:nvSpPr>
+        <p:spPr>
+          <a:xfrm>
+            <a:off x="5223986" y="6360676"/>
+            <a:ext cx="2480905" cy="310158"/>
           </a:xfrm>
           <a:prstGeom prst="rect">
             <a:avLst/>
@@ -5994,7 +6297,7 @@
           <a:bodyPr wrap="none" lIns="0" tIns="0" rIns="0" bIns="0" rtlCol="0" anchor="t"/>
           <a:lstStyle/>
           <a:p>
-            <a:pPr algn="l" indent="0" marL="0">
+            <a:pPr marL="0" indent="0" algn="l">
               <a:lnSpc>
                 <a:spcPts val="2400"/>
               </a:lnSpc>
@@ -6009,7 +6312,7 @@
                 <a:ea typeface="Inter Bold" pitchFamily="34" charset="-122"/>
                 <a:cs typeface="Inter Bold" pitchFamily="34" charset="-120"/>
               </a:rPr>
-              <a:t>Maven 3 + Surefire 3.2.5</a:t>
+              <a:t>Git / GitHub</a:t>
             </a:r>
             <a:endParaRPr lang="en-US" sz="1950" dirty="0"/>
           </a:p>
@@ -6017,14 +6320,14 @@
       </p:sp>
       <p:sp>
         <p:nvSpPr>
-          <p:cNvPr id="17" name="Text 10"/>
-          <p:cNvSpPr/>
-          <p:nvPr/>
-        </p:nvSpPr>
-        <p:spPr>
-          <a:xfrm>
-            <a:off x="5223986" y="4683919"/>
-            <a:ext cx="4182308" cy="635079"/>
+          <p:cNvPr id="26" name="Text 16"/>
+          <p:cNvSpPr/>
+          <p:nvPr/>
+        </p:nvSpPr>
+        <p:spPr>
+          <a:xfrm>
+            <a:off x="5223986" y="6789896"/>
+            <a:ext cx="4182308" cy="317540"/>
           </a:xfrm>
           <a:prstGeom prst="rect">
             <a:avLst/>
@@ -6033,10 +6336,10 @@
           <a:ln/>
         </p:spPr>
         <p:txBody>
-          <a:bodyPr wrap="square" lIns="0" tIns="0" rIns="0" bIns="0" rtlCol="0" anchor="t"/>
-          <a:lstStyle/>
-          <a:p>
-            <a:pPr algn="l" indent="0" marL="0">
+          <a:bodyPr wrap="none" lIns="0" tIns="0" rIns="0" bIns="0" rtlCol="0" anchor="t"/>
+          <a:lstStyle/>
+          <a:p>
+            <a:pPr marL="0" indent="0" algn="l">
               <a:lnSpc>
                 <a:spcPts val="2500"/>
               </a:lnSpc>
@@ -6051,7 +6354,7 @@
                 <a:ea typeface="Inter" pitchFamily="34" charset="-122"/>
                 <a:cs typeface="Inter" pitchFamily="34" charset="-120"/>
               </a:rPr>
-              <a:t>Build, dependency management, test execution</a:t>
+              <a:t>Version control and code repository</a:t>
             </a:r>
             <a:endParaRPr lang="en-US" sz="1550" dirty="0"/>
           </a:p>
@@ -6059,17 +6362,17 @@
       </p:sp>
       <p:pic>
         <p:nvPicPr>
-          <p:cNvPr id="18" name="Image 5" descr="preencoded.png">    </p:cNvPr>
+          <p:cNvPr id="27" name="Image 8" descr="preencoded.png"/>
           <p:cNvPicPr>
             <a:picLocks noChangeAspect="1"/>
           </p:cNvPicPr>
           <p:nvPr/>
         </p:nvPicPr>
         <p:blipFill>
-          <a:blip r:embed="rId11">
+          <a:blip>
             <a:extLst>
               <a:ext uri="{96DAC541-7B7A-43D3-8B79-37D633B846F1}">
-                <asvg:svgBlip xmlns:asvg="http://schemas.microsoft.com/office/drawing/2016/SVG/main" r:embed="rId12"/>
+                <asvg:svgBlip xmlns:asvg="http://schemas.microsoft.com/office/drawing/2016/SVG/main" r:embed="rId11"/>
               </a:ext>
             </a:extLst>
           </a:blip>
@@ -6079,7 +6382,7 @@
         </p:blipFill>
         <p:spPr>
           <a:xfrm>
-            <a:off x="9654302" y="3609856"/>
+            <a:off x="9654302" y="5715833"/>
             <a:ext cx="396835" cy="396835"/>
           </a:xfrm>
           <a:prstGeom prst="rect">
@@ -6089,13 +6392,13 @@
       </p:pic>
       <p:sp>
         <p:nvSpPr>
-          <p:cNvPr id="19" name="Text 11"/>
-          <p:cNvSpPr/>
-          <p:nvPr/>
-        </p:nvSpPr>
-        <p:spPr>
-          <a:xfrm>
-            <a:off x="9654302" y="4254698"/>
+          <p:cNvPr id="28" name="Text 17"/>
+          <p:cNvSpPr/>
+          <p:nvPr/>
+        </p:nvSpPr>
+        <p:spPr>
+          <a:xfrm>
+            <a:off x="9654302" y="6360676"/>
             <a:ext cx="2480905" cy="310158"/>
           </a:xfrm>
           <a:prstGeom prst="rect">
@@ -6108,7 +6411,7 @@
           <a:bodyPr wrap="none" lIns="0" tIns="0" rIns="0" bIns="0" rtlCol="0" anchor="t"/>
           <a:lstStyle/>
           <a:p>
-            <a:pPr algn="l" indent="0" marL="0">
+            <a:pPr marL="0" indent="0" algn="l">
               <a:lnSpc>
                 <a:spcPts val="2400"/>
               </a:lnSpc>
@@ -6123,348 +6426,6 @@
                 <a:ea typeface="Inter Bold" pitchFamily="34" charset="-122"/>
                 <a:cs typeface="Inter Bold" pitchFamily="34" charset="-120"/>
               </a:rPr>
-              <a:t>Google Chrome</a:t>
-            </a:r>
-            <a:endParaRPr lang="en-US" sz="1950" dirty="0"/>
-          </a:p>
-        </p:txBody>
-      </p:sp>
-      <p:sp>
-        <p:nvSpPr>
-          <p:cNvPr id="20" name="Text 12"/>
-          <p:cNvSpPr/>
-          <p:nvPr/>
-        </p:nvSpPr>
-        <p:spPr>
-          <a:xfrm>
-            <a:off x="9654302" y="4683919"/>
-            <a:ext cx="4182308" cy="317540"/>
-          </a:xfrm>
-          <a:prstGeom prst="rect">
-            <a:avLst/>
-          </a:prstGeom>
-          <a:noFill/>
-          <a:ln/>
-        </p:spPr>
-        <p:txBody>
-          <a:bodyPr wrap="none" lIns="0" tIns="0" rIns="0" bIns="0" rtlCol="0" anchor="t"/>
-          <a:lstStyle/>
-          <a:p>
-            <a:pPr algn="l" indent="0" marL="0">
-              <a:lnSpc>
-                <a:spcPts val="2500"/>
-              </a:lnSpc>
-              <a:buNone/>
-            </a:pPr>
-            <a:r>
-              <a:rPr lang="en-US" sz="1550" dirty="0">
-                <a:solidFill>
-                  <a:srgbClr val="E5E0DF"/>
-                </a:solidFill>
-                <a:latin typeface="Inter" pitchFamily="34" charset="0"/>
-                <a:ea typeface="Inter" pitchFamily="34" charset="-122"/>
-                <a:cs typeface="Inter" pitchFamily="34" charset="-120"/>
-              </a:rPr>
-              <a:t>Browser under test</a:t>
-            </a:r>
-            <a:endParaRPr lang="en-US" sz="1550" dirty="0"/>
-          </a:p>
-        </p:txBody>
-      </p:sp>
-      <p:pic>
-        <p:nvPicPr>
-          <p:cNvPr id="21" name="Image 6" descr="preencoded.png">    </p:cNvPr>
-          <p:cNvPicPr>
-            <a:picLocks noChangeAspect="1"/>
-          </p:cNvPicPr>
-          <p:nvPr/>
-        </p:nvPicPr>
-        <p:blipFill>
-          <a:blip r:embed="rId13">
-            <a:extLst>
-              <a:ext uri="{96DAC541-7B7A-43D3-8B79-37D633B846F1}">
-                <asvg:svgBlip xmlns:asvg="http://schemas.microsoft.com/office/drawing/2016/SVG/main" r:embed="rId14"/>
-              </a:ext>
-            </a:extLst>
-          </a:blip>
-          <a:stretch>
-            <a:fillRect/>
-          </a:stretch>
-        </p:blipFill>
-        <p:spPr>
-          <a:xfrm>
-            <a:off x="793790" y="5715833"/>
-            <a:ext cx="396835" cy="396835"/>
-          </a:xfrm>
-          <a:prstGeom prst="rect">
-            <a:avLst/>
-          </a:prstGeom>
-        </p:spPr>
-      </p:pic>
-      <p:sp>
-        <p:nvSpPr>
-          <p:cNvPr id="22" name="Text 13"/>
-          <p:cNvSpPr/>
-          <p:nvPr/>
-        </p:nvSpPr>
-        <p:spPr>
-          <a:xfrm>
-            <a:off x="793790" y="6360676"/>
-            <a:ext cx="2480905" cy="310158"/>
-          </a:xfrm>
-          <a:prstGeom prst="rect">
-            <a:avLst/>
-          </a:prstGeom>
-          <a:noFill/>
-          <a:ln/>
-        </p:spPr>
-        <p:txBody>
-          <a:bodyPr wrap="none" lIns="0" tIns="0" rIns="0" bIns="0" rtlCol="0" anchor="t"/>
-          <a:lstStyle/>
-          <a:p>
-            <a:pPr algn="l" indent="0" marL="0">
-              <a:lnSpc>
-                <a:spcPts val="2400"/>
-              </a:lnSpc>
-              <a:buNone/>
-            </a:pPr>
-            <a:r>
-              <a:rPr lang="en-US" sz="1950" b="1" dirty="0">
-                <a:solidFill>
-                  <a:srgbClr val="E5E0DF"/>
-                </a:solidFill>
-                <a:latin typeface="Inter Bold" pitchFamily="34" charset="0"/>
-                <a:ea typeface="Inter Bold" pitchFamily="34" charset="-122"/>
-                <a:cs typeface="Inter Bold" pitchFamily="34" charset="-120"/>
-              </a:rPr>
-              <a:t>Windows 10/11</a:t>
-            </a:r>
-            <a:endParaRPr lang="en-US" sz="1950" dirty="0"/>
-          </a:p>
-        </p:txBody>
-      </p:sp>
-      <p:sp>
-        <p:nvSpPr>
-          <p:cNvPr id="23" name="Text 14"/>
-          <p:cNvSpPr/>
-          <p:nvPr/>
-        </p:nvSpPr>
-        <p:spPr>
-          <a:xfrm>
-            <a:off x="793790" y="6789896"/>
-            <a:ext cx="4182189" cy="317540"/>
-          </a:xfrm>
-          <a:prstGeom prst="rect">
-            <a:avLst/>
-          </a:prstGeom>
-          <a:noFill/>
-          <a:ln/>
-        </p:spPr>
-        <p:txBody>
-          <a:bodyPr wrap="none" lIns="0" tIns="0" rIns="0" bIns="0" rtlCol="0" anchor="t"/>
-          <a:lstStyle/>
-          <a:p>
-            <a:pPr algn="l" indent="0" marL="0">
-              <a:lnSpc>
-                <a:spcPts val="2500"/>
-              </a:lnSpc>
-              <a:buNone/>
-            </a:pPr>
-            <a:r>
-              <a:rPr lang="en-US" sz="1550" dirty="0">
-                <a:solidFill>
-                  <a:srgbClr val="E5E0DF"/>
-                </a:solidFill>
-                <a:latin typeface="Inter" pitchFamily="34" charset="0"/>
-                <a:ea typeface="Inter" pitchFamily="34" charset="-122"/>
-                <a:cs typeface="Inter" pitchFamily="34" charset="-120"/>
-              </a:rPr>
-              <a:t>Operating system</a:t>
-            </a:r>
-            <a:endParaRPr lang="en-US" sz="1550" dirty="0"/>
-          </a:p>
-        </p:txBody>
-      </p:sp>
-      <p:pic>
-        <p:nvPicPr>
-          <p:cNvPr id="24" name="Image 7" descr="preencoded.png">    </p:cNvPr>
-          <p:cNvPicPr>
-            <a:picLocks noChangeAspect="1"/>
-          </p:cNvPicPr>
-          <p:nvPr/>
-        </p:nvPicPr>
-        <p:blipFill>
-          <a:blip r:embed="rId15">
-            <a:extLst>
-              <a:ext uri="{96DAC541-7B7A-43D3-8B79-37D633B846F1}">
-                <asvg:svgBlip xmlns:asvg="http://schemas.microsoft.com/office/drawing/2016/SVG/main" r:embed="rId16"/>
-              </a:ext>
-            </a:extLst>
-          </a:blip>
-          <a:stretch>
-            <a:fillRect/>
-          </a:stretch>
-        </p:blipFill>
-        <p:spPr>
-          <a:xfrm>
-            <a:off x="5223986" y="5715833"/>
-            <a:ext cx="396835" cy="396835"/>
-          </a:xfrm>
-          <a:prstGeom prst="rect">
-            <a:avLst/>
-          </a:prstGeom>
-        </p:spPr>
-      </p:pic>
-      <p:sp>
-        <p:nvSpPr>
-          <p:cNvPr id="25" name="Text 15"/>
-          <p:cNvSpPr/>
-          <p:nvPr/>
-        </p:nvSpPr>
-        <p:spPr>
-          <a:xfrm>
-            <a:off x="5223986" y="6360676"/>
-            <a:ext cx="2480905" cy="310158"/>
-          </a:xfrm>
-          <a:prstGeom prst="rect">
-            <a:avLst/>
-          </a:prstGeom>
-          <a:noFill/>
-          <a:ln/>
-        </p:spPr>
-        <p:txBody>
-          <a:bodyPr wrap="none" lIns="0" tIns="0" rIns="0" bIns="0" rtlCol="0" anchor="t"/>
-          <a:lstStyle/>
-          <a:p>
-            <a:pPr algn="l" indent="0" marL="0">
-              <a:lnSpc>
-                <a:spcPts val="2400"/>
-              </a:lnSpc>
-              <a:buNone/>
-            </a:pPr>
-            <a:r>
-              <a:rPr lang="en-US" sz="1950" b="1" dirty="0">
-                <a:solidFill>
-                  <a:srgbClr val="E5E0DF"/>
-                </a:solidFill>
-                <a:latin typeface="Inter Bold" pitchFamily="34" charset="0"/>
-                <a:ea typeface="Inter Bold" pitchFamily="34" charset="-122"/>
-                <a:cs typeface="Inter Bold" pitchFamily="34" charset="-120"/>
-              </a:rPr>
-              <a:t>Git / GitHub</a:t>
-            </a:r>
-            <a:endParaRPr lang="en-US" sz="1950" dirty="0"/>
-          </a:p>
-        </p:txBody>
-      </p:sp>
-      <p:sp>
-        <p:nvSpPr>
-          <p:cNvPr id="26" name="Text 16"/>
-          <p:cNvSpPr/>
-          <p:nvPr/>
-        </p:nvSpPr>
-        <p:spPr>
-          <a:xfrm>
-            <a:off x="5223986" y="6789896"/>
-            <a:ext cx="4182308" cy="317540"/>
-          </a:xfrm>
-          <a:prstGeom prst="rect">
-            <a:avLst/>
-          </a:prstGeom>
-          <a:noFill/>
-          <a:ln/>
-        </p:spPr>
-        <p:txBody>
-          <a:bodyPr wrap="none" lIns="0" tIns="0" rIns="0" bIns="0" rtlCol="0" anchor="t"/>
-          <a:lstStyle/>
-          <a:p>
-            <a:pPr algn="l" indent="0" marL="0">
-              <a:lnSpc>
-                <a:spcPts val="2500"/>
-              </a:lnSpc>
-              <a:buNone/>
-            </a:pPr>
-            <a:r>
-              <a:rPr lang="en-US" sz="1550" dirty="0">
-                <a:solidFill>
-                  <a:srgbClr val="E5E0DF"/>
-                </a:solidFill>
-                <a:latin typeface="Inter" pitchFamily="34" charset="0"/>
-                <a:ea typeface="Inter" pitchFamily="34" charset="-122"/>
-                <a:cs typeface="Inter" pitchFamily="34" charset="-120"/>
-              </a:rPr>
-              <a:t>Version control and code repository</a:t>
-            </a:r>
-            <a:endParaRPr lang="en-US" sz="1550" dirty="0"/>
-          </a:p>
-        </p:txBody>
-      </p:sp>
-      <p:pic>
-        <p:nvPicPr>
-          <p:cNvPr id="27" name="Image 8" descr="preencoded.png">    </p:cNvPr>
-          <p:cNvPicPr>
-            <a:picLocks noChangeAspect="1"/>
-          </p:cNvPicPr>
-          <p:nvPr/>
-        </p:nvPicPr>
-        <p:blipFill>
-          <a:blip r:embed="rId17">
-            <a:extLst>
-              <a:ext uri="{96DAC541-7B7A-43D3-8B79-37D633B846F1}">
-                <asvg:svgBlip xmlns:asvg="http://schemas.microsoft.com/office/drawing/2016/SVG/main" r:embed="rId18"/>
-              </a:ext>
-            </a:extLst>
-          </a:blip>
-          <a:stretch>
-            <a:fillRect/>
-          </a:stretch>
-        </p:blipFill>
-        <p:spPr>
-          <a:xfrm>
-            <a:off x="9654302" y="5715833"/>
-            <a:ext cx="396835" cy="396835"/>
-          </a:xfrm>
-          <a:prstGeom prst="rect">
-            <a:avLst/>
-          </a:prstGeom>
-        </p:spPr>
-      </p:pic>
-      <p:sp>
-        <p:nvSpPr>
-          <p:cNvPr id="28" name="Text 17"/>
-          <p:cNvSpPr/>
-          <p:nvPr/>
-        </p:nvSpPr>
-        <p:spPr>
-          <a:xfrm>
-            <a:off x="9654302" y="6360676"/>
-            <a:ext cx="2480905" cy="310158"/>
-          </a:xfrm>
-          <a:prstGeom prst="rect">
-            <a:avLst/>
-          </a:prstGeom>
-          <a:noFill/>
-          <a:ln/>
-        </p:spPr>
-        <p:txBody>
-          <a:bodyPr wrap="none" lIns="0" tIns="0" rIns="0" bIns="0" rtlCol="0" anchor="t"/>
-          <a:lstStyle/>
-          <a:p>
-            <a:pPr algn="l" indent="0" marL="0">
-              <a:lnSpc>
-                <a:spcPts val="2400"/>
-              </a:lnSpc>
-              <a:buNone/>
-            </a:pPr>
-            <a:r>
-              <a:rPr lang="en-US" sz="1950" b="1" dirty="0">
-                <a:solidFill>
-                  <a:srgbClr val="E5E0DF"/>
-                </a:solidFill>
-                <a:latin typeface="Inter Bold" pitchFamily="34" charset="0"/>
-                <a:ea typeface="Inter Bold" pitchFamily="34" charset="-122"/>
-                <a:cs typeface="Inter Bold" pitchFamily="34" charset="-120"/>
-              </a:rPr>
               <a:t>config.properties</a:t>
             </a:r>
             <a:endParaRPr lang="en-US" sz="1950" dirty="0"/>
@@ -6492,7 +6453,7 @@
           <a:bodyPr wrap="square" lIns="0" tIns="0" rIns="0" bIns="0" rtlCol="0" anchor="t"/>
           <a:lstStyle/>
           <a:p>
-            <a:pPr algn="l" indent="0" marL="0">
+            <a:pPr marL="0" indent="0" algn="l">
               <a:lnSpc>
                 <a:spcPts val="2500"/>
               </a:lnSpc>
@@ -6559,7 +6520,7 @@
           <a:bodyPr wrap="none" lIns="0" tIns="0" rIns="0" bIns="0" rtlCol="0" anchor="t"/>
           <a:lstStyle/>
           <a:p>
-            <a:pPr algn="l" indent="0" marL="0">
+            <a:pPr marL="0" indent="0" algn="l">
               <a:lnSpc>
                 <a:spcPts val="4400"/>
               </a:lnSpc>
@@ -6576,12 +6537,6 @@
               </a:rPr>
               <a:t>System Under Test: </a:t>
             </a:r>
-            <a:pPr algn="l" indent="0" marL="0">
-              <a:lnSpc>
-                <a:spcPts val="4400"/>
-              </a:lnSpc>
-              <a:buNone/>
-            </a:pPr>
             <a:r>
               <a:rPr lang="en-US" sz="3500" b="1" u="sng" dirty="0">
                 <a:solidFill>
@@ -6590,7 +6545,7 @@
                 <a:latin typeface="Inter Bold" pitchFamily="34" charset="0"/>
                 <a:ea typeface="Inter Bold" pitchFamily="34" charset="-122"/>
                 <a:cs typeface="Inter Bold" pitchFamily="34" charset="-120"/>
-                <a:hlinkClick r:id="rId1" invalidUrl="" action="" tgtFrame="" tooltip="" history="1" highlightClick="0" endSnd="0">
+                <a:hlinkClick r:id="rId3">
                   <a:extLst>
                     <a:ext uri="{A12FA001-AC4F-418D-AE19-62706E023703}">
                       <ahyp:hlinkClr xmlns:ahyp="http://schemas.microsoft.com/office/drawing/2018/hyperlinkcolor" val="tx"/>
@@ -6625,7 +6580,7 @@
           <a:bodyPr wrap="square" lIns="0" tIns="0" rIns="0" bIns="0" rtlCol="0" anchor="t"/>
           <a:lstStyle/>
           <a:p>
-            <a:pPr algn="l" indent="0" marL="0">
+            <a:pPr marL="0" indent="0" algn="l">
               <a:lnSpc>
                 <a:spcPts val="2150"/>
               </a:lnSpc>
@@ -6667,7 +6622,7 @@
           <a:bodyPr wrap="none" lIns="0" tIns="0" rIns="0" bIns="0" rtlCol="0" anchor="t"/>
           <a:lstStyle/>
           <a:p>
-            <a:pPr algn="l" indent="0" marL="0">
+            <a:pPr marL="0" indent="0" algn="l">
               <a:lnSpc>
                 <a:spcPts val="2200"/>
               </a:lnSpc>
@@ -6709,7 +6664,7 @@
           <a:bodyPr wrap="square" lIns="0" tIns="0" rIns="0" bIns="0" rtlCol="0" anchor="t"/>
           <a:lstStyle/>
           <a:p>
-            <a:pPr algn="l" marL="342900" indent="-342900">
+            <a:pPr marL="342900" indent="-342900" algn="l">
               <a:lnSpc>
                 <a:spcPts val="2150"/>
               </a:lnSpc>
@@ -6725,12 +6680,12 @@
                 <a:ea typeface="Inter" pitchFamily="34" charset="-122"/>
                 <a:cs typeface="Inter" pitchFamily="34" charset="-120"/>
               </a:rPr>
-              <a:t>Home page, Login, and Signup flows</a:t>
+              <a:t>Home page, Login, and Account Sign-up flows</a:t>
             </a:r>
             <a:endParaRPr lang="en-US" sz="1400" dirty="0"/>
           </a:p>
           <a:p>
-            <a:pPr algn="l" marL="342900" indent="-342900">
+            <a:pPr marL="342900" indent="-342900" algn="l">
               <a:lnSpc>
                 <a:spcPts val="2150"/>
               </a:lnSpc>
@@ -6751,7 +6706,7 @@
             <a:endParaRPr lang="en-US" sz="1400" dirty="0"/>
           </a:p>
           <a:p>
-            <a:pPr algn="l" marL="342900" indent="-342900">
+            <a:pPr marL="342900" indent="-342900" algn="l">
               <a:lnSpc>
                 <a:spcPts val="2150"/>
               </a:lnSpc>
@@ -6772,7 +6727,7 @@
             <a:endParaRPr lang="en-US" sz="1400" dirty="0"/>
           </a:p>
           <a:p>
-            <a:pPr algn="l" marL="342900" indent="-342900">
+            <a:pPr marL="342900" indent="-342900" algn="l">
               <a:lnSpc>
                 <a:spcPts val="2150"/>
               </a:lnSpc>
@@ -6793,7 +6748,7 @@
             <a:endParaRPr lang="en-US" sz="1400" dirty="0"/>
           </a:p>
           <a:p>
-            <a:pPr algn="l" marL="342900" indent="-342900">
+            <a:pPr marL="342900" indent="-342900" algn="l">
               <a:lnSpc>
                 <a:spcPts val="2150"/>
               </a:lnSpc>
@@ -6814,7 +6769,7 @@
             <a:endParaRPr lang="en-US" sz="1400" dirty="0"/>
           </a:p>
           <a:p>
-            <a:pPr algn="l" marL="342900" indent="-342900">
+            <a:pPr marL="342900" indent="-342900" algn="l">
               <a:lnSpc>
                 <a:spcPts val="2150"/>
               </a:lnSpc>
@@ -6857,7 +6812,7 @@
           <a:bodyPr wrap="none" lIns="0" tIns="0" rIns="0" bIns="0" rtlCol="0" anchor="t"/>
           <a:lstStyle/>
           <a:p>
-            <a:pPr algn="l" indent="0" marL="0">
+            <a:pPr marL="0" indent="0" algn="l">
               <a:lnSpc>
                 <a:spcPts val="2200"/>
               </a:lnSpc>
@@ -6899,7 +6854,7 @@
           <a:bodyPr wrap="square" lIns="0" tIns="0" rIns="0" bIns="0" rtlCol="0" anchor="t"/>
           <a:lstStyle/>
           <a:p>
-            <a:pPr algn="l" marL="342900" indent="-342900">
+            <a:pPr marL="342900" indent="-342900" algn="l">
               <a:lnSpc>
                 <a:spcPts val="2150"/>
               </a:lnSpc>
@@ -6920,7 +6875,7 @@
             <a:endParaRPr lang="en-US" sz="1400" dirty="0"/>
           </a:p>
           <a:p>
-            <a:pPr algn="l" marL="342900" indent="-342900">
+            <a:pPr marL="342900" indent="-342900" algn="l">
               <a:lnSpc>
                 <a:spcPts val="2150"/>
               </a:lnSpc>
@@ -6941,7 +6896,7 @@
             <a:endParaRPr lang="en-US" sz="1400" dirty="0"/>
           </a:p>
           <a:p>
-            <a:pPr algn="l" marL="342900" indent="-342900">
+            <a:pPr marL="342900" indent="-342900" algn="l">
               <a:lnSpc>
                 <a:spcPts val="2150"/>
               </a:lnSpc>
@@ -6962,7 +6917,7 @@
             <a:endParaRPr lang="en-US" sz="1400" dirty="0"/>
           </a:p>
           <a:p>
-            <a:pPr algn="l" marL="342900" indent="-342900">
+            <a:pPr marL="342900" indent="-342900" algn="l">
               <a:lnSpc>
                 <a:spcPts val="2150"/>
               </a:lnSpc>
@@ -6983,7 +6938,7 @@
             <a:endParaRPr lang="en-US" sz="1400" dirty="0"/>
           </a:p>
           <a:p>
-            <a:pPr algn="l" marL="342900" indent="-342900">
+            <a:pPr marL="342900" indent="-342900" algn="l">
               <a:lnSpc>
                 <a:spcPts val="2150"/>
               </a:lnSpc>
@@ -7004,7 +6959,7 @@
             <a:endParaRPr lang="en-US" sz="1400" dirty="0"/>
           </a:p>
           <a:p>
-            <a:pPr algn="l" marL="342900" indent="-342900">
+            <a:pPr marL="342900" indent="-342900" algn="l">
               <a:lnSpc>
                 <a:spcPts val="2150"/>
               </a:lnSpc>
@@ -7025,7 +6980,7 @@
             <a:endParaRPr lang="en-US" sz="1400" dirty="0"/>
           </a:p>
           <a:p>
-            <a:pPr algn="l" marL="342900" indent="-342900">
+            <a:pPr marL="342900" indent="-342900" algn="l">
               <a:lnSpc>
                 <a:spcPts val="2150"/>
               </a:lnSpc>
@@ -7093,7 +7048,7 @@
           <a:bodyPr wrap="none" lIns="0" tIns="0" rIns="0" bIns="0" rtlCol="0" anchor="t"/>
           <a:lstStyle/>
           <a:p>
-            <a:pPr algn="l" indent="0" marL="0">
+            <a:pPr marL="0" indent="0" algn="l">
               <a:lnSpc>
                 <a:spcPts val="4850"/>
               </a:lnSpc>
@@ -7140,6 +7095,13 @@
             <a:prstDash val="solid"/>
           </a:ln>
         </p:spPr>
+        <p:txBody>
+          <a:bodyPr/>
+          <a:lstStyle/>
+          <a:p>
+            <a:endParaRPr lang="en-US"/>
+          </a:p>
+        </p:txBody>
       </p:sp>
       <p:sp>
         <p:nvSpPr>
@@ -7162,6 +7124,13 @@
           </a:solidFill>
           <a:ln/>
         </p:spPr>
+        <p:txBody>
+          <a:bodyPr/>
+          <a:lstStyle/>
+          <a:p>
+            <a:endParaRPr lang="en-US"/>
+          </a:p>
+        </p:txBody>
       </p:sp>
       <p:sp>
         <p:nvSpPr>
@@ -7184,7 +7153,7 @@
           <a:bodyPr wrap="none" lIns="0" tIns="0" rIns="0" bIns="0" rtlCol="0" anchor="t"/>
           <a:lstStyle/>
           <a:p>
-            <a:pPr algn="l" indent="0" marL="0">
+            <a:pPr marL="0" indent="0" algn="l">
               <a:lnSpc>
                 <a:spcPts val="2400"/>
               </a:lnSpc>
@@ -7226,7 +7195,7 @@
           <a:bodyPr wrap="none" lIns="0" tIns="0" rIns="0" bIns="0" rtlCol="0" anchor="t"/>
           <a:lstStyle/>
           <a:p>
-            <a:pPr algn="l" indent="0" marL="0">
+            <a:pPr marL="0" indent="0" algn="l">
               <a:lnSpc>
                 <a:spcPts val="2500"/>
               </a:lnSpc>
@@ -7273,6 +7242,13 @@
             <a:prstDash val="solid"/>
           </a:ln>
         </p:spPr>
+        <p:txBody>
+          <a:bodyPr/>
+          <a:lstStyle/>
+          <a:p>
+            <a:endParaRPr lang="en-US"/>
+          </a:p>
+        </p:txBody>
       </p:sp>
       <p:sp>
         <p:nvSpPr>
@@ -7295,6 +7271,13 @@
           </a:solidFill>
           <a:ln/>
         </p:spPr>
+        <p:txBody>
+          <a:bodyPr/>
+          <a:lstStyle/>
+          <a:p>
+            <a:endParaRPr lang="en-US"/>
+          </a:p>
+        </p:txBody>
       </p:sp>
       <p:sp>
         <p:nvSpPr>
@@ -7317,7 +7300,7 @@
           <a:bodyPr wrap="none" lIns="0" tIns="0" rIns="0" bIns="0" rtlCol="0" anchor="t"/>
           <a:lstStyle/>
           <a:p>
-            <a:pPr algn="l" indent="0" marL="0">
+            <a:pPr marL="0" indent="0" algn="l">
               <a:lnSpc>
                 <a:spcPts val="2400"/>
               </a:lnSpc>
@@ -7359,7 +7342,7 @@
           <a:bodyPr wrap="square" lIns="0" tIns="0" rIns="0" bIns="0" rtlCol="0" anchor="t"/>
           <a:lstStyle/>
           <a:p>
-            <a:pPr algn="l" indent="0" marL="0">
+            <a:pPr marL="0" indent="0" algn="l">
               <a:lnSpc>
                 <a:spcPts val="2500"/>
               </a:lnSpc>
@@ -7406,6 +7389,13 @@
             <a:prstDash val="solid"/>
           </a:ln>
         </p:spPr>
+        <p:txBody>
+          <a:bodyPr/>
+          <a:lstStyle/>
+          <a:p>
+            <a:endParaRPr lang="en-US"/>
+          </a:p>
+        </p:txBody>
       </p:sp>
       <p:sp>
         <p:nvSpPr>
@@ -7428,6 +7418,13 @@
           </a:solidFill>
           <a:ln/>
         </p:spPr>
+        <p:txBody>
+          <a:bodyPr/>
+          <a:lstStyle/>
+          <a:p>
+            <a:endParaRPr lang="en-US"/>
+          </a:p>
+        </p:txBody>
       </p:sp>
       <p:sp>
         <p:nvSpPr>
@@ -7450,7 +7447,7 @@
           <a:bodyPr wrap="none" lIns="0" tIns="0" rIns="0" bIns="0" rtlCol="0" anchor="t"/>
           <a:lstStyle/>
           <a:p>
-            <a:pPr algn="l" indent="0" marL="0">
+            <a:pPr marL="0" indent="0" algn="l">
               <a:lnSpc>
                 <a:spcPts val="2400"/>
               </a:lnSpc>
@@ -7492,7 +7489,7 @@
           <a:bodyPr wrap="square" lIns="0" tIns="0" rIns="0" bIns="0" rtlCol="0" anchor="t"/>
           <a:lstStyle/>
           <a:p>
-            <a:pPr algn="l" indent="0" marL="0">
+            <a:pPr marL="0" indent="0" algn="l">
               <a:lnSpc>
                 <a:spcPts val="2500"/>
               </a:lnSpc>
@@ -7539,6 +7536,13 @@
             <a:prstDash val="solid"/>
           </a:ln>
         </p:spPr>
+        <p:txBody>
+          <a:bodyPr/>
+          <a:lstStyle/>
+          <a:p>
+            <a:endParaRPr lang="en-US"/>
+          </a:p>
+        </p:txBody>
       </p:sp>
       <p:sp>
         <p:nvSpPr>
@@ -7561,6 +7565,13 @@
           </a:solidFill>
           <a:ln/>
         </p:spPr>
+        <p:txBody>
+          <a:bodyPr/>
+          <a:lstStyle/>
+          <a:p>
+            <a:endParaRPr lang="en-US"/>
+          </a:p>
+        </p:txBody>
       </p:sp>
       <p:sp>
         <p:nvSpPr>
@@ -7583,7 +7594,7 @@
           <a:bodyPr wrap="none" lIns="0" tIns="0" rIns="0" bIns="0" rtlCol="0" anchor="t"/>
           <a:lstStyle/>
           <a:p>
-            <a:pPr algn="l" indent="0" marL="0">
+            <a:pPr marL="0" indent="0" algn="l">
               <a:lnSpc>
                 <a:spcPts val="2400"/>
               </a:lnSpc>
@@ -7625,7 +7636,7 @@
           <a:bodyPr wrap="square" lIns="0" tIns="0" rIns="0" bIns="0" rtlCol="0" anchor="t"/>
           <a:lstStyle/>
           <a:p>
-            <a:pPr algn="l" indent="0" marL="0">
+            <a:pPr marL="0" indent="0" algn="l">
               <a:lnSpc>
                 <a:spcPts val="2500"/>
               </a:lnSpc>
@@ -7672,6 +7683,13 @@
             <a:prstDash val="solid"/>
           </a:ln>
         </p:spPr>
+        <p:txBody>
+          <a:bodyPr/>
+          <a:lstStyle/>
+          <a:p>
+            <a:endParaRPr lang="en-US"/>
+          </a:p>
+        </p:txBody>
       </p:sp>
       <p:sp>
         <p:nvSpPr>
@@ -7694,6 +7712,13 @@
           </a:solidFill>
           <a:ln/>
         </p:spPr>
+        <p:txBody>
+          <a:bodyPr/>
+          <a:lstStyle/>
+          <a:p>
+            <a:endParaRPr lang="en-US"/>
+          </a:p>
+        </p:txBody>
       </p:sp>
       <p:sp>
         <p:nvSpPr>
@@ -7716,7 +7741,7 @@
           <a:bodyPr wrap="none" lIns="0" tIns="0" rIns="0" bIns="0" rtlCol="0" anchor="t"/>
           <a:lstStyle/>
           <a:p>
-            <a:pPr algn="l" indent="0" marL="0">
+            <a:pPr marL="0" indent="0" algn="l">
               <a:lnSpc>
                 <a:spcPts val="2400"/>
               </a:lnSpc>
@@ -7758,7 +7783,7 @@
           <a:bodyPr wrap="none" lIns="0" tIns="0" rIns="0" bIns="0" rtlCol="0" anchor="t"/>
           <a:lstStyle/>
           <a:p>
-            <a:pPr algn="l" indent="0" marL="0">
+            <a:pPr marL="0" indent="0" algn="l">
               <a:lnSpc>
                 <a:spcPts val="2500"/>
               </a:lnSpc>
@@ -7805,6 +7830,13 @@
             <a:prstDash val="solid"/>
           </a:ln>
         </p:spPr>
+        <p:txBody>
+          <a:bodyPr/>
+          <a:lstStyle/>
+          <a:p>
+            <a:endParaRPr lang="en-US"/>
+          </a:p>
+        </p:txBody>
       </p:sp>
       <p:sp>
         <p:nvSpPr>
@@ -7827,6 +7859,13 @@
           </a:solidFill>
           <a:ln/>
         </p:spPr>
+        <p:txBody>
+          <a:bodyPr/>
+          <a:lstStyle/>
+          <a:p>
+            <a:endParaRPr lang="en-US"/>
+          </a:p>
+        </p:txBody>
       </p:sp>
       <p:sp>
         <p:nvSpPr>
@@ -7849,7 +7888,7 @@
           <a:bodyPr wrap="none" lIns="0" tIns="0" rIns="0" bIns="0" rtlCol="0" anchor="t"/>
           <a:lstStyle/>
           <a:p>
-            <a:pPr algn="l" indent="0" marL="0">
+            <a:pPr marL="0" indent="0" algn="l">
               <a:lnSpc>
                 <a:spcPts val="2400"/>
               </a:lnSpc>
@@ -7891,7 +7930,7 @@
           <a:bodyPr wrap="none" lIns="0" tIns="0" rIns="0" bIns="0" rtlCol="0" anchor="t"/>
           <a:lstStyle/>
           <a:p>
-            <a:pPr algn="l" indent="0" marL="0">
+            <a:pPr marL="0" indent="0" algn="l">
               <a:lnSpc>
                 <a:spcPts val="2500"/>
               </a:lnSpc>
@@ -7939,14 +7978,14 @@
       </p:grpSpPr>
       <p:pic>
         <p:nvPicPr>
-          <p:cNvPr id="2" name="Image 0" descr="preencoded.png">    </p:cNvPr>
+          <p:cNvPr id="2" name="Image 0" descr="preencoded.png"/>
           <p:cNvPicPr>
             <a:picLocks noChangeAspect="1"/>
           </p:cNvPicPr>
           <p:nvPr/>
         </p:nvPicPr>
         <p:blipFill>
-          <a:blip r:embed="rId1"/>
+          <a:blip r:embed="rId3"/>
           <a:stretch>
             <a:fillRect/>
           </a:stretch>
@@ -7980,17 +8019,24 @@
           </a:solidFill>
           <a:ln/>
         </p:spPr>
+        <p:txBody>
+          <a:bodyPr/>
+          <a:lstStyle/>
+          <a:p>
+            <a:endParaRPr lang="en-US"/>
+          </a:p>
+        </p:txBody>
       </p:sp>
       <p:pic>
         <p:nvPicPr>
-          <p:cNvPr id="4" name="Image 1" descr="preencoded.png">    </p:cNvPr>
+          <p:cNvPr id="4" name="Image 1" descr="preencoded.png"/>
           <p:cNvPicPr>
             <a:picLocks noChangeAspect="1"/>
           </p:cNvPicPr>
           <p:nvPr/>
         </p:nvPicPr>
         <p:blipFill>
-          <a:blip r:embed="rId2"/>
+          <a:blip r:embed="rId4"/>
           <a:stretch>
             <a:fillRect/>
           </a:stretch>
@@ -8026,7 +8072,7 @@
           <a:bodyPr wrap="square" lIns="0" tIns="0" rIns="0" bIns="0" rtlCol="0" anchor="t"/>
           <a:lstStyle/>
           <a:p>
-            <a:pPr algn="l" indent="0" marL="0">
+            <a:pPr marL="0" indent="0" algn="l">
               <a:lnSpc>
                 <a:spcPts val="4850"/>
               </a:lnSpc>
@@ -8068,7 +8114,7 @@
           <a:bodyPr wrap="square" lIns="0" tIns="0" rIns="0" bIns="0" rtlCol="0" anchor="t"/>
           <a:lstStyle/>
           <a:p>
-            <a:pPr algn="l" indent="0" marL="0">
+            <a:pPr marL="0" indent="0" algn="l">
               <a:lnSpc>
                 <a:spcPts val="2400"/>
               </a:lnSpc>
@@ -8110,7 +8156,7 @@
           <a:bodyPr wrap="square" lIns="0" tIns="0" rIns="0" bIns="0" rtlCol="0" anchor="t"/>
           <a:lstStyle/>
           <a:p>
-            <a:pPr algn="l" marL="342900" indent="-342900">
+            <a:pPr marL="342900" indent="-342900" algn="l">
               <a:lnSpc>
                 <a:spcPts val="2500"/>
               </a:lnSpc>
@@ -8131,7 +8177,7 @@
             <a:endParaRPr lang="en-US" sz="1550" dirty="0"/>
           </a:p>
           <a:p>
-            <a:pPr algn="l" marL="342900" indent="-342900">
+            <a:pPr marL="342900" indent="-342900" algn="l">
               <a:lnSpc>
                 <a:spcPts val="2500"/>
               </a:lnSpc>
@@ -8152,7 +8198,7 @@
             <a:endParaRPr lang="en-US" sz="1550" dirty="0"/>
           </a:p>
           <a:p>
-            <a:pPr algn="l" marL="342900" indent="-342900">
+            <a:pPr marL="342900" indent="-342900" algn="l">
               <a:lnSpc>
                 <a:spcPts val="2500"/>
               </a:lnSpc>
@@ -8173,7 +8219,7 @@
             <a:endParaRPr lang="en-US" sz="1550" dirty="0"/>
           </a:p>
           <a:p>
-            <a:pPr algn="l" marL="342900" indent="-342900">
+            <a:pPr marL="342900" indent="-342900" algn="l">
               <a:lnSpc>
                 <a:spcPts val="2500"/>
               </a:lnSpc>
@@ -8194,7 +8240,7 @@
             <a:endParaRPr lang="en-US" sz="1550" dirty="0"/>
           </a:p>
           <a:p>
-            <a:pPr algn="l" marL="342900" indent="-342900">
+            <a:pPr marL="342900" indent="-342900" algn="l">
               <a:lnSpc>
                 <a:spcPts val="2500"/>
               </a:lnSpc>
@@ -8215,7 +8261,7 @@
             <a:endParaRPr lang="en-US" sz="1550" dirty="0"/>
           </a:p>
           <a:p>
-            <a:pPr algn="l" marL="342900" indent="-342900">
+            <a:pPr marL="342900" indent="-342900" algn="l">
               <a:lnSpc>
                 <a:spcPts val="2500"/>
               </a:lnSpc>
@@ -8258,7 +8304,7 @@
           <a:bodyPr wrap="square" lIns="0" tIns="0" rIns="0" bIns="0" rtlCol="0" anchor="t"/>
           <a:lstStyle/>
           <a:p>
-            <a:pPr algn="l" indent="0" marL="0">
+            <a:pPr marL="0" indent="0" algn="l">
               <a:lnSpc>
                 <a:spcPts val="2400"/>
               </a:lnSpc>
@@ -8300,7 +8346,7 @@
           <a:bodyPr wrap="square" lIns="0" tIns="0" rIns="0" bIns="0" rtlCol="0" anchor="t"/>
           <a:lstStyle/>
           <a:p>
-            <a:pPr algn="l" marL="342900" indent="-342900">
+            <a:pPr marL="342900" indent="-342900" algn="l">
               <a:lnSpc>
                 <a:spcPts val="2500"/>
               </a:lnSpc>
@@ -8321,7 +8367,7 @@
             <a:endParaRPr lang="en-US" sz="1550" dirty="0"/>
           </a:p>
           <a:p>
-            <a:pPr algn="l" marL="342900" indent="-342900">
+            <a:pPr marL="342900" indent="-342900" algn="l">
               <a:lnSpc>
                 <a:spcPts val="2500"/>
               </a:lnSpc>
@@ -8342,7 +8388,7 @@
             <a:endParaRPr lang="en-US" sz="1550" dirty="0"/>
           </a:p>
           <a:p>
-            <a:pPr algn="l" marL="342900" indent="-342900">
+            <a:pPr marL="342900" indent="-342900" algn="l">
               <a:lnSpc>
                 <a:spcPts val="2500"/>
               </a:lnSpc>
@@ -8385,7 +8431,7 @@
           <a:bodyPr wrap="square" lIns="0" tIns="0" rIns="0" bIns="0" rtlCol="0" anchor="t"/>
           <a:lstStyle/>
           <a:p>
-            <a:pPr algn="l" indent="0" marL="0">
+            <a:pPr marL="0" indent="0" algn="l">
               <a:lnSpc>
                 <a:spcPts val="2400"/>
               </a:lnSpc>
@@ -8427,7 +8473,7 @@
           <a:bodyPr wrap="square" lIns="0" tIns="0" rIns="0" bIns="0" rtlCol="0" anchor="t"/>
           <a:lstStyle/>
           <a:p>
-            <a:pPr algn="l" marL="342900" indent="-342900">
+            <a:pPr marL="342900" indent="-342900" algn="l">
               <a:lnSpc>
                 <a:spcPts val="2500"/>
               </a:lnSpc>
@@ -8448,7 +8494,7 @@
             <a:endParaRPr lang="en-US" sz="1550" dirty="0"/>
           </a:p>
           <a:p>
-            <a:pPr algn="l" marL="342900" indent="-342900">
+            <a:pPr marL="342900" indent="-342900" algn="l">
               <a:lnSpc>
                 <a:spcPts val="2500"/>
               </a:lnSpc>
@@ -8469,7 +8515,7 @@
             <a:endParaRPr lang="en-US" sz="1550" dirty="0"/>
           </a:p>
           <a:p>
-            <a:pPr algn="l" marL="342900" indent="-342900">
+            <a:pPr marL="342900" indent="-342900" algn="l">
               <a:lnSpc>
                 <a:spcPts val="2500"/>
               </a:lnSpc>
@@ -8518,14 +8564,14 @@
       </p:grpSpPr>
       <p:pic>
         <p:nvPicPr>
-          <p:cNvPr id="2" name="Image 0" descr="preencoded.png">    </p:cNvPr>
+          <p:cNvPr id="2" name="Image 0" descr="preencoded.png"/>
           <p:cNvPicPr>
             <a:picLocks noChangeAspect="1"/>
           </p:cNvPicPr>
           <p:nvPr/>
         </p:nvPicPr>
         <p:blipFill>
-          <a:blip r:embed="rId1"/>
+          <a:blip r:embed="rId3"/>
           <a:stretch>
             <a:fillRect/>
           </a:stretch>
@@ -8559,17 +8605,24 @@
           </a:solidFill>
           <a:ln/>
         </p:spPr>
+        <p:txBody>
+          <a:bodyPr/>
+          <a:lstStyle/>
+          <a:p>
+            <a:endParaRPr lang="en-US"/>
+          </a:p>
+        </p:txBody>
       </p:sp>
       <p:pic>
         <p:nvPicPr>
-          <p:cNvPr id="4" name="Image 1" descr="preencoded.png">    </p:cNvPr>
+          <p:cNvPr id="4" name="Image 1" descr="preencoded.png"/>
           <p:cNvPicPr>
             <a:picLocks noChangeAspect="1"/>
           </p:cNvPicPr>
           <p:nvPr/>
         </p:nvPicPr>
         <p:blipFill>
-          <a:blip r:embed="rId2"/>
+          <a:blip r:embed="rId4"/>
           <a:stretch>
             <a:fillRect/>
           </a:stretch>
@@ -8605,7 +8658,7 @@
           <a:bodyPr wrap="square" lIns="0" tIns="0" rIns="0" bIns="0" rtlCol="0" anchor="t"/>
           <a:lstStyle/>
           <a:p>
-            <a:pPr algn="l" indent="0" marL="0">
+            <a:pPr marL="0" indent="0" algn="l">
               <a:lnSpc>
                 <a:spcPts val="4850"/>
               </a:lnSpc>
@@ -8647,7 +8700,7 @@
           <a:bodyPr wrap="square" lIns="0" tIns="0" rIns="0" bIns="0" rtlCol="0" anchor="t"/>
           <a:lstStyle/>
           <a:p>
-            <a:pPr algn="l" indent="0" marL="0">
+            <a:pPr marL="0" indent="0" algn="l">
               <a:lnSpc>
                 <a:spcPts val="2400"/>
               </a:lnSpc>
@@ -8689,7 +8742,7 @@
           <a:bodyPr wrap="square" lIns="0" tIns="0" rIns="0" bIns="0" rtlCol="0" anchor="t"/>
           <a:lstStyle/>
           <a:p>
-            <a:pPr algn="l" marL="342900" indent="-342900">
+            <a:pPr marL="342900" indent="-342900" algn="l">
               <a:lnSpc>
                 <a:spcPts val="2500"/>
               </a:lnSpc>
@@ -8710,7 +8763,7 @@
             <a:endParaRPr lang="en-US" sz="1550" dirty="0"/>
           </a:p>
           <a:p>
-            <a:pPr algn="l" marL="342900" indent="-342900">
+            <a:pPr marL="342900" indent="-342900" algn="l">
               <a:lnSpc>
                 <a:spcPts val="2500"/>
               </a:lnSpc>
@@ -8731,7 +8784,7 @@
             <a:endParaRPr lang="en-US" sz="1550" dirty="0"/>
           </a:p>
           <a:p>
-            <a:pPr algn="l" marL="342900" indent="-342900">
+            <a:pPr marL="342900" indent="-342900" algn="l">
               <a:lnSpc>
                 <a:spcPts val="2500"/>
               </a:lnSpc>
@@ -8752,7 +8805,7 @@
             <a:endParaRPr lang="en-US" sz="1550" dirty="0"/>
           </a:p>
           <a:p>
-            <a:pPr algn="l" marL="342900" indent="-342900">
+            <a:pPr marL="342900" indent="-342900" algn="l">
               <a:lnSpc>
                 <a:spcPts val="2500"/>
               </a:lnSpc>
@@ -8795,7 +8848,7 @@
           <a:bodyPr wrap="square" lIns="0" tIns="0" rIns="0" bIns="0" rtlCol="0" anchor="t"/>
           <a:lstStyle/>
           <a:p>
-            <a:pPr algn="l" indent="0" marL="0">
+            <a:pPr marL="0" indent="0" algn="l">
               <a:lnSpc>
                 <a:spcPts val="2400"/>
               </a:lnSpc>
@@ -8837,7 +8890,7 @@
           <a:bodyPr wrap="square" lIns="0" tIns="0" rIns="0" bIns="0" rtlCol="0" anchor="t"/>
           <a:lstStyle/>
           <a:p>
-            <a:pPr algn="l" marL="342900" indent="-342900">
+            <a:pPr marL="342900" indent="-342900" algn="l">
               <a:lnSpc>
                 <a:spcPts val="2500"/>
               </a:lnSpc>
@@ -8858,7 +8911,7 @@
             <a:endParaRPr lang="en-US" sz="1550" dirty="0"/>
           </a:p>
           <a:p>
-            <a:pPr algn="l" marL="342900" indent="-342900">
+            <a:pPr marL="342900" indent="-342900" algn="l">
               <a:lnSpc>
                 <a:spcPts val="2500"/>
               </a:lnSpc>
@@ -8879,7 +8932,7 @@
             <a:endParaRPr lang="en-US" sz="1550" dirty="0"/>
           </a:p>
           <a:p>
-            <a:pPr algn="l" marL="342900" indent="-342900">
+            <a:pPr marL="342900" indent="-342900" algn="l">
               <a:lnSpc>
                 <a:spcPts val="2500"/>
               </a:lnSpc>
@@ -8900,7 +8953,7 @@
             <a:endParaRPr lang="en-US" sz="1550" dirty="0"/>
           </a:p>
           <a:p>
-            <a:pPr algn="l" marL="342900" indent="-342900">
+            <a:pPr marL="342900" indent="-342900" algn="l">
               <a:lnSpc>
                 <a:spcPts val="2500"/>
               </a:lnSpc>
@@ -8921,7 +8974,7 @@
             <a:endParaRPr lang="en-US" sz="1550" dirty="0"/>
           </a:p>
           <a:p>
-            <a:pPr algn="l" marL="342900" indent="-342900">
+            <a:pPr marL="342900" indent="-342900" algn="l">
               <a:lnSpc>
                 <a:spcPts val="2500"/>
               </a:lnSpc>
@@ -8964,7 +9017,7 @@
           <a:bodyPr wrap="square" lIns="0" tIns="0" rIns="0" bIns="0" rtlCol="0" anchor="t"/>
           <a:lstStyle/>
           <a:p>
-            <a:pPr algn="l" indent="0" marL="0">
+            <a:pPr marL="0" indent="0" algn="l">
               <a:lnSpc>
                 <a:spcPts val="2400"/>
               </a:lnSpc>
@@ -9006,7 +9059,7 @@
           <a:bodyPr wrap="square" lIns="0" tIns="0" rIns="0" bIns="0" rtlCol="0" anchor="t"/>
           <a:lstStyle/>
           <a:p>
-            <a:pPr algn="l" marL="342900" indent="-342900">
+            <a:pPr marL="342900" indent="-342900" algn="l">
               <a:lnSpc>
                 <a:spcPts val="2500"/>
               </a:lnSpc>
@@ -9027,7 +9080,7 @@
             <a:endParaRPr lang="en-US" sz="1550" dirty="0"/>
           </a:p>
           <a:p>
-            <a:pPr algn="l" marL="342900" indent="-342900">
+            <a:pPr marL="342900" indent="-342900" algn="l">
               <a:lnSpc>
                 <a:spcPts val="2500"/>
               </a:lnSpc>
@@ -9048,7 +9101,7 @@
             <a:endParaRPr lang="en-US" sz="1550" dirty="0"/>
           </a:p>
           <a:p>
-            <a:pPr algn="l" marL="342900" indent="-342900">
+            <a:pPr marL="342900" indent="-342900" algn="l">
               <a:lnSpc>
                 <a:spcPts val="2500"/>
               </a:lnSpc>
@@ -9069,7 +9122,7 @@
             <a:endParaRPr lang="en-US" sz="1550" dirty="0"/>
           </a:p>
           <a:p>
-            <a:pPr algn="l" marL="342900" indent="-342900">
+            <a:pPr marL="342900" indent="-342900" algn="l">
               <a:lnSpc>
                 <a:spcPts val="2500"/>
               </a:lnSpc>
@@ -9392,4 +9445,319 @@
     </a:ext>
   </a:extLst>
 </a:theme>
+</file>
+
+<file path=ppt/theme/theme2.xml><?xml version="1.0" encoding="utf-8"?>
+<a:theme xmlns:a="http://schemas.openxmlformats.org/drawingml/2006/main" name="Office Theme">
+  <a:themeElements>
+    <a:clrScheme name="Office">
+      <a:dk1>
+        <a:sysClr val="windowText" lastClr="000000"/>
+      </a:dk1>
+      <a:lt1>
+        <a:sysClr val="window" lastClr="FFFFFF"/>
+      </a:lt1>
+      <a:dk2>
+        <a:srgbClr val="0E2841"/>
+      </a:dk2>
+      <a:lt2>
+        <a:srgbClr val="E8E8E8"/>
+      </a:lt2>
+      <a:accent1>
+        <a:srgbClr val="156082"/>
+      </a:accent1>
+      <a:accent2>
+        <a:srgbClr val="E97132"/>
+      </a:accent2>
+      <a:accent3>
+        <a:srgbClr val="196B24"/>
+      </a:accent3>
+      <a:accent4>
+        <a:srgbClr val="0F9ED5"/>
+      </a:accent4>
+      <a:accent5>
+        <a:srgbClr val="A02B93"/>
+      </a:accent5>
+      <a:accent6>
+        <a:srgbClr val="4EA72E"/>
+      </a:accent6>
+      <a:hlink>
+        <a:srgbClr val="467886"/>
+      </a:hlink>
+      <a:folHlink>
+        <a:srgbClr val="96607D"/>
+      </a:folHlink>
+    </a:clrScheme>
+    <a:fontScheme name="Office">
+      <a:majorFont>
+        <a:latin typeface="Aptos Display" panose="02110004020202020204"/>
+        <a:ea typeface=""/>
+        <a:cs typeface=""/>
+        <a:font script="Jpan" typeface="游ゴシック Light"/>
+        <a:font script="Hang" typeface="맑은 고딕"/>
+        <a:font script="Hans" typeface="等线 Light"/>
+        <a:font script="Hant" typeface="新細明體"/>
+        <a:font script="Arab" typeface="Times New Roman"/>
+        <a:font script="Hebr" typeface="Times New Roman"/>
+        <a:font script="Thai" typeface="Angsana New"/>
+        <a:font script="Ethi" typeface="Nyala"/>
+        <a:font script="Beng" typeface="Vrinda"/>
+        <a:font script="Gujr" typeface="Shruti"/>
+        <a:font script="Khmr" typeface="MoolBoran"/>
+        <a:font script="Knda" typeface="Tunga"/>
+        <a:font script="Guru" typeface="Raavi"/>
+        <a:font script="Cans" typeface="Euphemia"/>
+        <a:font script="Cher" typeface="Plantagenet Cherokee"/>
+        <a:font script="Yiii" typeface="Microsoft Yi Baiti"/>
+        <a:font script="Tibt" typeface="Microsoft Himalaya"/>
+        <a:font script="Thaa" typeface="MV Boli"/>
+        <a:font script="Deva" typeface="Mangal"/>
+        <a:font script="Telu" typeface="Gautami"/>
+        <a:font script="Taml" typeface="Latha"/>
+        <a:font script="Syrc" typeface="Estrangelo Edessa"/>
+        <a:font script="Orya" typeface="Kalinga"/>
+        <a:font script="Mlym" typeface="Kartika"/>
+        <a:font script="Laoo" typeface="DokChampa"/>
+        <a:font script="Sinh" typeface="Iskoola Pota"/>
+        <a:font script="Mong" typeface="Mongolian Baiti"/>
+        <a:font script="Viet" typeface="Times New Roman"/>
+        <a:font script="Uigh" typeface="Microsoft Uighur"/>
+        <a:font script="Geor" typeface="Sylfaen"/>
+        <a:font script="Armn" typeface="Arial"/>
+        <a:font script="Bugi" typeface="Leelawadee UI"/>
+        <a:font script="Bopo" typeface="Microsoft JhengHei"/>
+        <a:font script="Java" typeface="Javanese Text"/>
+        <a:font script="Lisu" typeface="Segoe UI"/>
+        <a:font script="Mymr" typeface="Myanmar Text"/>
+        <a:font script="Nkoo" typeface="Ebrima"/>
+        <a:font script="Olck" typeface="Nirmala UI"/>
+        <a:font script="Osma" typeface="Ebrima"/>
+        <a:font script="Phag" typeface="Phagspa"/>
+        <a:font script="Syrn" typeface="Estrangelo Edessa"/>
+        <a:font script="Syrj" typeface="Estrangelo Edessa"/>
+        <a:font script="Syre" typeface="Estrangelo Edessa"/>
+        <a:font script="Sora" typeface="Nirmala UI"/>
+        <a:font script="Tale" typeface="Microsoft Tai Le"/>
+        <a:font script="Talu" typeface="Microsoft New Tai Lue"/>
+        <a:font script="Tfng" typeface="Ebrima"/>
+      </a:majorFont>
+      <a:minorFont>
+        <a:latin typeface="Aptos" panose="02110004020202020204"/>
+        <a:ea typeface=""/>
+        <a:cs typeface=""/>
+        <a:font script="Jpan" typeface="游ゴシック"/>
+        <a:font script="Hang" typeface="맑은 고딕"/>
+        <a:font script="Hans" typeface="等线"/>
+        <a:font script="Hant" typeface="新細明體"/>
+        <a:font script="Arab" typeface="Arial"/>
+        <a:font script="Hebr" typeface="Arial"/>
+        <a:font script="Thai" typeface="Cordia New"/>
+        <a:font script="Ethi" typeface="Nyala"/>
+        <a:font script="Beng" typeface="Vrinda"/>
+        <a:font script="Gujr" typeface="Shruti"/>
+        <a:font script="Khmr" typeface="DaunPenh"/>
+        <a:font script="Knda" typeface="Tunga"/>
+        <a:font script="Guru" typeface="Raavi"/>
+        <a:font script="Cans" typeface="Euphemia"/>
+        <a:font script="Cher" typeface="Plantagenet Cherokee"/>
+        <a:font script="Yiii" typeface="Microsoft Yi Baiti"/>
+        <a:font script="Tibt" typeface="Microsoft Himalaya"/>
+        <a:font script="Thaa" typeface="MV Boli"/>
+        <a:font script="Deva" typeface="Mangal"/>
+        <a:font script="Telu" typeface="Gautami"/>
+        <a:font script="Taml" typeface="Latha"/>
+        <a:font script="Syrc" typeface="Estrangelo Edessa"/>
+        <a:font script="Orya" typeface="Kalinga"/>
+        <a:font script="Mlym" typeface="Kartika"/>
+        <a:font script="Laoo" typeface="DokChampa"/>
+        <a:font script="Sinh" typeface="Iskoola Pota"/>
+        <a:font script="Mong" typeface="Mongolian Baiti"/>
+        <a:font script="Viet" typeface="Arial"/>
+        <a:font script="Uigh" typeface="Microsoft Uighur"/>
+        <a:font script="Geor" typeface="Sylfaen"/>
+        <a:font script="Armn" typeface="Arial"/>
+        <a:font script="Bugi" typeface="Leelawadee UI"/>
+        <a:font script="Bopo" typeface="Microsoft JhengHei"/>
+        <a:font script="Java" typeface="Javanese Text"/>
+        <a:font script="Lisu" typeface="Segoe UI"/>
+        <a:font script="Mymr" typeface="Myanmar Text"/>
+        <a:font script="Nkoo" typeface="Ebrima"/>
+        <a:font script="Olck" typeface="Nirmala UI"/>
+        <a:font script="Osma" typeface="Ebrima"/>
+        <a:font script="Phag" typeface="Phagspa"/>
+        <a:font script="Syrn" typeface="Estrangelo Edessa"/>
+        <a:font script="Syrj" typeface="Estrangelo Edessa"/>
+        <a:font script="Syre" typeface="Estrangelo Edessa"/>
+        <a:font script="Sora" typeface="Nirmala UI"/>
+        <a:font script="Tale" typeface="Microsoft Tai Le"/>
+        <a:font script="Talu" typeface="Microsoft New Tai Lue"/>
+        <a:font script="Tfng" typeface="Ebrima"/>
+      </a:minorFont>
+    </a:fontScheme>
+    <a:fmtScheme name="Office">
+      <a:fillStyleLst>
+        <a:solidFill>
+          <a:schemeClr val="phClr"/>
+        </a:solidFill>
+        <a:gradFill rotWithShape="1">
+          <a:gsLst>
+            <a:gs pos="0">
+              <a:schemeClr val="phClr">
+                <a:lumMod val="110000"/>
+                <a:satMod val="105000"/>
+                <a:tint val="67000"/>
+              </a:schemeClr>
+            </a:gs>
+            <a:gs pos="50000">
+              <a:schemeClr val="phClr">
+                <a:lumMod val="105000"/>
+                <a:satMod val="103000"/>
+                <a:tint val="73000"/>
+              </a:schemeClr>
+            </a:gs>
+            <a:gs pos="100000">
+              <a:schemeClr val="phClr">
+                <a:lumMod val="105000"/>
+                <a:satMod val="109000"/>
+                <a:tint val="81000"/>
+              </a:schemeClr>
+            </a:gs>
+          </a:gsLst>
+          <a:lin ang="5400000" scaled="0"/>
+        </a:gradFill>
+        <a:gradFill rotWithShape="1">
+          <a:gsLst>
+            <a:gs pos="0">
+              <a:schemeClr val="phClr">
+                <a:satMod val="103000"/>
+                <a:lumMod val="102000"/>
+                <a:tint val="94000"/>
+              </a:schemeClr>
+            </a:gs>
+            <a:gs pos="50000">
+              <a:schemeClr val="phClr">
+                <a:satMod val="110000"/>
+                <a:lumMod val="100000"/>
+                <a:shade val="100000"/>
+              </a:schemeClr>
+            </a:gs>
+            <a:gs pos="100000">
+              <a:schemeClr val="phClr">
+                <a:lumMod val="99000"/>
+                <a:satMod val="120000"/>
+                <a:shade val="78000"/>
+              </a:schemeClr>
+            </a:gs>
+          </a:gsLst>
+          <a:lin ang="5400000" scaled="0"/>
+        </a:gradFill>
+      </a:fillStyleLst>
+      <a:lnStyleLst>
+        <a:ln w="12700" cap="flat" cmpd="sng" algn="ctr">
+          <a:solidFill>
+            <a:schemeClr val="phClr"/>
+          </a:solidFill>
+          <a:prstDash val="solid"/>
+          <a:miter lim="800000"/>
+        </a:ln>
+        <a:ln w="19050" cap="flat" cmpd="sng" algn="ctr">
+          <a:solidFill>
+            <a:schemeClr val="phClr"/>
+          </a:solidFill>
+          <a:prstDash val="solid"/>
+          <a:miter lim="800000"/>
+        </a:ln>
+        <a:ln w="25400" cap="flat" cmpd="sng" algn="ctr">
+          <a:solidFill>
+            <a:schemeClr val="phClr"/>
+          </a:solidFill>
+          <a:prstDash val="solid"/>
+          <a:miter lim="800000"/>
+        </a:ln>
+      </a:lnStyleLst>
+      <a:effectStyleLst>
+        <a:effectStyle>
+          <a:effectLst/>
+        </a:effectStyle>
+        <a:effectStyle>
+          <a:effectLst/>
+        </a:effectStyle>
+        <a:effectStyle>
+          <a:effectLst>
+            <a:outerShdw blurRad="57150" dist="19050" dir="5400000" algn="ctr" rotWithShape="0">
+              <a:srgbClr val="000000">
+                <a:alpha val="63000"/>
+              </a:srgbClr>
+            </a:outerShdw>
+          </a:effectLst>
+        </a:effectStyle>
+      </a:effectStyleLst>
+      <a:bgFillStyleLst>
+        <a:solidFill>
+          <a:schemeClr val="phClr"/>
+        </a:solidFill>
+        <a:solidFill>
+          <a:schemeClr val="phClr">
+            <a:tint val="95000"/>
+            <a:satMod val="170000"/>
+          </a:schemeClr>
+        </a:solidFill>
+        <a:gradFill rotWithShape="1">
+          <a:gsLst>
+            <a:gs pos="0">
+              <a:schemeClr val="phClr">
+                <a:tint val="93000"/>
+                <a:satMod val="150000"/>
+                <a:shade val="98000"/>
+                <a:lumMod val="102000"/>
+              </a:schemeClr>
+            </a:gs>
+            <a:gs pos="50000">
+              <a:schemeClr val="phClr">
+                <a:tint val="98000"/>
+                <a:satMod val="130000"/>
+                <a:shade val="90000"/>
+                <a:lumMod val="103000"/>
+              </a:schemeClr>
+            </a:gs>
+            <a:gs pos="100000">
+              <a:schemeClr val="phClr">
+                <a:shade val="63000"/>
+                <a:satMod val="120000"/>
+              </a:schemeClr>
+            </a:gs>
+          </a:gsLst>
+          <a:lin ang="5400000" scaled="0"/>
+        </a:gradFill>
+      </a:bgFillStyleLst>
+    </a:fmtScheme>
+  </a:themeElements>
+  <a:objectDefaults>
+    <a:lnDef>
+      <a:spPr/>
+      <a:bodyPr/>
+      <a:lstStyle/>
+      <a:style>
+        <a:lnRef idx="2">
+          <a:schemeClr val="accent1"/>
+        </a:lnRef>
+        <a:fillRef idx="0">
+          <a:schemeClr val="accent1"/>
+        </a:fillRef>
+        <a:effectRef idx="1">
+          <a:schemeClr val="accent1"/>
+        </a:effectRef>
+        <a:fontRef idx="minor">
+          <a:schemeClr val="tx1"/>
+        </a:fontRef>
+      </a:style>
+    </a:lnDef>
+  </a:objectDefaults>
+  <a:extraClrSchemeLst/>
+  <a:extLst>
+    <a:ext uri="{05A4C25C-085E-4340-85A3-A5531E510DB2}">
+      <thm15:themeFamily xmlns:thm15="http://schemas.microsoft.com/office/thememl/2012/main" name="Office Theme" id="{2E142A2C-CD16-42D6-873A-C26D2A0506FA}" vid="{1BDDFF52-6CD6-40A5-AB3C-68EB2F1E4D0A}"/>
+    </a:ext>
+  </a:extLst>
+</a:theme>
 </file>
--- a/doc/Automated-End-to-End-Testing-of-GOGcom.pptx
+++ b/doc/Automated-End-to-End-Testing-of-GOGcom.pptx
@@ -5,7 +5,7 @@
     <p:sldMasterId id="2147483648" r:id="rId1"/>
   </p:sldMasterIdLst>
   <p:notesMasterIdLst>
-    <p:notesMasterId r:id="rId13"/>
+    <p:notesMasterId r:id="rId15"/>
   </p:notesMasterIdLst>
   <p:sldIdLst>
     <p:sldId id="256" r:id="rId2"/>
@@ -18,14 +18,16 @@
     <p:sldId id="263" r:id="rId9"/>
     <p:sldId id="264" r:id="rId10"/>
     <p:sldId id="265" r:id="rId11"/>
-    <p:sldId id="266" r:id="rId12"/>
+    <p:sldId id="267" r:id="rId12"/>
+    <p:sldId id="268" r:id="rId13"/>
+    <p:sldId id="269" r:id="rId14"/>
   </p:sldIdLst>
   <p:sldSz cx="14630400" cy="8229600"/>
   <p:notesSz cx="8229600" cy="14630400"/>
   <p:embeddedFontLst>
     <p:embeddedFont>
       <p:font typeface="Inter" panose="020B0604020202020204" charset="0"/>
-      <p:regular r:id="rId14"/>
+      <p:regular r:id="rId16"/>
     </p:embeddedFont>
   </p:embeddedFontLst>
   <p:defaultTextStyle>
@@ -424,6 +426,114 @@
 </p:notes>
 </file>
 
+<file path=ppt/notesSlides/notesSlide11.xml><?xml version="1.0" encoding="utf-8"?>
+<p:notes xmlns:a="http://schemas.openxmlformats.org/drawingml/2006/main" xmlns:r="http://schemas.openxmlformats.org/officeDocument/2006/relationships" xmlns:p="http://schemas.openxmlformats.org/presentationml/2006/main">
+  <p:cSld>
+    <p:spTree>
+      <p:nvGrpSpPr>
+        <p:cNvPr id="1" name="">
+          <a:extLst>
+            <a:ext uri="{FF2B5EF4-FFF2-40B4-BE49-F238E27FC236}">
+              <a16:creationId xmlns:a16="http://schemas.microsoft.com/office/drawing/2014/main" id="{EA5165A6-3BEB-DA4E-C57D-02F067FA43A2}"/>
+            </a:ext>
+          </a:extLst>
+        </p:cNvPr>
+        <p:cNvGrpSpPr/>
+        <p:nvPr/>
+      </p:nvGrpSpPr>
+      <p:grpSpPr>
+        <a:xfrm>
+          <a:off x="0" y="0"/>
+          <a:ext cx="0" cy="0"/>
+          <a:chOff x="0" y="0"/>
+          <a:chExt cx="0" cy="0"/>
+        </a:xfrm>
+      </p:grpSpPr>
+      <p:sp>
+        <p:nvSpPr>
+          <p:cNvPr id="2" name="Slide Image Placeholder 1">
+            <a:extLst>
+              <a:ext uri="{FF2B5EF4-FFF2-40B4-BE49-F238E27FC236}">
+                <a16:creationId xmlns:a16="http://schemas.microsoft.com/office/drawing/2014/main" id="{2B6CC053-3896-1B39-EE82-A114A9A37849}"/>
+              </a:ext>
+            </a:extLst>
+          </p:cNvPr>
+          <p:cNvSpPr>
+            <a:spLocks noGrp="1" noRot="1" noChangeAspect="1"/>
+          </p:cNvSpPr>
+          <p:nvPr>
+            <p:ph type="sldImg"/>
+          </p:nvPr>
+        </p:nvSpPr>
+        <p:spPr/>
+      </p:sp>
+      <p:sp>
+        <p:nvSpPr>
+          <p:cNvPr id="3" name="Notes Placeholder 2">
+            <a:extLst>
+              <a:ext uri="{FF2B5EF4-FFF2-40B4-BE49-F238E27FC236}">
+                <a16:creationId xmlns:a16="http://schemas.microsoft.com/office/drawing/2014/main" id="{535BA64F-EF41-F326-57DE-65EEE9AD5A1D}"/>
+              </a:ext>
+            </a:extLst>
+          </p:cNvPr>
+          <p:cNvSpPr>
+            <a:spLocks noGrp="1"/>
+          </p:cNvSpPr>
+          <p:nvPr>
+            <p:ph type="body" idx="1"/>
+          </p:nvPr>
+        </p:nvSpPr>
+        <p:spPr/>
+        <p:txBody>
+          <a:bodyPr/>
+          <a:lstStyle/>
+          <a:p>
+            <a:endParaRPr lang="en-US" dirty="0"/>
+          </a:p>
+        </p:txBody>
+      </p:sp>
+      <p:sp>
+        <p:nvSpPr>
+          <p:cNvPr id="4" name="Slide Number Placeholder 3">
+            <a:extLst>
+              <a:ext uri="{FF2B5EF4-FFF2-40B4-BE49-F238E27FC236}">
+                <a16:creationId xmlns:a16="http://schemas.microsoft.com/office/drawing/2014/main" id="{7356AEC8-F20F-3EFD-F5A1-3BA8AB24A52B}"/>
+              </a:ext>
+            </a:extLst>
+          </p:cNvPr>
+          <p:cNvSpPr>
+            <a:spLocks noGrp="1"/>
+          </p:cNvSpPr>
+          <p:nvPr>
+            <p:ph type="sldNum" sz="quarter" idx="10"/>
+          </p:nvPr>
+        </p:nvSpPr>
+        <p:spPr/>
+        <p:txBody>
+          <a:bodyPr/>
+          <a:lstStyle/>
+          <a:p>
+            <a:fld id="{F7021451-1387-4CA6-816F-3879F97B5CBC}" type="slidenum">
+              <a:rPr lang="en-US"/>
+              <a:t>11</a:t>
+            </a:fld>
+            <a:endParaRPr lang="en-US"/>
+          </a:p>
+        </p:txBody>
+      </p:sp>
+    </p:spTree>
+    <p:extLst>
+      <p:ext uri="{BB962C8B-B14F-4D97-AF65-F5344CB8AC3E}">
+        <p14:creationId xmlns:p14="http://schemas.microsoft.com/office/powerpoint/2010/main" val="685451310"/>
+      </p:ext>
+    </p:extLst>
+  </p:cSld>
+  <p:clrMapOvr>
+    <a:masterClrMapping/>
+  </p:clrMapOvr>
+</p:notes>
+</file>
+
 <file path=ppt/notesSlides/notesSlide2.xml><?xml version="1.0" encoding="utf-8"?>
 <p:notes xmlns:a="http://schemas.openxmlformats.org/drawingml/2006/main" xmlns:r="http://schemas.openxmlformats.org/officeDocument/2006/relationships" xmlns:p="http://schemas.openxmlformats.org/presentationml/2006/main">
   <p:cSld>
@@ -1162,6 +1272,13 @@
           </a:solidFill>
           <a:ln/>
         </p:spPr>
+        <p:txBody>
+          <a:bodyPr/>
+          <a:lstStyle/>
+          <a:p>
+            <a:endParaRPr lang="en-US"/>
+          </a:p>
+        </p:txBody>
       </p:sp>
       <p:sp>
         <p:nvSpPr>
@@ -1182,6 +1299,13 @@
           </a:solidFill>
           <a:ln/>
         </p:spPr>
+        <p:txBody>
+          <a:bodyPr/>
+          <a:lstStyle/>
+          <a:p>
+            <a:endParaRPr lang="en-US"/>
+          </a:p>
+        </p:txBody>
       </p:sp>
       <p:pic>
         <p:nvPicPr>
@@ -1253,6 +1377,13 @@
           </a:solidFill>
           <a:ln/>
         </p:spPr>
+        <p:txBody>
+          <a:bodyPr/>
+          <a:lstStyle/>
+          <a:p>
+            <a:endParaRPr lang="en-US"/>
+          </a:p>
+        </p:txBody>
       </p:sp>
       <p:sp>
         <p:nvSpPr>
@@ -1273,6 +1404,13 @@
           </a:solidFill>
           <a:ln/>
         </p:spPr>
+        <p:txBody>
+          <a:bodyPr/>
+          <a:lstStyle/>
+          <a:p>
+            <a:endParaRPr lang="en-US"/>
+          </a:p>
+        </p:txBody>
       </p:sp>
       <p:pic>
         <p:nvPicPr>
@@ -1449,6 +1587,13 @@
           </a:solidFill>
           <a:ln/>
         </p:spPr>
+        <p:txBody>
+          <a:bodyPr/>
+          <a:lstStyle/>
+          <a:p>
+            <a:endParaRPr lang="en-US"/>
+          </a:p>
+        </p:txBody>
       </p:sp>
       <p:sp>
         <p:nvSpPr>
@@ -1469,6 +1614,13 @@
           </a:solidFill>
           <a:ln/>
         </p:spPr>
+        <p:txBody>
+          <a:bodyPr/>
+          <a:lstStyle/>
+          <a:p>
+            <a:endParaRPr lang="en-US"/>
+          </a:p>
+        </p:txBody>
       </p:sp>
       <p:pic>
         <p:nvPicPr>
@@ -1540,6 +1692,13 @@
           </a:solidFill>
           <a:ln/>
         </p:spPr>
+        <p:txBody>
+          <a:bodyPr/>
+          <a:lstStyle/>
+          <a:p>
+            <a:endParaRPr lang="en-US"/>
+          </a:p>
+        </p:txBody>
       </p:sp>
       <p:sp>
         <p:nvSpPr>
@@ -1560,6 +1719,13 @@
           </a:solidFill>
           <a:ln/>
         </p:spPr>
+        <p:txBody>
+          <a:bodyPr/>
+          <a:lstStyle/>
+          <a:p>
+            <a:endParaRPr lang="en-US"/>
+          </a:p>
+        </p:txBody>
       </p:sp>
       <p:pic>
         <p:nvPicPr>
@@ -1631,6 +1797,13 @@
           </a:solidFill>
           <a:ln/>
         </p:spPr>
+        <p:txBody>
+          <a:bodyPr/>
+          <a:lstStyle/>
+          <a:p>
+            <a:endParaRPr lang="en-US"/>
+          </a:p>
+        </p:txBody>
       </p:sp>
       <p:sp>
         <p:nvSpPr>
@@ -1651,6 +1824,13 @@
           </a:solidFill>
           <a:ln/>
         </p:spPr>
+        <p:txBody>
+          <a:bodyPr/>
+          <a:lstStyle/>
+          <a:p>
+            <a:endParaRPr lang="en-US"/>
+          </a:p>
+        </p:txBody>
       </p:sp>
       <p:pic>
         <p:nvPicPr>
@@ -1722,6 +1902,13 @@
           </a:solidFill>
           <a:ln/>
         </p:spPr>
+        <p:txBody>
+          <a:bodyPr/>
+          <a:lstStyle/>
+          <a:p>
+            <a:endParaRPr lang="en-US"/>
+          </a:p>
+        </p:txBody>
       </p:sp>
       <p:sp>
         <p:nvSpPr>
@@ -1742,6 +1929,13 @@
           </a:solidFill>
           <a:ln/>
         </p:spPr>
+        <p:txBody>
+          <a:bodyPr/>
+          <a:lstStyle/>
+          <a:p>
+            <a:endParaRPr lang="en-US"/>
+          </a:p>
+        </p:txBody>
       </p:sp>
       <p:pic>
         <p:nvPicPr>
@@ -1813,6 +2007,13 @@
           </a:solidFill>
           <a:ln/>
         </p:spPr>
+        <p:txBody>
+          <a:bodyPr/>
+          <a:lstStyle/>
+          <a:p>
+            <a:endParaRPr lang="en-US"/>
+          </a:p>
+        </p:txBody>
       </p:sp>
       <p:sp>
         <p:nvSpPr>
@@ -1833,6 +2034,13 @@
           </a:solidFill>
           <a:ln/>
         </p:spPr>
+        <p:txBody>
+          <a:bodyPr/>
+          <a:lstStyle/>
+          <a:p>
+            <a:endParaRPr lang="en-US"/>
+          </a:p>
+        </p:txBody>
       </p:sp>
       <p:pic>
         <p:nvPicPr>
@@ -1904,6 +2112,13 @@
           </a:solidFill>
           <a:ln/>
         </p:spPr>
+        <p:txBody>
+          <a:bodyPr/>
+          <a:lstStyle/>
+          <a:p>
+            <a:endParaRPr lang="en-US"/>
+          </a:p>
+        </p:txBody>
       </p:sp>
       <p:sp>
         <p:nvSpPr>
@@ -1924,6 +2139,13 @@
           </a:solidFill>
           <a:ln/>
         </p:spPr>
+        <p:txBody>
+          <a:bodyPr/>
+          <a:lstStyle/>
+          <a:p>
+            <a:endParaRPr lang="en-US"/>
+          </a:p>
+        </p:txBody>
       </p:sp>
       <p:pic>
         <p:nvPicPr>
@@ -1995,6 +2217,13 @@
           </a:solidFill>
           <a:ln/>
         </p:spPr>
+        <p:txBody>
+          <a:bodyPr/>
+          <a:lstStyle/>
+          <a:p>
+            <a:endParaRPr lang="en-US"/>
+          </a:p>
+        </p:txBody>
       </p:sp>
       <p:sp>
         <p:nvSpPr>
@@ -2015,6 +2244,13 @@
           </a:solidFill>
           <a:ln/>
         </p:spPr>
+        <p:txBody>
+          <a:bodyPr/>
+          <a:lstStyle/>
+          <a:p>
+            <a:endParaRPr lang="en-US"/>
+          </a:p>
+        </p:txBody>
       </p:sp>
       <p:pic>
         <p:nvPicPr>
@@ -3147,6 +3383,639 @@
   <p:cSld>
     <p:spTree>
       <p:nvGrpSpPr>
+        <p:cNvPr id="1" name="">
+          <a:extLst>
+            <a:ext uri="{FF2B5EF4-FFF2-40B4-BE49-F238E27FC236}">
+              <a16:creationId xmlns:a16="http://schemas.microsoft.com/office/drawing/2014/main" id="{A577A0F1-5D5D-846C-0DEB-34AAD86C37D8}"/>
+            </a:ext>
+          </a:extLst>
+        </p:cNvPr>
+        <p:cNvGrpSpPr/>
+        <p:nvPr/>
+      </p:nvGrpSpPr>
+      <p:grpSpPr>
+        <a:xfrm>
+          <a:off x="0" y="0"/>
+          <a:ext cx="0" cy="0"/>
+          <a:chOff x="0" y="0"/>
+          <a:chExt cx="0" cy="0"/>
+        </a:xfrm>
+      </p:grpSpPr>
+      <p:pic>
+        <p:nvPicPr>
+          <p:cNvPr id="2" name="Image 0" descr="preencoded.png">
+            <a:extLst>
+              <a:ext uri="{FF2B5EF4-FFF2-40B4-BE49-F238E27FC236}">
+                <a16:creationId xmlns:a16="http://schemas.microsoft.com/office/drawing/2014/main" id="{F4B85F87-42A0-3FF4-D9B1-2F71E96833BF}"/>
+              </a:ext>
+            </a:extLst>
+          </p:cNvPr>
+          <p:cNvPicPr>
+            <a:picLocks noChangeAspect="1"/>
+          </p:cNvPicPr>
+          <p:nvPr/>
+        </p:nvPicPr>
+        <p:blipFill>
+          <a:blip r:embed="rId3"/>
+          <a:stretch>
+            <a:fillRect/>
+          </a:stretch>
+        </p:blipFill>
+        <p:spPr>
+          <a:xfrm>
+            <a:off x="9144000" y="0"/>
+            <a:ext cx="5486400" cy="8229600"/>
+          </a:xfrm>
+          <a:prstGeom prst="rect">
+            <a:avLst/>
+          </a:prstGeom>
+        </p:spPr>
+      </p:pic>
+      <p:sp>
+        <p:nvSpPr>
+          <p:cNvPr id="3" name="Shape 0">
+            <a:extLst>
+              <a:ext uri="{FF2B5EF4-FFF2-40B4-BE49-F238E27FC236}">
+                <a16:creationId xmlns:a16="http://schemas.microsoft.com/office/drawing/2014/main" id="{B5030F7B-66AE-01E4-DF75-1E44E9FBFC96}"/>
+              </a:ext>
+            </a:extLst>
+          </p:cNvPr>
+          <p:cNvSpPr/>
+          <p:nvPr/>
+        </p:nvSpPr>
+        <p:spPr>
+          <a:xfrm>
+            <a:off x="9144000" y="0"/>
+            <a:ext cx="5486400" cy="8229600"/>
+          </a:xfrm>
+          <a:prstGeom prst="rect">
+            <a:avLst/>
+          </a:prstGeom>
+          <a:solidFill>
+            <a:srgbClr val="DFDFE0"/>
+          </a:solidFill>
+          <a:ln/>
+        </p:spPr>
+        <p:txBody>
+          <a:bodyPr/>
+          <a:lstStyle/>
+          <a:p>
+            <a:endParaRPr lang="en-US"/>
+          </a:p>
+        </p:txBody>
+      </p:sp>
+      <p:pic>
+        <p:nvPicPr>
+          <p:cNvPr id="4" name="Image 1" descr="preencoded.png">
+            <a:extLst>
+              <a:ext uri="{FF2B5EF4-FFF2-40B4-BE49-F238E27FC236}">
+                <a16:creationId xmlns:a16="http://schemas.microsoft.com/office/drawing/2014/main" id="{632D7A89-F842-3F0D-B67C-610A2DB0E36D}"/>
+              </a:ext>
+            </a:extLst>
+          </p:cNvPr>
+          <p:cNvPicPr>
+            <a:picLocks noChangeAspect="1"/>
+          </p:cNvPicPr>
+          <p:nvPr/>
+        </p:nvPicPr>
+        <p:blipFill>
+          <a:blip r:embed="rId4"/>
+          <a:stretch>
+            <a:fillRect/>
+          </a:stretch>
+        </p:blipFill>
+        <p:spPr>
+          <a:xfrm>
+            <a:off x="9144000" y="0"/>
+            <a:ext cx="5486400" cy="8229600"/>
+          </a:xfrm>
+          <a:prstGeom prst="rect">
+            <a:avLst/>
+          </a:prstGeom>
+        </p:spPr>
+      </p:pic>
+      <p:sp>
+        <p:nvSpPr>
+          <p:cNvPr id="5" name="Text 1">
+            <a:extLst>
+              <a:ext uri="{FF2B5EF4-FFF2-40B4-BE49-F238E27FC236}">
+                <a16:creationId xmlns:a16="http://schemas.microsoft.com/office/drawing/2014/main" id="{14B731FC-9CFF-FAAC-E293-B42E52FEA7FB}"/>
+              </a:ext>
+            </a:extLst>
+          </p:cNvPr>
+          <p:cNvSpPr/>
+          <p:nvPr/>
+        </p:nvSpPr>
+        <p:spPr>
+          <a:xfrm>
+            <a:off x="793790" y="1333738"/>
+            <a:ext cx="4961811" cy="620078"/>
+          </a:xfrm>
+          <a:prstGeom prst="rect">
+            <a:avLst/>
+          </a:prstGeom>
+          <a:noFill/>
+          <a:ln/>
+        </p:spPr>
+        <p:txBody>
+          <a:bodyPr wrap="none" lIns="0" tIns="0" rIns="0" bIns="0" rtlCol="0" anchor="t"/>
+          <a:lstStyle/>
+          <a:p>
+            <a:pPr marL="0" indent="0" algn="l">
+              <a:lnSpc>
+                <a:spcPts val="4850"/>
+              </a:lnSpc>
+              <a:buNone/>
+            </a:pPr>
+            <a:r>
+              <a:rPr lang="en-US" sz="3900" b="1" dirty="0">
+                <a:solidFill>
+                  <a:srgbClr val="FFFFFF"/>
+                </a:solidFill>
+                <a:latin typeface="Inter Bold" pitchFamily="34" charset="0"/>
+                <a:ea typeface="Inter Bold" pitchFamily="34" charset="-122"/>
+                <a:cs typeface="Inter Bold" pitchFamily="34" charset="-120"/>
+              </a:rPr>
+              <a:t>Key Takeaways</a:t>
+            </a:r>
+            <a:endParaRPr lang="en-US" sz="3900" dirty="0"/>
+          </a:p>
+        </p:txBody>
+      </p:sp>
+      <p:sp>
+        <p:nvSpPr>
+          <p:cNvPr id="6" name="Shape 2">
+            <a:extLst>
+              <a:ext uri="{FF2B5EF4-FFF2-40B4-BE49-F238E27FC236}">
+                <a16:creationId xmlns:a16="http://schemas.microsoft.com/office/drawing/2014/main" id="{E6500B6C-6A9A-65E0-3C47-59E89E402DD0}"/>
+              </a:ext>
+            </a:extLst>
+          </p:cNvPr>
+          <p:cNvSpPr/>
+          <p:nvPr/>
+        </p:nvSpPr>
+        <p:spPr>
+          <a:xfrm>
+            <a:off x="793790" y="2251472"/>
+            <a:ext cx="3679031" cy="1793796"/>
+          </a:xfrm>
+          <a:prstGeom prst="roundRect">
+            <a:avLst>
+              <a:gd name="adj" fmla="val 4647"/>
+            </a:avLst>
+          </a:prstGeom>
+          <a:solidFill>
+            <a:srgbClr val="110080"/>
+          </a:solidFill>
+          <a:ln w="7620">
+            <a:solidFill>
+              <a:srgbClr val="2A1999"/>
+            </a:solidFill>
+            <a:prstDash val="solid"/>
+          </a:ln>
+        </p:spPr>
+        <p:txBody>
+          <a:bodyPr/>
+          <a:lstStyle/>
+          <a:p>
+            <a:endParaRPr lang="en-US"/>
+          </a:p>
+        </p:txBody>
+      </p:sp>
+      <p:sp>
+        <p:nvSpPr>
+          <p:cNvPr id="7" name="Text 3">
+            <a:extLst>
+              <a:ext uri="{FF2B5EF4-FFF2-40B4-BE49-F238E27FC236}">
+                <a16:creationId xmlns:a16="http://schemas.microsoft.com/office/drawing/2014/main" id="{369A384F-7B3E-D571-F373-B28149F5F89E}"/>
+              </a:ext>
+            </a:extLst>
+          </p:cNvPr>
+          <p:cNvSpPr/>
+          <p:nvPr/>
+        </p:nvSpPr>
+        <p:spPr>
+          <a:xfrm>
+            <a:off x="999768" y="2457450"/>
+            <a:ext cx="3143369" cy="310158"/>
+          </a:xfrm>
+          <a:prstGeom prst="rect">
+            <a:avLst/>
+          </a:prstGeom>
+          <a:noFill/>
+          <a:ln/>
+        </p:spPr>
+        <p:txBody>
+          <a:bodyPr wrap="none" lIns="0" tIns="0" rIns="0" bIns="0" rtlCol="0" anchor="t"/>
+          <a:lstStyle/>
+          <a:p>
+            <a:pPr marL="0" indent="0" algn="l">
+              <a:lnSpc>
+                <a:spcPts val="2400"/>
+              </a:lnSpc>
+              <a:buNone/>
+            </a:pPr>
+            <a:r>
+              <a:rPr lang="en-US" sz="1950" b="1" dirty="0">
+                <a:solidFill>
+                  <a:srgbClr val="E5E0DF"/>
+                </a:solidFill>
+                <a:latin typeface="Inter Bold" pitchFamily="34" charset="0"/>
+                <a:ea typeface="Inter Bold" pitchFamily="34" charset="-122"/>
+                <a:cs typeface="Inter Bold" pitchFamily="34" charset="-120"/>
+              </a:rPr>
+              <a:t>Comprehensive Coverage</a:t>
+            </a:r>
+            <a:endParaRPr lang="en-US" sz="1950" dirty="0"/>
+          </a:p>
+        </p:txBody>
+      </p:sp>
+      <p:sp>
+        <p:nvSpPr>
+          <p:cNvPr id="8" name="Text 4">
+            <a:extLst>
+              <a:ext uri="{FF2B5EF4-FFF2-40B4-BE49-F238E27FC236}">
+                <a16:creationId xmlns:a16="http://schemas.microsoft.com/office/drawing/2014/main" id="{04AA33A9-0BB2-312A-7DFD-C57F1801713E}"/>
+              </a:ext>
+            </a:extLst>
+          </p:cNvPr>
+          <p:cNvSpPr/>
+          <p:nvPr/>
+        </p:nvSpPr>
+        <p:spPr>
+          <a:xfrm>
+            <a:off x="999768" y="2886670"/>
+            <a:ext cx="3267075" cy="952619"/>
+          </a:xfrm>
+          <a:prstGeom prst="rect">
+            <a:avLst/>
+          </a:prstGeom>
+          <a:noFill/>
+          <a:ln/>
+        </p:spPr>
+        <p:txBody>
+          <a:bodyPr wrap="square" lIns="0" tIns="0" rIns="0" bIns="0" rtlCol="0" anchor="t"/>
+          <a:lstStyle/>
+          <a:p>
+            <a:pPr marL="0" indent="0" algn="l">
+              <a:lnSpc>
+                <a:spcPts val="2500"/>
+              </a:lnSpc>
+              <a:buNone/>
+            </a:pPr>
+            <a:r>
+              <a:rPr lang="en-US" sz="1550" dirty="0">
+                <a:solidFill>
+                  <a:srgbClr val="E5E0DF"/>
+                </a:solidFill>
+                <a:latin typeface="Inter" pitchFamily="34" charset="0"/>
+                <a:ea typeface="Inter" pitchFamily="34" charset="-122"/>
+                <a:cs typeface="Inter" pitchFamily="34" charset="-120"/>
+              </a:rPr>
+              <a:t>53 test methods across 8 classes validate critical user flows from browsing to checkout</a:t>
+            </a:r>
+            <a:endParaRPr lang="en-US" sz="1550" dirty="0"/>
+          </a:p>
+        </p:txBody>
+      </p:sp>
+      <p:sp>
+        <p:nvSpPr>
+          <p:cNvPr id="9" name="Shape 5">
+            <a:extLst>
+              <a:ext uri="{FF2B5EF4-FFF2-40B4-BE49-F238E27FC236}">
+                <a16:creationId xmlns:a16="http://schemas.microsoft.com/office/drawing/2014/main" id="{C3D862C9-7A0C-AC8A-E028-8DE73BBD97B2}"/>
+              </a:ext>
+            </a:extLst>
+          </p:cNvPr>
+          <p:cNvSpPr/>
+          <p:nvPr/>
+        </p:nvSpPr>
+        <p:spPr>
+          <a:xfrm>
+            <a:off x="4671179" y="2251472"/>
+            <a:ext cx="3679031" cy="1793796"/>
+          </a:xfrm>
+          <a:prstGeom prst="roundRect">
+            <a:avLst>
+              <a:gd name="adj" fmla="val 4647"/>
+            </a:avLst>
+          </a:prstGeom>
+          <a:solidFill>
+            <a:srgbClr val="110080"/>
+          </a:solidFill>
+          <a:ln w="7620">
+            <a:solidFill>
+              <a:srgbClr val="2A1999"/>
+            </a:solidFill>
+            <a:prstDash val="solid"/>
+          </a:ln>
+        </p:spPr>
+        <p:txBody>
+          <a:bodyPr/>
+          <a:lstStyle/>
+          <a:p>
+            <a:endParaRPr lang="en-US"/>
+          </a:p>
+        </p:txBody>
+      </p:sp>
+      <p:sp>
+        <p:nvSpPr>
+          <p:cNvPr id="10" name="Text 6">
+            <a:extLst>
+              <a:ext uri="{FF2B5EF4-FFF2-40B4-BE49-F238E27FC236}">
+                <a16:creationId xmlns:a16="http://schemas.microsoft.com/office/drawing/2014/main" id="{2BFE7CC6-603C-461B-5909-6DFFAFC47CA7}"/>
+              </a:ext>
+            </a:extLst>
+          </p:cNvPr>
+          <p:cNvSpPr/>
+          <p:nvPr/>
+        </p:nvSpPr>
+        <p:spPr>
+          <a:xfrm>
+            <a:off x="4877157" y="2457450"/>
+            <a:ext cx="2480905" cy="310158"/>
+          </a:xfrm>
+          <a:prstGeom prst="rect">
+            <a:avLst/>
+          </a:prstGeom>
+          <a:noFill/>
+          <a:ln/>
+        </p:spPr>
+        <p:txBody>
+          <a:bodyPr wrap="none" lIns="0" tIns="0" rIns="0" bIns="0" rtlCol="0" anchor="t"/>
+          <a:lstStyle/>
+          <a:p>
+            <a:pPr marL="0" indent="0" algn="l">
+              <a:lnSpc>
+                <a:spcPts val="2400"/>
+              </a:lnSpc>
+              <a:buNone/>
+            </a:pPr>
+            <a:r>
+              <a:rPr lang="en-US" sz="1950" b="1" dirty="0">
+                <a:solidFill>
+                  <a:srgbClr val="E5E0DF"/>
+                </a:solidFill>
+                <a:latin typeface="Inter Bold" pitchFamily="34" charset="0"/>
+                <a:ea typeface="Inter Bold" pitchFamily="34" charset="-122"/>
+                <a:cs typeface="Inter Bold" pitchFamily="34" charset="-120"/>
+              </a:rPr>
+              <a:t>Robust Architecture</a:t>
+            </a:r>
+            <a:endParaRPr lang="en-US" sz="1950" dirty="0"/>
+          </a:p>
+        </p:txBody>
+      </p:sp>
+      <p:sp>
+        <p:nvSpPr>
+          <p:cNvPr id="11" name="Text 7">
+            <a:extLst>
+              <a:ext uri="{FF2B5EF4-FFF2-40B4-BE49-F238E27FC236}">
+                <a16:creationId xmlns:a16="http://schemas.microsoft.com/office/drawing/2014/main" id="{BE42372A-2562-4B36-38E2-DE5CA6769E99}"/>
+              </a:ext>
+            </a:extLst>
+          </p:cNvPr>
+          <p:cNvSpPr/>
+          <p:nvPr/>
+        </p:nvSpPr>
+        <p:spPr>
+          <a:xfrm>
+            <a:off x="4877157" y="2886670"/>
+            <a:ext cx="3267075" cy="952619"/>
+          </a:xfrm>
+          <a:prstGeom prst="rect">
+            <a:avLst/>
+          </a:prstGeom>
+          <a:noFill/>
+          <a:ln/>
+        </p:spPr>
+        <p:txBody>
+          <a:bodyPr wrap="square" lIns="0" tIns="0" rIns="0" bIns="0" rtlCol="0" anchor="t"/>
+          <a:lstStyle/>
+          <a:p>
+            <a:pPr marL="0" indent="0" algn="l">
+              <a:lnSpc>
+                <a:spcPts val="2500"/>
+              </a:lnSpc>
+              <a:buNone/>
+            </a:pPr>
+            <a:r>
+              <a:rPr lang="en-US" sz="1550" dirty="0">
+                <a:solidFill>
+                  <a:srgbClr val="E5E0DF"/>
+                </a:solidFill>
+                <a:latin typeface="Inter" pitchFamily="34" charset="0"/>
+                <a:ea typeface="Inter" pitchFamily="34" charset="-122"/>
+                <a:cs typeface="Inter" pitchFamily="34" charset="-120"/>
+              </a:rPr>
+              <a:t>BaseTest and TestUtils provide reusable infrastructure, reducing code duplication and maintenance</a:t>
+            </a:r>
+            <a:endParaRPr lang="en-US" sz="1550" dirty="0"/>
+          </a:p>
+        </p:txBody>
+      </p:sp>
+      <p:sp>
+        <p:nvSpPr>
+          <p:cNvPr id="12" name="Shape 8">
+            <a:extLst>
+              <a:ext uri="{FF2B5EF4-FFF2-40B4-BE49-F238E27FC236}">
+                <a16:creationId xmlns:a16="http://schemas.microsoft.com/office/drawing/2014/main" id="{E6BC0B37-E042-D490-3566-B53180C26736}"/>
+              </a:ext>
+            </a:extLst>
+          </p:cNvPr>
+          <p:cNvSpPr/>
+          <p:nvPr/>
+        </p:nvSpPr>
+        <p:spPr>
+          <a:xfrm>
+            <a:off x="793790" y="4243626"/>
+            <a:ext cx="7556421" cy="1476256"/>
+          </a:xfrm>
+          <a:prstGeom prst="roundRect">
+            <a:avLst>
+              <a:gd name="adj" fmla="val 5647"/>
+            </a:avLst>
+          </a:prstGeom>
+          <a:solidFill>
+            <a:srgbClr val="110080"/>
+          </a:solidFill>
+          <a:ln w="7620">
+            <a:solidFill>
+              <a:srgbClr val="2A1999"/>
+            </a:solidFill>
+            <a:prstDash val="solid"/>
+          </a:ln>
+        </p:spPr>
+        <p:txBody>
+          <a:bodyPr/>
+          <a:lstStyle/>
+          <a:p>
+            <a:endParaRPr lang="en-US"/>
+          </a:p>
+        </p:txBody>
+      </p:sp>
+      <p:sp>
+        <p:nvSpPr>
+          <p:cNvPr id="13" name="Text 9">
+            <a:extLst>
+              <a:ext uri="{FF2B5EF4-FFF2-40B4-BE49-F238E27FC236}">
+                <a16:creationId xmlns:a16="http://schemas.microsoft.com/office/drawing/2014/main" id="{9E80ADE8-AED6-1643-03CF-2C0DFA9C90C3}"/>
+              </a:ext>
+            </a:extLst>
+          </p:cNvPr>
+          <p:cNvSpPr/>
+          <p:nvPr/>
+        </p:nvSpPr>
+        <p:spPr>
+          <a:xfrm>
+            <a:off x="999768" y="4449604"/>
+            <a:ext cx="2826425" cy="310158"/>
+          </a:xfrm>
+          <a:prstGeom prst="rect">
+            <a:avLst/>
+          </a:prstGeom>
+          <a:noFill/>
+          <a:ln/>
+        </p:spPr>
+        <p:txBody>
+          <a:bodyPr wrap="none" lIns="0" tIns="0" rIns="0" bIns="0" rtlCol="0" anchor="t"/>
+          <a:lstStyle/>
+          <a:p>
+            <a:pPr marL="0" indent="0" algn="l">
+              <a:lnSpc>
+                <a:spcPts val="2400"/>
+              </a:lnSpc>
+              <a:buNone/>
+            </a:pPr>
+            <a:r>
+              <a:rPr lang="en-US" sz="1950" b="1" dirty="0">
+                <a:solidFill>
+                  <a:srgbClr val="E5E0DF"/>
+                </a:solidFill>
+                <a:latin typeface="Inter Bold" pitchFamily="34" charset="0"/>
+                <a:ea typeface="Inter Bold" pitchFamily="34" charset="-122"/>
+                <a:cs typeface="Inter Bold" pitchFamily="34" charset="-120"/>
+              </a:rPr>
+              <a:t>Real-World Constraints</a:t>
+            </a:r>
+            <a:endParaRPr lang="en-US" sz="1950" dirty="0"/>
+          </a:p>
+        </p:txBody>
+      </p:sp>
+      <p:sp>
+        <p:nvSpPr>
+          <p:cNvPr id="14" name="Text 10">
+            <a:extLst>
+              <a:ext uri="{FF2B5EF4-FFF2-40B4-BE49-F238E27FC236}">
+                <a16:creationId xmlns:a16="http://schemas.microsoft.com/office/drawing/2014/main" id="{EE11742D-127E-5132-D156-6D88824AF9CD}"/>
+              </a:ext>
+            </a:extLst>
+          </p:cNvPr>
+          <p:cNvSpPr/>
+          <p:nvPr/>
+        </p:nvSpPr>
+        <p:spPr>
+          <a:xfrm>
+            <a:off x="999768" y="4878824"/>
+            <a:ext cx="7144464" cy="635079"/>
+          </a:xfrm>
+          <a:prstGeom prst="rect">
+            <a:avLst/>
+          </a:prstGeom>
+          <a:noFill/>
+          <a:ln/>
+        </p:spPr>
+        <p:txBody>
+          <a:bodyPr wrap="square" lIns="0" tIns="0" rIns="0" bIns="0" rtlCol="0" anchor="t"/>
+          <a:lstStyle/>
+          <a:p>
+            <a:pPr marL="0" indent="0" algn="l">
+              <a:lnSpc>
+                <a:spcPts val="2500"/>
+              </a:lnSpc>
+              <a:buNone/>
+            </a:pPr>
+            <a:r>
+              <a:rPr lang="en-US" sz="1550" dirty="0">
+                <a:solidFill>
+                  <a:srgbClr val="E5E0DF"/>
+                </a:solidFill>
+                <a:latin typeface="Inter" pitchFamily="34" charset="0"/>
+                <a:ea typeface="Inter" pitchFamily="34" charset="-122"/>
+                <a:cs typeface="Inter" pitchFamily="34" charset="-120"/>
+              </a:rPr>
+              <a:t>Successfully handled GDPR, CAPTCHA, age-gates, lazy-loading, and anti-automation detection</a:t>
+            </a:r>
+            <a:endParaRPr lang="en-US" sz="1550" dirty="0"/>
+          </a:p>
+        </p:txBody>
+      </p:sp>
+      <p:sp>
+        <p:nvSpPr>
+          <p:cNvPr id="15" name="Text 11">
+            <a:extLst>
+              <a:ext uri="{FF2B5EF4-FFF2-40B4-BE49-F238E27FC236}">
+                <a16:creationId xmlns:a16="http://schemas.microsoft.com/office/drawing/2014/main" id="{2E81F54F-BF5C-27A8-22EB-33A71C42497D}"/>
+              </a:ext>
+            </a:extLst>
+          </p:cNvPr>
+          <p:cNvSpPr/>
+          <p:nvPr/>
+        </p:nvSpPr>
+        <p:spPr>
+          <a:xfrm>
+            <a:off x="793790" y="5943124"/>
+            <a:ext cx="7556421" cy="952619"/>
+          </a:xfrm>
+          <a:prstGeom prst="rect">
+            <a:avLst/>
+          </a:prstGeom>
+          <a:noFill/>
+          <a:ln/>
+        </p:spPr>
+        <p:txBody>
+          <a:bodyPr wrap="square" lIns="0" tIns="0" rIns="0" bIns="0" rtlCol="0" anchor="t"/>
+          <a:lstStyle/>
+          <a:p>
+            <a:pPr marL="0" indent="0" algn="l">
+              <a:lnSpc>
+                <a:spcPts val="2500"/>
+              </a:lnSpc>
+              <a:buNone/>
+            </a:pPr>
+            <a:r>
+              <a:rPr lang="en-US" sz="1550" dirty="0">
+                <a:solidFill>
+                  <a:srgbClr val="E5E0DF"/>
+                </a:solidFill>
+                <a:latin typeface="Inter" pitchFamily="34" charset="0"/>
+                <a:ea typeface="Inter" pitchFamily="34" charset="-122"/>
+                <a:cs typeface="Inter" pitchFamily="34" charset="-120"/>
+              </a:rPr>
+              <a:t>This automated test suite establishes a repeatable regression baseline for GOG.com, improving product quality confidence and reducing manual testing burden.</a:t>
+            </a:r>
+            <a:endParaRPr lang="en-US" sz="1550" dirty="0"/>
+          </a:p>
+        </p:txBody>
+      </p:sp>
+    </p:spTree>
+    <p:extLst>
+      <p:ext uri="{BB962C8B-B14F-4D97-AF65-F5344CB8AC3E}">
+        <p14:creationId xmlns:p14="http://schemas.microsoft.com/office/powerpoint/2010/main" val="4250509548"/>
+      </p:ext>
+    </p:extLst>
+  </p:cSld>
+  <p:clrMapOvr>
+    <a:masterClrMapping/>
+  </p:clrMapOvr>
+</p:sld>
+</file>
+
+<file path=ppt/slides/slide12.xml><?xml version="1.0" encoding="utf-8"?>
+<p:sld xmlns:a="http://schemas.openxmlformats.org/drawingml/2006/main" xmlns:r="http://schemas.openxmlformats.org/officeDocument/2006/relationships" xmlns:p="http://schemas.openxmlformats.org/presentationml/2006/main">
+  <p:cSld>
+    <p:spTree>
+      <p:nvGrpSpPr>
         <p:cNvPr id="1" name=""/>
         <p:cNvGrpSpPr/>
         <p:nvPr/>
@@ -3159,10 +4028,198 @@
           <a:chExt cx="0" cy="0"/>
         </a:xfrm>
       </p:grpSpPr>
+      <p:pic>
+        <p:nvPicPr>
+          <p:cNvPr id="3" name="Picture 2">
+            <a:extLst>
+              <a:ext uri="{FF2B5EF4-FFF2-40B4-BE49-F238E27FC236}">
+                <a16:creationId xmlns:a16="http://schemas.microsoft.com/office/drawing/2014/main" id="{9AC9DA1E-25B3-B8DB-32D1-D828C6418390}"/>
+              </a:ext>
+            </a:extLst>
+          </p:cNvPr>
+          <p:cNvPicPr/>
+          <p:nvPr/>
+        </p:nvPicPr>
+        <p:blipFill>
+          <a:blip r:embed="rId2"/>
+          <a:stretch>
+            <a:fillRect/>
+          </a:stretch>
+        </p:blipFill>
+        <p:spPr>
+          <a:xfrm>
+            <a:off x="11620080" y="7715178"/>
+            <a:ext cx="3010320" cy="514422"/>
+          </a:xfrm>
+          <a:prstGeom prst="rect">
+            <a:avLst/>
+          </a:prstGeom>
+        </p:spPr>
+      </p:pic>
+      <p:sp>
+        <p:nvSpPr>
+          <p:cNvPr id="4" name="Text 1">
+            <a:extLst>
+              <a:ext uri="{FF2B5EF4-FFF2-40B4-BE49-F238E27FC236}">
+                <a16:creationId xmlns:a16="http://schemas.microsoft.com/office/drawing/2014/main" id="{795315F3-4A4C-1431-1821-39024AEA05FE}"/>
+              </a:ext>
+            </a:extLst>
+          </p:cNvPr>
+          <p:cNvSpPr/>
+          <p:nvPr/>
+        </p:nvSpPr>
+        <p:spPr>
+          <a:xfrm>
+            <a:off x="793790" y="1333738"/>
+            <a:ext cx="4961811" cy="620078"/>
+          </a:xfrm>
+          <a:prstGeom prst="rect">
+            <a:avLst/>
+          </a:prstGeom>
+          <a:noFill/>
+          <a:ln/>
+        </p:spPr>
+        <p:txBody>
+          <a:bodyPr wrap="none" lIns="0" tIns="0" rIns="0" bIns="0" rtlCol="0" anchor="t"/>
+          <a:lstStyle/>
+          <a:p>
+            <a:pPr marL="0" indent="0" algn="l">
+              <a:lnSpc>
+                <a:spcPts val="4850"/>
+              </a:lnSpc>
+              <a:buNone/>
+            </a:pPr>
+            <a:r>
+              <a:rPr lang="en-US" sz="3900" b="1" dirty="0">
+                <a:solidFill>
+                  <a:srgbClr val="FFFFFF"/>
+                </a:solidFill>
+                <a:latin typeface="Inter Bold" pitchFamily="34" charset="0"/>
+                <a:ea typeface="Inter Bold" pitchFamily="34" charset="-122"/>
+                <a:cs typeface="Inter Bold" pitchFamily="34" charset="-120"/>
+              </a:rPr>
+              <a:t>Future Improvements</a:t>
+            </a:r>
+            <a:endParaRPr lang="en-US" sz="3900" dirty="0"/>
+          </a:p>
+        </p:txBody>
+      </p:sp>
     </p:spTree>
     <p:extLst>
       <p:ext uri="{BB962C8B-B14F-4D97-AF65-F5344CB8AC3E}">
-        <p14:creationId xmlns:p14="http://schemas.microsoft.com/office/powerpoint/2010/main" val="1212672210"/>
+        <p14:creationId xmlns:p14="http://schemas.microsoft.com/office/powerpoint/2010/main" val="1547293548"/>
+      </p:ext>
+    </p:extLst>
+  </p:cSld>
+  <p:clrMapOvr>
+    <a:masterClrMapping/>
+  </p:clrMapOvr>
+</p:sld>
+</file>
+
+<file path=ppt/slides/slide13.xml><?xml version="1.0" encoding="utf-8"?>
+<p:sld xmlns:a="http://schemas.openxmlformats.org/drawingml/2006/main" xmlns:r="http://schemas.openxmlformats.org/officeDocument/2006/relationships" xmlns:p="http://schemas.openxmlformats.org/presentationml/2006/main">
+  <p:cSld>
+    <p:spTree>
+      <p:nvGrpSpPr>
+        <p:cNvPr id="1" name="">
+          <a:extLst>
+            <a:ext uri="{FF2B5EF4-FFF2-40B4-BE49-F238E27FC236}">
+              <a16:creationId xmlns:a16="http://schemas.microsoft.com/office/drawing/2014/main" id="{5DE67DC1-25F9-D168-231A-5F62C702F798}"/>
+            </a:ext>
+          </a:extLst>
+        </p:cNvPr>
+        <p:cNvGrpSpPr/>
+        <p:nvPr/>
+      </p:nvGrpSpPr>
+      <p:grpSpPr>
+        <a:xfrm>
+          <a:off x="0" y="0"/>
+          <a:ext cx="0" cy="0"/>
+          <a:chOff x="0" y="0"/>
+          <a:chExt cx="0" cy="0"/>
+        </a:xfrm>
+      </p:grpSpPr>
+      <p:pic>
+        <p:nvPicPr>
+          <p:cNvPr id="3" name="Picture 2">
+            <a:extLst>
+              <a:ext uri="{FF2B5EF4-FFF2-40B4-BE49-F238E27FC236}">
+                <a16:creationId xmlns:a16="http://schemas.microsoft.com/office/drawing/2014/main" id="{EC60CFC5-3A9C-76F6-950F-F2F6F5611650}"/>
+              </a:ext>
+            </a:extLst>
+          </p:cNvPr>
+          <p:cNvPicPr/>
+          <p:nvPr/>
+        </p:nvPicPr>
+        <p:blipFill>
+          <a:blip r:embed="rId2"/>
+          <a:stretch>
+            <a:fillRect/>
+          </a:stretch>
+        </p:blipFill>
+        <p:spPr>
+          <a:xfrm>
+            <a:off x="11620080" y="7715178"/>
+            <a:ext cx="3010320" cy="514422"/>
+          </a:xfrm>
+          <a:prstGeom prst="rect">
+            <a:avLst/>
+          </a:prstGeom>
+        </p:spPr>
+      </p:pic>
+      <p:sp>
+        <p:nvSpPr>
+          <p:cNvPr id="4" name="Text 1">
+            <a:extLst>
+              <a:ext uri="{FF2B5EF4-FFF2-40B4-BE49-F238E27FC236}">
+                <a16:creationId xmlns:a16="http://schemas.microsoft.com/office/drawing/2014/main" id="{00F4F32A-EA87-6BD3-8429-D0B1A87F383F}"/>
+              </a:ext>
+            </a:extLst>
+          </p:cNvPr>
+          <p:cNvSpPr/>
+          <p:nvPr/>
+        </p:nvSpPr>
+        <p:spPr>
+          <a:xfrm>
+            <a:off x="793790" y="1333738"/>
+            <a:ext cx="4961811" cy="620078"/>
+          </a:xfrm>
+          <a:prstGeom prst="rect">
+            <a:avLst/>
+          </a:prstGeom>
+          <a:noFill/>
+          <a:ln/>
+        </p:spPr>
+        <p:txBody>
+          <a:bodyPr wrap="none" lIns="0" tIns="0" rIns="0" bIns="0" rtlCol="0" anchor="t"/>
+          <a:lstStyle/>
+          <a:p>
+            <a:pPr marL="0" indent="0" algn="l">
+              <a:lnSpc>
+                <a:spcPts val="4850"/>
+              </a:lnSpc>
+              <a:buNone/>
+            </a:pPr>
+            <a:r>
+              <a:rPr lang="en-US" sz="3900" b="1" dirty="0">
+                <a:solidFill>
+                  <a:srgbClr val="FFFFFF"/>
+                </a:solidFill>
+                <a:latin typeface="Inter Bold" pitchFamily="34" charset="0"/>
+                <a:ea typeface="Inter Bold" pitchFamily="34" charset="-122"/>
+                <a:cs typeface="Inter Bold" pitchFamily="34" charset="-120"/>
+              </a:rPr>
+              <a:t>Conclusion</a:t>
+            </a:r>
+            <a:endParaRPr lang="en-US" sz="3900" dirty="0"/>
+          </a:p>
+        </p:txBody>
+      </p:sp>
+    </p:spTree>
+    <p:extLst>
+      <p:ext uri="{BB962C8B-B14F-4D97-AF65-F5344CB8AC3E}">
+        <p14:creationId xmlns:p14="http://schemas.microsoft.com/office/powerpoint/2010/main" val="2124667151"/>
       </p:ext>
     </p:extLst>
   </p:cSld>
@@ -3981,6 +5038,34 @@
           </a:p>
         </p:txBody>
       </p:sp>
+      <p:pic>
+        <p:nvPicPr>
+          <p:cNvPr id="24" name="Picture 23">
+            <a:extLst>
+              <a:ext uri="{FF2B5EF4-FFF2-40B4-BE49-F238E27FC236}">
+                <a16:creationId xmlns:a16="http://schemas.microsoft.com/office/drawing/2014/main" id="{18A7C5FB-B504-B4FE-8895-1B809187D571}"/>
+              </a:ext>
+            </a:extLst>
+          </p:cNvPr>
+          <p:cNvPicPr/>
+          <p:nvPr/>
+        </p:nvPicPr>
+        <p:blipFill>
+          <a:blip r:embed="rId7"/>
+          <a:stretch>
+            <a:fillRect/>
+          </a:stretch>
+        </p:blipFill>
+        <p:spPr>
+          <a:xfrm>
+            <a:off x="11620080" y="7715178"/>
+            <a:ext cx="3010320" cy="514422"/>
+          </a:xfrm>
+          <a:prstGeom prst="rect">
+            <a:avLst/>
+          </a:prstGeom>
+        </p:spPr>
+      </p:pic>
     </p:spTree>
   </p:cSld>
   <p:clrMapOvr>
@@ -4912,6 +5997,34 @@
           </a:p>
         </p:txBody>
       </p:sp>
+      <p:pic>
+        <p:nvPicPr>
+          <p:cNvPr id="27" name="Picture 26">
+            <a:extLst>
+              <a:ext uri="{FF2B5EF4-FFF2-40B4-BE49-F238E27FC236}">
+                <a16:creationId xmlns:a16="http://schemas.microsoft.com/office/drawing/2014/main" id="{D8917F21-0991-B79F-02DB-ECBA3B61B84F}"/>
+              </a:ext>
+            </a:extLst>
+          </p:cNvPr>
+          <p:cNvPicPr/>
+          <p:nvPr/>
+        </p:nvPicPr>
+        <p:blipFill>
+          <a:blip r:embed="rId4"/>
+          <a:stretch>
+            <a:fillRect/>
+          </a:stretch>
+        </p:blipFill>
+        <p:spPr>
+          <a:xfrm>
+            <a:off x="11620080" y="7715178"/>
+            <a:ext cx="3010320" cy="514422"/>
+          </a:xfrm>
+          <a:prstGeom prst="rect">
+            <a:avLst/>
+          </a:prstGeom>
+        </p:spPr>
+      </p:pic>
     </p:spTree>
   </p:cSld>
   <p:clrMapOvr>
@@ -5381,6 +6494,34 @@
           </a:p>
         </p:txBody>
       </p:sp>
+      <p:pic>
+        <p:nvPicPr>
+          <p:cNvPr id="9" name="Picture 8">
+            <a:extLst>
+              <a:ext uri="{FF2B5EF4-FFF2-40B4-BE49-F238E27FC236}">
+                <a16:creationId xmlns:a16="http://schemas.microsoft.com/office/drawing/2014/main" id="{2B000B29-4400-6104-3BB4-A902716E0686}"/>
+              </a:ext>
+            </a:extLst>
+          </p:cNvPr>
+          <p:cNvPicPr/>
+          <p:nvPr/>
+        </p:nvPicPr>
+        <p:blipFill>
+          <a:blip r:embed="rId3"/>
+          <a:stretch>
+            <a:fillRect/>
+          </a:stretch>
+        </p:blipFill>
+        <p:spPr>
+          <a:xfrm>
+            <a:off x="11620080" y="7715178"/>
+            <a:ext cx="3010320" cy="514422"/>
+          </a:xfrm>
+          <a:prstGeom prst="rect">
+            <a:avLst/>
+          </a:prstGeom>
+        </p:spPr>
+      </p:pic>
     </p:spTree>
   </p:cSld>
   <p:clrMapOvr>
@@ -6474,6 +7615,34 @@
           </a:p>
         </p:txBody>
       </p:sp>
+      <p:pic>
+        <p:nvPicPr>
+          <p:cNvPr id="30" name="Picture 29">
+            <a:extLst>
+              <a:ext uri="{FF2B5EF4-FFF2-40B4-BE49-F238E27FC236}">
+                <a16:creationId xmlns:a16="http://schemas.microsoft.com/office/drawing/2014/main" id="{94123A21-2192-F206-E68A-3635B3B33AB2}"/>
+              </a:ext>
+            </a:extLst>
+          </p:cNvPr>
+          <p:cNvPicPr/>
+          <p:nvPr/>
+        </p:nvPicPr>
+        <p:blipFill>
+          <a:blip r:embed="rId12"/>
+          <a:stretch>
+            <a:fillRect/>
+          </a:stretch>
+        </p:blipFill>
+        <p:spPr>
+          <a:xfrm>
+            <a:off x="11620080" y="7715178"/>
+            <a:ext cx="3010320" cy="514422"/>
+          </a:xfrm>
+          <a:prstGeom prst="rect">
+            <a:avLst/>
+          </a:prstGeom>
+        </p:spPr>
+      </p:pic>
     </p:spTree>
   </p:cSld>
   <p:clrMapOvr>
@@ -6841,7 +8010,7 @@
         </p:nvSpPr>
         <p:spPr>
           <a:xfrm>
-            <a:off x="719376" y="5437346"/>
+            <a:off x="662702" y="5437346"/>
             <a:ext cx="13191649" cy="2262426"/>
           </a:xfrm>
           <a:prstGeom prst="rect">
@@ -7002,6 +8171,34 @@
           </a:p>
         </p:txBody>
       </p:sp>
+      <p:pic>
+        <p:nvPicPr>
+          <p:cNvPr id="8" name="Picture 7">
+            <a:extLst>
+              <a:ext uri="{FF2B5EF4-FFF2-40B4-BE49-F238E27FC236}">
+                <a16:creationId xmlns:a16="http://schemas.microsoft.com/office/drawing/2014/main" id="{769CC082-DB5E-7448-1187-C7C02E72CE0C}"/>
+              </a:ext>
+            </a:extLst>
+          </p:cNvPr>
+          <p:cNvPicPr/>
+          <p:nvPr/>
+        </p:nvPicPr>
+        <p:blipFill>
+          <a:blip r:embed="rId4"/>
+          <a:stretch>
+            <a:fillRect/>
+          </a:stretch>
+        </p:blipFill>
+        <p:spPr>
+          <a:xfrm>
+            <a:off x="11620080" y="7715178"/>
+            <a:ext cx="3010320" cy="514422"/>
+          </a:xfrm>
+          <a:prstGeom prst="rect">
+            <a:avLst/>
+          </a:prstGeom>
+        </p:spPr>
+      </p:pic>
     </p:spTree>
   </p:cSld>
   <p:clrMapOvr>
@@ -7951,6 +9148,36 @@
           </a:p>
         </p:txBody>
       </p:sp>
+      <p:pic>
+        <p:nvPicPr>
+          <p:cNvPr id="28" name="Picture 27">
+            <a:extLst>
+              <a:ext uri="{FF2B5EF4-FFF2-40B4-BE49-F238E27FC236}">
+                <a16:creationId xmlns:a16="http://schemas.microsoft.com/office/drawing/2014/main" id="{C5EB001D-19EB-60E0-9084-1C7339D931E5}"/>
+              </a:ext>
+            </a:extLst>
+          </p:cNvPr>
+          <p:cNvPicPr>
+            <a:picLocks noGrp="1" noRot="1" noChangeAspect="1" noMove="1" noResize="1" noEditPoints="1" noAdjustHandles="1" noChangeArrowheads="1" noChangeShapeType="1" noCrop="1"/>
+          </p:cNvPicPr>
+          <p:nvPr/>
+        </p:nvPicPr>
+        <p:blipFill>
+          <a:blip r:embed="rId3"/>
+          <a:stretch>
+            <a:fillRect/>
+          </a:stretch>
+        </p:blipFill>
+        <p:spPr>
+          <a:xfrm>
+            <a:off x="11620080" y="7715178"/>
+            <a:ext cx="3010320" cy="514422"/>
+          </a:xfrm>
+          <a:prstGeom prst="rect">
+            <a:avLst/>
+          </a:prstGeom>
+        </p:spPr>
+      </p:pic>
     </p:spTree>
   </p:cSld>
   <p:clrMapOvr>
